--- a/graduation-project/绘图.pptx
+++ b/graduation-project/绘图.pptx
@@ -10,14 +10,15 @@
     <p:sldId id="260" r:id="rId5"/>
     <p:sldId id="258" r:id="rId6"/>
     <p:sldId id="263" r:id="rId7"/>
-    <p:sldId id="259" r:id="rId8"/>
-    <p:sldId id="261" r:id="rId9"/>
-    <p:sldId id="262" r:id="rId10"/>
+    <p:sldId id="264" r:id="rId8"/>
+    <p:sldId id="259" r:id="rId9"/>
+    <p:sldId id="261" r:id="rId10"/>
+    <p:sldId id="262" r:id="rId11"/>
   </p:sldIdLst>
   <p:sldSz cx="12192000" cy="6858000"/>
   <p:notesSz cx="6858000" cy="9144000"/>
   <p:custDataLst>
-    <p:tags r:id="rId14"/>
+    <p:tags r:id="rId15"/>
   </p:custDataLst>
   <p:defaultTextStyle>
     <a:defPPr>
@@ -122,7 +123,7 @@
             <a:srgbClr val="A4A3A4"/>
           </p15:clr>
         </p15:guide>
-        <p15:guide id="2" pos="3810" userDrawn="1">
+        <p15:guide id="2" pos="3838" userDrawn="1">
           <p15:clr>
             <a:srgbClr val="A4A3A4"/>
           </p15:clr>
@@ -6116,7 +6117,28 @@
                               <a:latin typeface="Times New Roman" panose="02020603050405020304" charset="0"/>
                               <a:cs typeface="Times New Roman" panose="02020603050405020304" charset="0"/>
                             </a:rPr>
-                            <a:t>7:     for j = i+1 to n do</a:t>
+                            <a:t>7:     </a:t>
+                          </a:r>
+                          <a:r>
+                            <a:rPr lang="en-US" altLang="zh-CN" sz="1400" b="1">
+                              <a:latin typeface="Times New Roman" panose="02020603050405020304" charset="0"/>
+                              <a:cs typeface="Times New Roman" panose="02020603050405020304" charset="0"/>
+                            </a:rPr>
+                            <a:t>for</a:t>
+                          </a:r>
+                          <a:r>
+                            <a:rPr lang="en-US" altLang="zh-CN" sz="1400" b="0">
+                              <a:latin typeface="Times New Roman" panose="02020603050405020304" charset="0"/>
+                              <a:cs typeface="Times New Roman" panose="02020603050405020304" charset="0"/>
+                            </a:rPr>
+                            <a:t> j = i+1 to n </a:t>
+                          </a:r>
+                          <a:r>
+                            <a:rPr lang="en-US" altLang="zh-CN" sz="1400" b="1">
+                              <a:latin typeface="Times New Roman" panose="02020603050405020304" charset="0"/>
+                              <a:cs typeface="Times New Roman" panose="02020603050405020304" charset="0"/>
+                            </a:rPr>
+                            <a:t>do</a:t>
                           </a:r>
                           <a:endParaRPr lang="en-US" altLang="zh-CN" sz="1400" b="0">
                             <a:latin typeface="Times New Roman" panose="02020603050405020304" charset="0"/>
@@ -6135,7 +6157,28 @@
                               <a:latin typeface="Times New Roman" panose="02020603050405020304" charset="0"/>
                               <a:cs typeface="Times New Roman" panose="02020603050405020304" charset="0"/>
                             </a:rPr>
-                            <a:t>8:         for k = i+1 to n do</a:t>
+                            <a:t>8:         </a:t>
+                          </a:r>
+                          <a:r>
+                            <a:rPr lang="en-US" altLang="zh-CN" sz="1400" b="1">
+                              <a:latin typeface="Times New Roman" panose="02020603050405020304" charset="0"/>
+                              <a:cs typeface="Times New Roman" panose="02020603050405020304" charset="0"/>
+                            </a:rPr>
+                            <a:t>for</a:t>
+                          </a:r>
+                          <a:r>
+                            <a:rPr lang="en-US" altLang="zh-CN" sz="1400" b="0">
+                              <a:latin typeface="Times New Roman" panose="02020603050405020304" charset="0"/>
+                              <a:cs typeface="Times New Roman" panose="02020603050405020304" charset="0"/>
+                            </a:rPr>
+                            <a:t> k = i+1 to n </a:t>
+                          </a:r>
+                          <a:r>
+                            <a:rPr lang="en-US" altLang="zh-CN" sz="1400" b="1">
+                              <a:latin typeface="Times New Roman" panose="02020603050405020304" charset="0"/>
+                              <a:cs typeface="Times New Roman" panose="02020603050405020304" charset="0"/>
+                            </a:rPr>
+                            <a:t>do</a:t>
                           </a:r>
                           <a:endParaRPr lang="en-US" altLang="zh-CN" sz="1400" b="0">
                             <a:latin typeface="Times New Roman" panose="02020603050405020304" charset="0"/>
@@ -7442,7 +7485,28 @@
                               <a:latin typeface="Times New Roman" panose="02020603050405020304" charset="0"/>
                               <a:cs typeface="Times New Roman" panose="02020603050405020304" charset="0"/>
                             </a:rPr>
-                            <a:t>7:     for j = i+1 to n do</a:t>
+                            <a:t>7:     </a:t>
+                          </a:r>
+                          <a:r>
+                            <a:rPr lang="en-US" altLang="zh-CN" sz="1400" b="1">
+                              <a:latin typeface="Times New Roman" panose="02020603050405020304" charset="0"/>
+                              <a:cs typeface="Times New Roman" panose="02020603050405020304" charset="0"/>
+                            </a:rPr>
+                            <a:t>for</a:t>
+                          </a:r>
+                          <a:r>
+                            <a:rPr lang="en-US" altLang="zh-CN" sz="1400" b="0">
+                              <a:latin typeface="Times New Roman" panose="02020603050405020304" charset="0"/>
+                              <a:cs typeface="Times New Roman" panose="02020603050405020304" charset="0"/>
+                            </a:rPr>
+                            <a:t> j = i+1 to n </a:t>
+                          </a:r>
+                          <a:r>
+                            <a:rPr lang="en-US" altLang="zh-CN" sz="1400" b="1">
+                              <a:latin typeface="Times New Roman" panose="02020603050405020304" charset="0"/>
+                              <a:cs typeface="Times New Roman" panose="02020603050405020304" charset="0"/>
+                            </a:rPr>
+                            <a:t>do</a:t>
                           </a:r>
                           <a:endParaRPr lang="en-US" altLang="zh-CN" sz="1400" b="0">
                             <a:latin typeface="Times New Roman" panose="02020603050405020304" charset="0"/>
@@ -7461,7 +7525,28 @@
                               <a:latin typeface="Times New Roman" panose="02020603050405020304" charset="0"/>
                               <a:cs typeface="Times New Roman" panose="02020603050405020304" charset="0"/>
                             </a:rPr>
-                            <a:t>8:         for k = i+1 to n do</a:t>
+                            <a:t>8:         </a:t>
+                          </a:r>
+                          <a:r>
+                            <a:rPr lang="en-US" altLang="zh-CN" sz="1400" b="1">
+                              <a:latin typeface="Times New Roman" panose="02020603050405020304" charset="0"/>
+                              <a:cs typeface="Times New Roman" panose="02020603050405020304" charset="0"/>
+                            </a:rPr>
+                            <a:t>for </a:t>
+                          </a:r>
+                          <a:r>
+                            <a:rPr lang="en-US" altLang="zh-CN" sz="1400" b="0">
+                              <a:latin typeface="Times New Roman" panose="02020603050405020304" charset="0"/>
+                              <a:cs typeface="Times New Roman" panose="02020603050405020304" charset="0"/>
+                            </a:rPr>
+                            <a:t>k = i+1 to n </a:t>
+                          </a:r>
+                          <a:r>
+                            <a:rPr lang="en-US" altLang="zh-CN" sz="1400" b="1">
+                              <a:latin typeface="Times New Roman" panose="02020603050405020304" charset="0"/>
+                              <a:cs typeface="Times New Roman" panose="02020603050405020304" charset="0"/>
+                            </a:rPr>
+                            <a:t>do</a:t>
                           </a:r>
                           <a:endParaRPr lang="en-US" altLang="zh-CN" sz="1400" b="0">
                             <a:latin typeface="Times New Roman" panose="02020603050405020304" charset="0"/>
@@ -7992,16 +8077,16 @@
                               <a:latin typeface="Times New Roman" panose="02020603050405020304" charset="0"/>
                               <a:cs typeface="Times New Roman" panose="02020603050405020304" charset="0"/>
                             </a:rPr>
-                            <a:t>：块三角</a:t>
+                            <a:t>：块三角求解</a:t>
                           </a:r>
                           <a:r>
-                            <a:rPr lang="zh-CN" altLang="en-US">
+                            <a:rPr lang="en-US" altLang="zh-CN">
                               <a:latin typeface="Times New Roman" panose="02020603050405020304" charset="0"/>
                               <a:cs typeface="Times New Roman" panose="02020603050405020304" charset="0"/>
                             </a:rPr>
-                            <a:t>求解</a:t>
+                            <a:t>1</a:t>
                           </a:r>
-                          <a:endParaRPr lang="zh-CN" altLang="en-US">
+                          <a:endParaRPr lang="en-US" altLang="zh-CN">
                             <a:latin typeface="Times New Roman" panose="02020603050405020304" charset="0"/>
                             <a:cs typeface="Times New Roman" panose="02020603050405020304" charset="0"/>
                           </a:endParaRPr>
@@ -8061,7 +8146,14 @@
                               <a:latin typeface="Times New Roman" panose="02020603050405020304" charset="0"/>
                               <a:cs typeface="Times New Roman" panose="02020603050405020304" charset="0"/>
                             </a:rPr>
-                            <a:t>a n*n block matrix A</a:t>
+                            <a:t>a n*n block matrix B, a n*n block matrix L(low </a:t>
+                          </a:r>
+                          <a:r>
+                            <a:rPr lang="en-US" altLang="zh-CN" sz="1400" b="0">
+                              <a:latin typeface="Times New Roman" panose="02020603050405020304" charset="0"/>
+                              <a:cs typeface="Times New Roman" panose="02020603050405020304" charset="0"/>
+                            </a:rPr>
+                            <a:t>triangle)</a:t>
                           </a:r>
                           <a:endParaRPr lang="en-US" altLang="zh-CN" sz="1400" b="0">
                             <a:latin typeface="Times New Roman" panose="02020603050405020304" charset="0"/>
@@ -8080,35 +8172,7 @@
                               <a:latin typeface="Times New Roman" panose="02020603050405020304" charset="0"/>
                               <a:cs typeface="Times New Roman" panose="02020603050405020304" charset="0"/>
                             </a:rPr>
-                            <a:t>Output: </a:t>
-                          </a:r>
-                          <a:r>
-                            <a:rPr lang="en-US" altLang="zh-CN" sz="1400" b="0">
-                              <a:latin typeface="Times New Roman" panose="02020603050405020304" charset="0"/>
-                              <a:cs typeface="Times New Roman" panose="02020603050405020304" charset="0"/>
-                            </a:rPr>
-                            <a:t>L U  //</a:t>
-                          </a:r>
-                          <a:r>
-                            <a:rPr lang="zh-CN" altLang="en-US" sz="1400" b="0">
-                              <a:latin typeface="Times New Roman" panose="02020603050405020304" charset="0"/>
-                              <a:cs typeface="Times New Roman" panose="02020603050405020304" charset="0"/>
-                            </a:rPr>
-                            <a:t>使用</a:t>
-                          </a:r>
-                          <a:r>
-                            <a:rPr lang="en-US" altLang="zh-CN" sz="1400" b="0">
-                              <a:latin typeface="Times New Roman" panose="02020603050405020304" charset="0"/>
-                              <a:cs typeface="Times New Roman" panose="02020603050405020304" charset="0"/>
-                            </a:rPr>
-                            <a:t>A</a:t>
-                          </a:r>
-                          <a:r>
-                            <a:rPr lang="zh-CN" altLang="en-US" sz="1400" b="0">
-                              <a:latin typeface="Times New Roman" panose="02020603050405020304" charset="0"/>
-                              <a:cs typeface="Times New Roman" panose="02020603050405020304" charset="0"/>
-                            </a:rPr>
-                            <a:t>矩阵的内存</a:t>
+                            <a:t>Output: X // LX=B</a:t>
                           </a:r>
                           <a:endParaRPr lang="en-US" altLang="zh-CN" sz="1400" b="0">
                             <a:latin typeface="Times New Roman" panose="02020603050405020304" charset="0"/>
@@ -8169,163 +8233,26 @@
                             </a:rPr>
                             <a:t>2:     </a:t>
                           </a:r>
-                          <a14:m>
-                            <m:oMath xmlns:m="http://schemas.openxmlformats.org/officeDocument/2006/math">
-                              <m:sSub>
-                                <m:sSubPr>
-                                  <m:ctrlPr>
-                                    <a:rPr lang="en-US" altLang="zh-CN" sz="1400" b="0" i="1">
-                                      <a:latin typeface="Cambria Math" panose="02040503050406030204" charset="0"/>
-                                      <a:cs typeface="Cambria Math" panose="02040503050406030204" charset="0"/>
-                                    </a:rPr>
-                                  </m:ctrlPr>
-                                </m:sSubPr>
-                                <m:e>
-                                  <m:r>
-                                    <a:rPr lang="en-US" altLang="zh-CN" sz="1400" b="0" i="1">
-                                      <a:latin typeface="Cambria Math" panose="02040503050406030204" charset="0"/>
-                                      <a:cs typeface="Cambria Math" panose="02040503050406030204" charset="0"/>
-                                    </a:rPr>
-                                    <m:t>𝐴</m:t>
-                                  </m:r>
-                                </m:e>
-                                <m:sub>
-                                  <m:r>
-                                    <a:rPr lang="en-US" altLang="zh-CN" sz="1400" b="0" i="1">
-                                      <a:latin typeface="Cambria Math" panose="02040503050406030204" charset="0"/>
-                                      <a:cs typeface="Cambria Math" panose="02040503050406030204" charset="0"/>
-                                    </a:rPr>
-                                    <m:t>𝑖</m:t>
-                                  </m:r>
-                                  <m:r>
-                                    <a:rPr lang="en-US" altLang="zh-CN" sz="1400" b="0" i="1">
-                                      <a:latin typeface="Cambria Math" panose="02040503050406030204" charset="0"/>
-                                      <a:cs typeface="Cambria Math" panose="02040503050406030204" charset="0"/>
-                                    </a:rPr>
-                                    <m:t>,</m:t>
-                                  </m:r>
-                                  <m:r>
-                                    <a:rPr lang="en-US" altLang="zh-CN" sz="1400" b="0" i="1">
-                                      <a:latin typeface="Cambria Math" panose="02040503050406030204" charset="0"/>
-                                      <a:cs typeface="Cambria Math" panose="02040503050406030204" charset="0"/>
-                                    </a:rPr>
-                                    <m:t>𝑖</m:t>
-                                  </m:r>
-                                </m:sub>
-                              </m:sSub>
-                              <m:r>
-                                <a:rPr lang="en-US" altLang="zh-CN" sz="1400" i="1">
-                                  <a:latin typeface="Cambria Math" panose="02040503050406030204" charset="0"/>
-                                  <a:cs typeface="Cambria Math" panose="02040503050406030204" charset="0"/>
-                                </a:rPr>
-                                <m:t>→</m:t>
-                              </m:r>
-                              <m:sSub>
-                                <m:sSubPr>
-                                  <m:ctrlPr>
-                                    <a:rPr lang="en-US" altLang="zh-CN" sz="1400" i="1">
-                                      <a:latin typeface="Cambria Math" panose="02040503050406030204" charset="0"/>
-                                      <a:cs typeface="Cambria Math" panose="02040503050406030204" charset="0"/>
-                                    </a:rPr>
-                                  </m:ctrlPr>
-                                </m:sSubPr>
-                                <m:e>
-                                  <m:r>
-                                    <a:rPr lang="en-US" altLang="zh-CN" sz="1400" i="1">
-                                      <a:latin typeface="Cambria Math" panose="02040503050406030204" charset="0"/>
-                                      <a:cs typeface="Cambria Math" panose="02040503050406030204" charset="0"/>
-                                    </a:rPr>
-                                    <m:t>𝐿</m:t>
-                                  </m:r>
-                                </m:e>
-                                <m:sub>
-                                  <m:r>
-                                    <a:rPr lang="en-US" altLang="zh-CN" sz="1400" i="1">
-                                      <a:latin typeface="Cambria Math" panose="02040503050406030204" charset="0"/>
-                                      <a:cs typeface="Cambria Math" panose="02040503050406030204" charset="0"/>
-                                    </a:rPr>
-                                    <m:t>𝑖</m:t>
-                                  </m:r>
-                                  <m:r>
-                                    <a:rPr lang="en-US" altLang="zh-CN" sz="1400" i="1">
-                                      <a:latin typeface="Cambria Math" panose="02040503050406030204" charset="0"/>
-                                      <a:cs typeface="Cambria Math" panose="02040503050406030204" charset="0"/>
-                                    </a:rPr>
-                                    <m:t>,</m:t>
-                                  </m:r>
-                                  <m:r>
-                                    <a:rPr lang="en-US" altLang="zh-CN" sz="1400" i="1">
-                                      <a:latin typeface="Cambria Math" panose="02040503050406030204" charset="0"/>
-                                      <a:cs typeface="Cambria Math" panose="02040503050406030204" charset="0"/>
-                                    </a:rPr>
-                                    <m:t>𝑖</m:t>
-                                  </m:r>
-                                </m:sub>
-                              </m:sSub>
-                              <m:sSub>
-                                <m:sSubPr>
-                                  <m:ctrlPr>
-                                    <a:rPr lang="en-US" altLang="zh-CN" sz="1400" i="1">
-                                      <a:latin typeface="Cambria Math" panose="02040503050406030204" charset="0"/>
-                                      <a:cs typeface="Cambria Math" panose="02040503050406030204" charset="0"/>
-                                    </a:rPr>
-                                  </m:ctrlPr>
-                                </m:sSubPr>
-                                <m:e>
-                                  <m:r>
-                                    <a:rPr lang="en-US" altLang="zh-CN" sz="1400" i="1">
-                                      <a:latin typeface="Cambria Math" panose="02040503050406030204" charset="0"/>
-                                      <a:cs typeface="Cambria Math" panose="02040503050406030204" charset="0"/>
-                                    </a:rPr>
-                                    <m:t>𝑈</m:t>
-                                  </m:r>
-                                </m:e>
-                                <m:sub>
-                                  <m:r>
-                                    <a:rPr lang="en-US" altLang="zh-CN" sz="1400" i="1">
-                                      <a:latin typeface="Cambria Math" panose="02040503050406030204" charset="0"/>
-                                      <a:cs typeface="Cambria Math" panose="02040503050406030204" charset="0"/>
-                                    </a:rPr>
-                                    <m:t>𝑖</m:t>
-                                  </m:r>
-                                  <m:r>
-                                    <a:rPr lang="en-US" altLang="zh-CN" sz="1400" i="1">
-                                      <a:latin typeface="Cambria Math" panose="02040503050406030204" charset="0"/>
-                                      <a:cs typeface="Cambria Math" panose="02040503050406030204" charset="0"/>
-                                    </a:rPr>
-                                    <m:t>,</m:t>
-                                  </m:r>
-                                  <m:r>
-                                    <a:rPr lang="en-US" altLang="zh-CN" sz="1400" i="1">
-                                      <a:latin typeface="Cambria Math" panose="02040503050406030204" charset="0"/>
-                                      <a:cs typeface="Cambria Math" panose="02040503050406030204" charset="0"/>
-                                    </a:rPr>
-                                    <m:t>𝑖</m:t>
-                                  </m:r>
-                                </m:sub>
-                              </m:sSub>
-                            </m:oMath>
-                          </a14:m>
+                          <a:r>
+                            <a:rPr lang="en-US" altLang="zh-CN" sz="1400" b="1">
+                              <a:latin typeface="Times New Roman" panose="02020603050405020304" charset="0"/>
+                              <a:cs typeface="Times New Roman" panose="02020603050405020304" charset="0"/>
+                            </a:rPr>
+                            <a:t>for</a:t>
+                          </a:r>
                           <a:r>
                             <a:rPr lang="en-US" altLang="zh-CN" sz="1400" b="0">
                               <a:latin typeface="Times New Roman" panose="02020603050405020304" charset="0"/>
                               <a:cs typeface="Times New Roman" panose="02020603050405020304" charset="0"/>
                             </a:rPr>
-                            <a:t>  // </a:t>
+                            <a:t> j = i to n </a:t>
                           </a:r>
                           <a:r>
-                            <a:rPr lang="zh-CN" altLang="en-US" sz="1400" b="0">
+                            <a:rPr lang="en-US" altLang="zh-CN" sz="1400" b="1">
                               <a:latin typeface="Times New Roman" panose="02020603050405020304" charset="0"/>
                               <a:cs typeface="Times New Roman" panose="02020603050405020304" charset="0"/>
                             </a:rPr>
-                            <a:t>分解对角</a:t>
-                          </a:r>
-                          <a:r>
-                            <a:rPr lang="zh-CN" altLang="en-US" sz="1400" b="0">
-                              <a:latin typeface="Times New Roman" panose="02020603050405020304" charset="0"/>
-                              <a:cs typeface="Times New Roman" panose="02020603050405020304" charset="0"/>
-                            </a:rPr>
-                            <a:t>矩阵</a:t>
+                            <a:t>do</a:t>
                           </a:r>
                           <a:endParaRPr lang="zh-CN" altLang="en-US" sz="1400" b="0">
                             <a:latin typeface="Times New Roman" panose="02020603050405020304" charset="0"/>
@@ -8344,7 +8271,206 @@
                               <a:latin typeface="Times New Roman" panose="02020603050405020304" charset="0"/>
                               <a:cs typeface="Times New Roman" panose="02020603050405020304" charset="0"/>
                             </a:rPr>
-                            <a:t>3:     </a:t>
+                            <a:t>3:         </a:t>
+                          </a:r>
+                          <a14:m>
+                            <m:oMath xmlns:m="http://schemas.openxmlformats.org/officeDocument/2006/math">
+                              <m:sSub>
+                                <m:sSubPr>
+                                  <m:ctrlPr>
+                                    <a:rPr lang="en-US" altLang="zh-CN" sz="1400" b="0" i="1">
+                                      <a:latin typeface="Cambria Math" panose="02040503050406030204" charset="0"/>
+                                      <a:cs typeface="Cambria Math" panose="02040503050406030204" charset="0"/>
+                                    </a:rPr>
+                                  </m:ctrlPr>
+                                </m:sSubPr>
+                                <m:e>
+                                  <m:r>
+                                    <a:rPr lang="en-US" altLang="zh-CN" sz="1400" b="0" i="1">
+                                      <a:latin typeface="Cambria Math" panose="02040503050406030204" charset="0"/>
+                                      <a:cs typeface="Cambria Math" panose="02040503050406030204" charset="0"/>
+                                    </a:rPr>
+                                    <m:t>𝑋</m:t>
+                                  </m:r>
+                                </m:e>
+                                <m:sub>
+                                  <m:r>
+                                    <a:rPr lang="en-US" altLang="zh-CN" sz="1400" b="0" i="1">
+                                      <a:latin typeface="Cambria Math" panose="02040503050406030204" charset="0"/>
+                                      <a:cs typeface="Cambria Math" panose="02040503050406030204" charset="0"/>
+                                    </a:rPr>
+                                    <m:t>𝑖</m:t>
+                                  </m:r>
+                                  <m:r>
+                                    <a:rPr lang="en-US" altLang="zh-CN" sz="1400" b="0" i="1">
+                                      <a:latin typeface="Cambria Math" panose="02040503050406030204" charset="0"/>
+                                      <a:cs typeface="Cambria Math" panose="02040503050406030204" charset="0"/>
+                                    </a:rPr>
+                                    <m:t>,</m:t>
+                                  </m:r>
+                                  <m:r>
+                                    <a:rPr lang="en-US" altLang="zh-CN" sz="1400" b="0" i="1">
+                                      <a:latin typeface="Cambria Math" panose="02040503050406030204" charset="0"/>
+                                      <a:cs typeface="Cambria Math" panose="02040503050406030204" charset="0"/>
+                                    </a:rPr>
+                                    <m:t>𝑗</m:t>
+                                  </m:r>
+                                </m:sub>
+                              </m:sSub>
+                              <m:r>
+                                <a:rPr lang="en-US" altLang="zh-CN" sz="1400" i="1">
+                                  <a:latin typeface="Cambria Math" panose="02040503050406030204" charset="0"/>
+                                  <a:cs typeface="Cambria Math" panose="02040503050406030204" charset="0"/>
+                                </a:rPr>
+                                <m:t>←</m:t>
+                              </m:r>
+                              <m:sSubSup>
+                                <m:sSubSupPr>
+                                  <m:ctrlPr>
+                                    <a:rPr lang="en-US" altLang="zh-CN" sz="1400" i="1">
+                                      <a:latin typeface="Cambria Math" panose="02040503050406030204" charset="0"/>
+                                      <a:cs typeface="Cambria Math" panose="02040503050406030204" charset="0"/>
+                                    </a:rPr>
+                                  </m:ctrlPr>
+                                </m:sSubSupPr>
+                                <m:e>
+                                  <m:r>
+                                    <a:rPr lang="en-US" altLang="zh-CN" sz="1400" i="1">
+                                      <a:latin typeface="Cambria Math" panose="02040503050406030204" charset="0"/>
+                                      <a:cs typeface="Cambria Math" panose="02040503050406030204" charset="0"/>
+                                    </a:rPr>
+                                    <m:t>𝐿</m:t>
+                                  </m:r>
+                                </m:e>
+                                <m:sub>
+                                  <m:r>
+                                    <a:rPr lang="en-US" altLang="zh-CN" sz="1400" i="1">
+                                      <a:latin typeface="Cambria Math" panose="02040503050406030204" charset="0"/>
+                                      <a:cs typeface="Cambria Math" panose="02040503050406030204" charset="0"/>
+                                    </a:rPr>
+                                    <m:t>𝑖</m:t>
+                                  </m:r>
+                                  <m:r>
+                                    <a:rPr lang="en-US" altLang="zh-CN" sz="1400" i="1">
+                                      <a:latin typeface="Cambria Math" panose="02040503050406030204" charset="0"/>
+                                      <a:cs typeface="Cambria Math" panose="02040503050406030204" charset="0"/>
+                                    </a:rPr>
+                                    <m:t>,</m:t>
+                                  </m:r>
+                                  <m:r>
+                                    <a:rPr lang="en-US" altLang="zh-CN" sz="1400" i="1">
+                                      <a:latin typeface="Cambria Math" panose="02040503050406030204" charset="0"/>
+                                      <a:cs typeface="Cambria Math" panose="02040503050406030204" charset="0"/>
+                                    </a:rPr>
+                                    <m:t>𝑖</m:t>
+                                  </m:r>
+                                </m:sub>
+                                <m:sup>
+                                  <m:r>
+                                    <a:rPr lang="en-US" altLang="zh-CN" sz="1400" i="1">
+                                      <a:latin typeface="Cambria Math" panose="02040503050406030204" charset="0"/>
+                                      <a:cs typeface="Cambria Math" panose="02040503050406030204" charset="0"/>
+                                    </a:rPr>
+                                    <m:t>−</m:t>
+                                  </m:r>
+                                  <m:r>
+                                    <a:rPr lang="en-US" altLang="zh-CN" sz="1400" i="1">
+                                      <a:latin typeface="Cambria Math" panose="02040503050406030204" charset="0"/>
+                                      <a:cs typeface="Cambria Math" panose="02040503050406030204" charset="0"/>
+                                    </a:rPr>
+                                    <m:t>1</m:t>
+                                  </m:r>
+                                </m:sup>
+                              </m:sSubSup>
+                              <m:sSub>
+                                <m:sSubPr>
+                                  <m:ctrlPr>
+                                    <a:rPr lang="en-US" altLang="zh-CN" sz="1400" i="1">
+                                      <a:latin typeface="Cambria Math" panose="02040503050406030204" charset="0"/>
+                                      <a:cs typeface="Cambria Math" panose="02040503050406030204" charset="0"/>
+                                    </a:rPr>
+                                  </m:ctrlPr>
+                                </m:sSubPr>
+                                <m:e>
+                                  <m:r>
+                                    <a:rPr lang="en-US" altLang="zh-CN" sz="1400" i="1">
+                                      <a:latin typeface="Cambria Math" panose="02040503050406030204" charset="0"/>
+                                      <a:cs typeface="Cambria Math" panose="02040503050406030204" charset="0"/>
+                                    </a:rPr>
+                                    <m:t>𝐵</m:t>
+                                  </m:r>
+                                </m:e>
+                                <m:sub>
+                                  <m:r>
+                                    <a:rPr lang="en-US" altLang="zh-CN" sz="1400" i="1">
+                                      <a:latin typeface="Cambria Math" panose="02040503050406030204" charset="0"/>
+                                      <a:cs typeface="Cambria Math" panose="02040503050406030204" charset="0"/>
+                                    </a:rPr>
+                                    <m:t>𝑖</m:t>
+                                  </m:r>
+                                  <m:r>
+                                    <a:rPr lang="en-US" altLang="zh-CN" sz="1400" i="1">
+                                      <a:latin typeface="Cambria Math" panose="02040503050406030204" charset="0"/>
+                                      <a:cs typeface="Cambria Math" panose="02040503050406030204" charset="0"/>
+                                    </a:rPr>
+                                    <m:t>,</m:t>
+                                  </m:r>
+                                  <m:r>
+                                    <a:rPr lang="en-US" altLang="zh-CN" sz="1400" i="1">
+                                      <a:latin typeface="Cambria Math" panose="02040503050406030204" charset="0"/>
+                                      <a:cs typeface="Cambria Math" panose="02040503050406030204" charset="0"/>
+                                    </a:rPr>
+                                    <m:t>𝑗</m:t>
+                                  </m:r>
+                                </m:sub>
+                              </m:sSub>
+                            </m:oMath>
+                          </a14:m>
+                          <a:endParaRPr lang="en-US" altLang="zh-CN" sz="1400" b="1">
+                            <a:latin typeface="Times New Roman" panose="02020603050405020304" charset="0"/>
+                            <a:cs typeface="Times New Roman" panose="02020603050405020304" charset="0"/>
+                          </a:endParaRPr>
+                        </a:p>
+                        <a:p>
+                          <a:pPr indent="0" fontAlgn="auto">
+                            <a:lnSpc>
+                              <a:spcPts val="1880"/>
+                            </a:lnSpc>
+                            <a:buNone/>
+                          </a:pPr>
+                          <a:r>
+                            <a:rPr lang="en-US" altLang="zh-CN" sz="1400" b="0">
+                              <a:latin typeface="Times New Roman" panose="02020603050405020304" charset="0"/>
+                              <a:cs typeface="Times New Roman" panose="02020603050405020304" charset="0"/>
+                            </a:rPr>
+                            <a:t>4:     </a:t>
+                          </a:r>
+                          <a:r>
+                            <a:rPr lang="en-US" altLang="zh-CN" sz="1400" b="1">
+                              <a:latin typeface="Times New Roman" panose="02020603050405020304" charset="0"/>
+                              <a:cs typeface="Times New Roman" panose="02020603050405020304" charset="0"/>
+                              <a:sym typeface="+mn-ea"/>
+                            </a:rPr>
+                            <a:t>end for</a:t>
+                          </a:r>
+                          <a:endParaRPr lang="en-US" altLang="zh-CN" sz="1400" i="1">
+                            <a:latin typeface="Cambria Math" panose="02040503050406030204" charset="0"/>
+                            <a:cs typeface="Cambria Math" panose="02040503050406030204" charset="0"/>
+                          </a:endParaRPr>
+                        </a:p>
+                        <a:p>
+                          <a:pPr indent="0" fontAlgn="auto">
+                            <a:lnSpc>
+                              <a:spcPts val="1880"/>
+                            </a:lnSpc>
+                            <a:buNone/>
+                          </a:pPr>
+                          <a:r>
+                            <a:rPr lang="en-US" altLang="zh-CN" sz="1400" b="0">
+                              <a:latin typeface="Times New Roman" panose="02020603050405020304" charset="0"/>
+                              <a:cs typeface="Times New Roman" panose="02020603050405020304" charset="0"/>
+                            </a:rPr>
+                            <a:t>5:     </a:t>
                           </a:r>
                           <a:r>
                             <a:rPr lang="en-US" altLang="zh-CN" sz="1400" b="1">
@@ -8358,7 +8484,7 @@
                               <a:latin typeface="Times New Roman" panose="02020603050405020304" charset="0"/>
                               <a:cs typeface="Times New Roman" panose="02020603050405020304" charset="0"/>
                             </a:rPr>
-                            <a:t> j = i+1 to n </a:t>
+                            <a:t> k = i+1 to n </a:t>
                           </a:r>
                           <a:r>
                             <a:rPr lang="en-US" altLang="zh-CN" sz="1400" b="1">
@@ -8384,377 +8510,28 @@
                               <a:latin typeface="Times New Roman" panose="02020603050405020304" charset="0"/>
                               <a:cs typeface="Times New Roman" panose="02020603050405020304" charset="0"/>
                             </a:rPr>
-                            <a:t>4:         </a:t>
-                          </a:r>
-                          <a14:m>
-                            <m:oMath xmlns:m="http://schemas.openxmlformats.org/officeDocument/2006/math">
-                              <m:sSub>
-                                <m:sSubPr>
-                                  <m:ctrlPr>
-                                    <a:rPr lang="en-US" altLang="zh-CN" sz="1400" b="0" i="1">
-                                      <a:latin typeface="Cambria Math" panose="02040503050406030204" charset="0"/>
-                                      <a:cs typeface="Cambria Math" panose="02040503050406030204" charset="0"/>
-                                    </a:rPr>
-                                  </m:ctrlPr>
-                                </m:sSubPr>
-                                <m:e>
-                                  <m:r>
-                                    <a:rPr lang="en-US" altLang="zh-CN" sz="1400" b="0" i="1">
-                                      <a:latin typeface="Cambria Math" panose="02040503050406030204" charset="0"/>
-                                      <a:cs typeface="Cambria Math" panose="02040503050406030204" charset="0"/>
-                                    </a:rPr>
-                                    <m:t>𝐴</m:t>
-                                  </m:r>
-                                </m:e>
-                                <m:sub>
-                                  <m:r>
-                                    <a:rPr lang="en-US" altLang="zh-CN" sz="1400" b="0" i="1">
-                                      <a:latin typeface="Cambria Math" panose="02040503050406030204" charset="0"/>
-                                      <a:cs typeface="Cambria Math" panose="02040503050406030204" charset="0"/>
-                                    </a:rPr>
-                                    <m:t>𝑖</m:t>
-                                  </m:r>
-                                  <m:r>
-                                    <a:rPr lang="en-US" altLang="zh-CN" sz="1400" b="0" i="1">
-                                      <a:latin typeface="Cambria Math" panose="02040503050406030204" charset="0"/>
-                                      <a:cs typeface="Cambria Math" panose="02040503050406030204" charset="0"/>
-                                    </a:rPr>
-                                    <m:t>,</m:t>
-                                  </m:r>
-                                  <m:r>
-                                    <a:rPr lang="en-US" altLang="zh-CN" sz="1400" b="0" i="1">
-                                      <a:latin typeface="Cambria Math" panose="02040503050406030204" charset="0"/>
-                                      <a:cs typeface="Cambria Math" panose="02040503050406030204" charset="0"/>
-                                    </a:rPr>
-                                    <m:t>𝑗</m:t>
-                                  </m:r>
-                                </m:sub>
-                              </m:sSub>
-                              <m:r>
-                                <a:rPr lang="en-US" altLang="zh-CN" sz="1400" i="1">
-                                  <a:latin typeface="Cambria Math" panose="02040503050406030204" charset="0"/>
-                                  <a:cs typeface="Cambria Math" panose="02040503050406030204" charset="0"/>
-                                </a:rPr>
-                                <m:t>← </m:t>
-                              </m:r>
-                              <m:sSubSup>
-                                <m:sSubSupPr>
-                                  <m:ctrlPr>
-                                    <a:rPr lang="en-US" altLang="zh-CN" sz="1400" i="1">
-                                      <a:latin typeface="Cambria Math" panose="02040503050406030204" charset="0"/>
-                                      <a:cs typeface="Cambria Math" panose="02040503050406030204" charset="0"/>
-                                    </a:rPr>
-                                  </m:ctrlPr>
-                                </m:sSubSupPr>
-                                <m:e>
-                                  <m:r>
-                                    <a:rPr lang="en-US" altLang="zh-CN" sz="1400" i="1">
-                                      <a:latin typeface="Cambria Math" panose="02040503050406030204" charset="0"/>
-                                      <a:cs typeface="Cambria Math" panose="02040503050406030204" charset="0"/>
-                                    </a:rPr>
-                                    <m:t>𝐿</m:t>
-                                  </m:r>
-                                </m:e>
-                                <m:sub>
-                                  <m:r>
-                                    <a:rPr lang="en-US" altLang="zh-CN" sz="1400" i="1">
-                                      <a:latin typeface="Cambria Math" panose="02040503050406030204" charset="0"/>
-                                      <a:cs typeface="Cambria Math" panose="02040503050406030204" charset="0"/>
-                                    </a:rPr>
-                                    <m:t>𝑖</m:t>
-                                  </m:r>
-                                  <m:r>
-                                    <a:rPr lang="en-US" altLang="zh-CN" sz="1400" i="1">
-                                      <a:latin typeface="Cambria Math" panose="02040503050406030204" charset="0"/>
-                                      <a:cs typeface="Cambria Math" panose="02040503050406030204" charset="0"/>
-                                    </a:rPr>
-                                    <m:t>,</m:t>
-                                  </m:r>
-                                  <m:r>
-                                    <a:rPr lang="en-US" altLang="zh-CN" sz="1400" i="1">
-                                      <a:latin typeface="Cambria Math" panose="02040503050406030204" charset="0"/>
-                                      <a:cs typeface="Cambria Math" panose="02040503050406030204" charset="0"/>
-                                    </a:rPr>
-                                    <m:t>𝑖</m:t>
-                                  </m:r>
-                                </m:sub>
-                                <m:sup>
-                                  <m:r>
-                                    <a:rPr lang="en-US" altLang="zh-CN" sz="1400" i="1">
-                                      <a:latin typeface="Cambria Math" panose="02040503050406030204" charset="0"/>
-                                      <a:cs typeface="Cambria Math" panose="02040503050406030204" charset="0"/>
-                                    </a:rPr>
-                                    <m:t>−</m:t>
-                                  </m:r>
-                                  <m:r>
-                                    <a:rPr lang="en-US" altLang="zh-CN" sz="1400" i="1">
-                                      <a:latin typeface="Cambria Math" panose="02040503050406030204" charset="0"/>
-                                      <a:cs typeface="Cambria Math" panose="02040503050406030204" charset="0"/>
-                                    </a:rPr>
-                                    <m:t>1</m:t>
-                                  </m:r>
-                                </m:sup>
-                              </m:sSubSup>
-                              <m:sSub>
-                                <m:sSubPr>
-                                  <m:ctrlPr>
-                                    <a:rPr lang="en-US" altLang="zh-CN" sz="1400" i="1">
-                                      <a:latin typeface="Cambria Math" panose="02040503050406030204" charset="0"/>
-                                      <a:cs typeface="Cambria Math" panose="02040503050406030204" charset="0"/>
-                                    </a:rPr>
-                                  </m:ctrlPr>
-                                </m:sSubPr>
-                                <m:e>
-                                  <m:r>
-                                    <a:rPr lang="en-US" altLang="zh-CN" sz="1400" i="1">
-                                      <a:latin typeface="Cambria Math" panose="02040503050406030204" charset="0"/>
-                                      <a:cs typeface="Cambria Math" panose="02040503050406030204" charset="0"/>
-                                    </a:rPr>
-                                    <m:t>𝐴</m:t>
-                                  </m:r>
-                                </m:e>
-                                <m:sub>
-                                  <m:r>
-                                    <a:rPr lang="en-US" altLang="zh-CN" sz="1400" i="1">
-                                      <a:latin typeface="Cambria Math" panose="02040503050406030204" charset="0"/>
-                                      <a:cs typeface="Cambria Math" panose="02040503050406030204" charset="0"/>
-                                    </a:rPr>
-                                    <m:t>𝑖</m:t>
-                                  </m:r>
-                                  <m:r>
-                                    <a:rPr lang="en-US" altLang="zh-CN" sz="1400" i="1">
-                                      <a:latin typeface="Cambria Math" panose="02040503050406030204" charset="0"/>
-                                      <a:cs typeface="Cambria Math" panose="02040503050406030204" charset="0"/>
-                                    </a:rPr>
-                                    <m:t>,</m:t>
-                                  </m:r>
-                                  <m:r>
-                                    <a:rPr lang="en-US" altLang="zh-CN" sz="1400" i="1">
-                                      <a:latin typeface="Cambria Math" panose="02040503050406030204" charset="0"/>
-                                      <a:cs typeface="Cambria Math" panose="02040503050406030204" charset="0"/>
-                                    </a:rPr>
-                                    <m:t>𝑗</m:t>
-                                  </m:r>
-                                </m:sub>
-                              </m:sSub>
-                            </m:oMath>
-                          </a14:m>
-                          <a:endParaRPr lang="en-US" altLang="zh-CN" sz="1400" i="1">
-                            <a:latin typeface="Cambria Math" panose="02040503050406030204" charset="0"/>
-                            <a:cs typeface="Cambria Math" panose="02040503050406030204" charset="0"/>
-                          </a:endParaRPr>
-                        </a:p>
-                        <a:p>
-                          <a:pPr indent="0" fontAlgn="auto">
-                            <a:lnSpc>
-                              <a:spcPts val="1880"/>
-                            </a:lnSpc>
-                            <a:buNone/>
-                          </a:pPr>
-                          <a:r>
-                            <a:rPr lang="en-US" altLang="zh-CN" sz="1400" b="0">
-                              <a:latin typeface="Times New Roman" panose="02020603050405020304" charset="0"/>
-                              <a:cs typeface="Times New Roman" panose="02020603050405020304" charset="0"/>
-                            </a:rPr>
-                            <a:t>5:         </a:t>
-                          </a:r>
-                          <a14:m>
-                            <m:oMath xmlns:m="http://schemas.openxmlformats.org/officeDocument/2006/math">
-                              <m:sSub>
-                                <m:sSubPr>
-                                  <m:ctrlPr>
-                                    <a:rPr lang="en-US" altLang="zh-CN" sz="1400" b="0" i="1">
-                                      <a:latin typeface="Cambria Math" panose="02040503050406030204" charset="0"/>
-                                      <a:cs typeface="Cambria Math" panose="02040503050406030204" charset="0"/>
-                                    </a:rPr>
-                                  </m:ctrlPr>
-                                </m:sSubPr>
-                                <m:e>
-                                  <m:r>
-                                    <a:rPr lang="en-US" altLang="zh-CN" sz="1400" b="0" i="1">
-                                      <a:latin typeface="Cambria Math" panose="02040503050406030204" charset="0"/>
-                                      <a:cs typeface="Cambria Math" panose="02040503050406030204" charset="0"/>
-                                    </a:rPr>
-                                    <m:t>𝐴</m:t>
-                                  </m:r>
-                                </m:e>
-                                <m:sub>
-                                  <m:r>
-                                    <a:rPr lang="en-US" altLang="zh-CN" sz="1400" b="0" i="1">
-                                      <a:latin typeface="Cambria Math" panose="02040503050406030204" charset="0"/>
-                                      <a:cs typeface="Cambria Math" panose="02040503050406030204" charset="0"/>
-                                    </a:rPr>
-                                    <m:t>𝑗</m:t>
-                                  </m:r>
-                                  <m:r>
-                                    <a:rPr lang="en-US" altLang="zh-CN" sz="1400" b="0" i="1">
-                                      <a:latin typeface="Cambria Math" panose="02040503050406030204" charset="0"/>
-                                      <a:cs typeface="Cambria Math" panose="02040503050406030204" charset="0"/>
-                                    </a:rPr>
-                                    <m:t>,</m:t>
-                                  </m:r>
-                                  <m:r>
-                                    <a:rPr lang="en-US" altLang="zh-CN" sz="1400" b="0" i="1">
-                                      <a:latin typeface="Cambria Math" panose="02040503050406030204" charset="0"/>
-                                      <a:cs typeface="Cambria Math" panose="02040503050406030204" charset="0"/>
-                                    </a:rPr>
-                                    <m:t>𝑖</m:t>
-                                  </m:r>
-                                </m:sub>
-                              </m:sSub>
-                              <m:r>
-                                <a:rPr lang="en-US" altLang="zh-CN" sz="1400" i="1">
-                                  <a:latin typeface="Cambria Math" panose="02040503050406030204" charset="0"/>
-                                  <a:cs typeface="Cambria Math" panose="02040503050406030204" charset="0"/>
-                                </a:rPr>
-                                <m:t>← </m:t>
-                              </m:r>
-                              <m:sSub>
-                                <m:sSubPr>
-                                  <m:ctrlPr>
-                                    <a:rPr lang="en-US" altLang="zh-CN" sz="1400" i="1">
-                                      <a:latin typeface="Cambria Math" panose="02040503050406030204" charset="0"/>
-                                      <a:cs typeface="Cambria Math" panose="02040503050406030204" charset="0"/>
-                                    </a:rPr>
-                                  </m:ctrlPr>
-                                </m:sSubPr>
-                                <m:e>
-                                  <m:r>
-                                    <a:rPr lang="en-US" altLang="zh-CN" sz="1400" i="1">
-                                      <a:latin typeface="Cambria Math" panose="02040503050406030204" charset="0"/>
-                                      <a:cs typeface="Cambria Math" panose="02040503050406030204" charset="0"/>
-                                    </a:rPr>
-                                    <m:t>𝐴</m:t>
-                                  </m:r>
-                                </m:e>
-                                <m:sub>
-                                  <m:r>
-                                    <a:rPr lang="en-US" altLang="zh-CN" sz="1400" i="1">
-                                      <a:latin typeface="Cambria Math" panose="02040503050406030204" charset="0"/>
-                                      <a:cs typeface="Cambria Math" panose="02040503050406030204" charset="0"/>
-                                    </a:rPr>
-                                    <m:t>𝑗</m:t>
-                                  </m:r>
-                                  <m:r>
-                                    <a:rPr lang="en-US" altLang="zh-CN" sz="1400" i="1">
-                                      <a:latin typeface="Cambria Math" panose="02040503050406030204" charset="0"/>
-                                      <a:cs typeface="Cambria Math" panose="02040503050406030204" charset="0"/>
-                                    </a:rPr>
-                                    <m:t>,</m:t>
-                                  </m:r>
-                                  <m:r>
-                                    <a:rPr lang="en-US" altLang="zh-CN" sz="1400" i="1">
-                                      <a:latin typeface="Cambria Math" panose="02040503050406030204" charset="0"/>
-                                      <a:cs typeface="Cambria Math" panose="02040503050406030204" charset="0"/>
-                                    </a:rPr>
-                                    <m:t>𝑖</m:t>
-                                  </m:r>
-                                </m:sub>
-                              </m:sSub>
-                              <m:sSubSup>
-                                <m:sSubSupPr>
-                                  <m:ctrlPr>
-                                    <a:rPr lang="en-US" altLang="zh-CN" sz="1400" i="1">
-                                      <a:latin typeface="Cambria Math" panose="02040503050406030204" charset="0"/>
-                                      <a:cs typeface="Cambria Math" panose="02040503050406030204" charset="0"/>
-                                    </a:rPr>
-                                  </m:ctrlPr>
-                                </m:sSubSupPr>
-                                <m:e>
-                                  <m:r>
-                                    <a:rPr lang="en-US" altLang="zh-CN" sz="1400" i="1">
-                                      <a:latin typeface="Cambria Math" panose="02040503050406030204" charset="0"/>
-                                      <a:cs typeface="Cambria Math" panose="02040503050406030204" charset="0"/>
-                                    </a:rPr>
-                                    <m:t>𝑈</m:t>
-                                  </m:r>
-                                </m:e>
-                                <m:sub>
-                                  <m:r>
-                                    <a:rPr lang="en-US" altLang="zh-CN" sz="1400" i="1">
-                                      <a:latin typeface="Cambria Math" panose="02040503050406030204" charset="0"/>
-                                      <a:cs typeface="Cambria Math" panose="02040503050406030204" charset="0"/>
-                                    </a:rPr>
-                                    <m:t>𝑖</m:t>
-                                  </m:r>
-                                  <m:r>
-                                    <a:rPr lang="en-US" altLang="zh-CN" sz="1400" i="1">
-                                      <a:latin typeface="Cambria Math" panose="02040503050406030204" charset="0"/>
-                                      <a:cs typeface="Cambria Math" panose="02040503050406030204" charset="0"/>
-                                    </a:rPr>
-                                    <m:t>,</m:t>
-                                  </m:r>
-                                  <m:r>
-                                    <a:rPr lang="en-US" altLang="zh-CN" sz="1400" i="1">
-                                      <a:latin typeface="Cambria Math" panose="02040503050406030204" charset="0"/>
-                                      <a:cs typeface="Cambria Math" panose="02040503050406030204" charset="0"/>
-                                    </a:rPr>
-                                    <m:t>𝑖</m:t>
-                                  </m:r>
-                                </m:sub>
-                                <m:sup>
-                                  <m:r>
-                                    <a:rPr lang="en-US" altLang="zh-CN" sz="1400" i="1">
-                                      <a:latin typeface="Cambria Math" panose="02040503050406030204" charset="0"/>
-                                      <a:cs typeface="Cambria Math" panose="02040503050406030204" charset="0"/>
-                                    </a:rPr>
-                                    <m:t>−</m:t>
-                                  </m:r>
-                                  <m:r>
-                                    <a:rPr lang="en-US" altLang="zh-CN" sz="1400" i="1">
-                                      <a:latin typeface="Cambria Math" panose="02040503050406030204" charset="0"/>
-                                      <a:cs typeface="Cambria Math" panose="02040503050406030204" charset="0"/>
-                                    </a:rPr>
-                                    <m:t>1</m:t>
-                                  </m:r>
-                                </m:sup>
-                              </m:sSubSup>
-                            </m:oMath>
-                          </a14:m>
-                          <a:endParaRPr lang="en-US" altLang="zh-CN" sz="1400" i="1">
-                            <a:latin typeface="Cambria Math" panose="02040503050406030204" charset="0"/>
-                            <a:cs typeface="Cambria Math" panose="02040503050406030204" charset="0"/>
-                          </a:endParaRPr>
-                        </a:p>
-                        <a:p>
-                          <a:pPr indent="0" fontAlgn="auto">
-                            <a:lnSpc>
-                              <a:spcPts val="1880"/>
-                            </a:lnSpc>
-                            <a:buNone/>
-                          </a:pPr>
-                          <a:r>
-                            <a:rPr lang="en-US" altLang="zh-CN" sz="1400" b="0">
-                              <a:latin typeface="Times New Roman" panose="02020603050405020304" charset="0"/>
-                              <a:cs typeface="Times New Roman" panose="02020603050405020304" charset="0"/>
-                            </a:rPr>
-                            <a:t>6:     </a:t>
+                            <a:t>6:         </a:t>
                           </a:r>
                           <a:r>
                             <a:rPr lang="en-US" altLang="zh-CN" sz="1400" b="1">
                               <a:latin typeface="Times New Roman" panose="02020603050405020304" charset="0"/>
                               <a:cs typeface="Times New Roman" panose="02020603050405020304" charset="0"/>
                             </a:rPr>
-                            <a:t>end for</a:t>
+                            <a:t>for</a:t>
                           </a:r>
-                          <a:endParaRPr lang="en-US" altLang="zh-CN" sz="1400" b="1">
-                            <a:latin typeface="Times New Roman" panose="02020603050405020304" charset="0"/>
-                            <a:cs typeface="Times New Roman" panose="02020603050405020304" charset="0"/>
-                          </a:endParaRPr>
-                        </a:p>
-                        <a:p>
-                          <a:pPr indent="0" fontAlgn="auto">
-                            <a:lnSpc>
-                              <a:spcPts val="1880"/>
-                            </a:lnSpc>
-                            <a:buNone/>
-                          </a:pPr>
                           <a:r>
                             <a:rPr lang="en-US" altLang="zh-CN" sz="1400" b="0">
                               <a:latin typeface="Times New Roman" panose="02020603050405020304" charset="0"/>
                               <a:cs typeface="Times New Roman" panose="02020603050405020304" charset="0"/>
                             </a:rPr>
-                            <a:t>7:     for j = i+1 to n do</a:t>
+                            <a:t> j = i to n </a:t>
+                          </a:r>
+                          <a:r>
+                            <a:rPr lang="en-US" altLang="zh-CN" sz="1400" b="1">
+                              <a:latin typeface="Times New Roman" panose="02020603050405020304" charset="0"/>
+                              <a:cs typeface="Times New Roman" panose="02020603050405020304" charset="0"/>
+                            </a:rPr>
+                            <a:t>do</a:t>
                           </a:r>
                           <a:endParaRPr lang="en-US" altLang="zh-CN" sz="1400" b="0">
                             <a:latin typeface="Times New Roman" panose="02020603050405020304" charset="0"/>
@@ -8773,8 +8550,194 @@
                               <a:latin typeface="Times New Roman" panose="02020603050405020304" charset="0"/>
                               <a:cs typeface="Times New Roman" panose="02020603050405020304" charset="0"/>
                             </a:rPr>
-                            <a:t>8:         for k = i+1 to n do</a:t>
+                            <a:t>7:             </a:t>
                           </a:r>
+                          <a14:m>
+                            <m:oMath xmlns:m="http://schemas.openxmlformats.org/officeDocument/2006/math">
+                              <m:sSub>
+                                <m:sSubPr>
+                                  <m:ctrlPr>
+                                    <a:rPr lang="en-US" altLang="zh-CN" sz="1400" b="0" i="1">
+                                      <a:latin typeface="Cambria Math" panose="02040503050406030204" charset="0"/>
+                                      <a:cs typeface="Cambria Math" panose="02040503050406030204" charset="0"/>
+                                    </a:rPr>
+                                  </m:ctrlPr>
+                                </m:sSubPr>
+                                <m:e>
+                                  <m:r>
+                                    <a:rPr lang="en-US" altLang="zh-CN" sz="1400" b="0" i="1">
+                                      <a:latin typeface="Cambria Math" panose="02040503050406030204" charset="0"/>
+                                      <a:cs typeface="Cambria Math" panose="02040503050406030204" charset="0"/>
+                                    </a:rPr>
+                                    <m:t>𝐵</m:t>
+                                  </m:r>
+                                </m:e>
+                                <m:sub>
+                                  <m:r>
+                                    <a:rPr lang="en-US" altLang="zh-CN" sz="1400" b="0" i="1">
+                                      <a:latin typeface="Cambria Math" panose="02040503050406030204" charset="0"/>
+                                      <a:cs typeface="Cambria Math" panose="02040503050406030204" charset="0"/>
+                                    </a:rPr>
+                                    <m:t>𝑘</m:t>
+                                  </m:r>
+                                  <m:r>
+                                    <a:rPr lang="en-US" altLang="zh-CN" sz="1400" b="0" i="1">
+                                      <a:latin typeface="Cambria Math" panose="02040503050406030204" charset="0"/>
+                                      <a:cs typeface="Cambria Math" panose="02040503050406030204" charset="0"/>
+                                    </a:rPr>
+                                    <m:t>,</m:t>
+                                  </m:r>
+                                  <m:r>
+                                    <a:rPr lang="en-US" altLang="zh-CN" sz="1400" b="0" i="1">
+                                      <a:latin typeface="Cambria Math" panose="02040503050406030204" charset="0"/>
+                                      <a:cs typeface="Cambria Math" panose="02040503050406030204" charset="0"/>
+                                    </a:rPr>
+                                    <m:t>𝑗</m:t>
+                                  </m:r>
+                                </m:sub>
+                              </m:sSub>
+                              <m:r>
+                                <a:rPr lang="en-US" altLang="zh-CN" sz="1400" i="1">
+                                  <a:latin typeface="Cambria Math" panose="02040503050406030204" charset="0"/>
+                                  <a:cs typeface="Cambria Math" panose="02040503050406030204" charset="0"/>
+                                </a:rPr>
+                                <m:t>←</m:t>
+                              </m:r>
+                              <m:sSub>
+                                <m:sSubPr>
+                                  <m:ctrlPr>
+                                    <a:rPr lang="en-US" altLang="zh-CN" sz="1400" i="1">
+                                      <a:latin typeface="Cambria Math" panose="02040503050406030204" charset="0"/>
+                                      <a:cs typeface="Cambria Math" panose="02040503050406030204" charset="0"/>
+                                    </a:rPr>
+                                  </m:ctrlPr>
+                                </m:sSubPr>
+                                <m:e>
+                                  <m:r>
+                                    <a:rPr lang="en-US" altLang="zh-CN" sz="1400" i="1">
+                                      <a:latin typeface="Cambria Math" panose="02040503050406030204" charset="0"/>
+                                      <a:cs typeface="Cambria Math" panose="02040503050406030204" charset="0"/>
+                                    </a:rPr>
+                                    <m:t>𝐵</m:t>
+                                  </m:r>
+                                </m:e>
+                                <m:sub>
+                                  <m:r>
+                                    <a:rPr lang="en-US" altLang="zh-CN" sz="1400" i="1">
+                                      <a:latin typeface="Cambria Math" panose="02040503050406030204" charset="0"/>
+                                      <a:cs typeface="Cambria Math" panose="02040503050406030204" charset="0"/>
+                                    </a:rPr>
+                                    <m:t>𝑘</m:t>
+                                  </m:r>
+                                  <m:r>
+                                    <a:rPr lang="en-US" altLang="zh-CN" sz="1400" i="1">
+                                      <a:latin typeface="Cambria Math" panose="02040503050406030204" charset="0"/>
+                                      <a:cs typeface="Cambria Math" panose="02040503050406030204" charset="0"/>
+                                    </a:rPr>
+                                    <m:t>,</m:t>
+                                  </m:r>
+                                  <m:r>
+                                    <a:rPr lang="en-US" altLang="zh-CN" sz="1400" i="1">
+                                      <a:latin typeface="Cambria Math" panose="02040503050406030204" charset="0"/>
+                                      <a:cs typeface="Cambria Math" panose="02040503050406030204" charset="0"/>
+                                    </a:rPr>
+                                    <m:t>𝑗</m:t>
+                                  </m:r>
+                                </m:sub>
+                              </m:sSub>
+                              <m:r>
+                                <a:rPr lang="en-US" altLang="zh-CN" sz="1400" i="1">
+                                  <a:latin typeface="Cambria Math" panose="02040503050406030204" charset="0"/>
+                                  <a:cs typeface="Cambria Math" panose="02040503050406030204" charset="0"/>
+                                </a:rPr>
+                                <m:t>−</m:t>
+                              </m:r>
+                              <m:sSub>
+                                <m:sSubPr>
+                                  <m:ctrlPr>
+                                    <a:rPr lang="en-US" altLang="zh-CN" sz="1400" i="1">
+                                      <a:latin typeface="Cambria Math" panose="02040503050406030204" charset="0"/>
+                                      <a:cs typeface="Cambria Math" panose="02040503050406030204" charset="0"/>
+                                    </a:rPr>
+                                  </m:ctrlPr>
+                                </m:sSubPr>
+                                <m:e>
+                                  <m:r>
+                                    <a:rPr lang="en-US" altLang="zh-CN" sz="1400" i="1">
+                                      <a:latin typeface="Cambria Math" panose="02040503050406030204" charset="0"/>
+                                      <a:cs typeface="Cambria Math" panose="02040503050406030204" charset="0"/>
+                                    </a:rPr>
+                                    <m:t>𝐿</m:t>
+                                  </m:r>
+                                </m:e>
+                                <m:sub>
+                                  <m:r>
+                                    <a:rPr lang="en-US" altLang="zh-CN" sz="1400" i="1">
+                                      <a:latin typeface="Cambria Math" panose="02040503050406030204" charset="0"/>
+                                      <a:cs typeface="Cambria Math" panose="02040503050406030204" charset="0"/>
+                                    </a:rPr>
+                                    <m:t>𝑘</m:t>
+                                  </m:r>
+                                  <m:r>
+                                    <a:rPr lang="en-US" altLang="zh-CN" sz="1400" i="1">
+                                      <a:latin typeface="Cambria Math" panose="02040503050406030204" charset="0"/>
+                                      <a:cs typeface="Cambria Math" panose="02040503050406030204" charset="0"/>
+                                    </a:rPr>
+                                    <m:t>,</m:t>
+                                  </m:r>
+                                  <m:r>
+                                    <a:rPr lang="en-US" altLang="zh-CN" sz="1400" i="1">
+                                      <a:latin typeface="Cambria Math" panose="02040503050406030204" charset="0"/>
+                                      <a:cs typeface="Cambria Math" panose="02040503050406030204" charset="0"/>
+                                    </a:rPr>
+                                    <m:t>𝑖</m:t>
+                                  </m:r>
+                                </m:sub>
+                              </m:sSub>
+                              <m:sSub>
+                                <m:sSubPr>
+                                  <m:ctrlPr>
+                                    <a:rPr lang="en-US" altLang="zh-CN" sz="1400" i="1">
+                                      <a:latin typeface="Cambria Math" panose="02040503050406030204" charset="0"/>
+                                      <a:cs typeface="Cambria Math" panose="02040503050406030204" charset="0"/>
+                                    </a:rPr>
+                                  </m:ctrlPr>
+                                </m:sSubPr>
+                                <m:e>
+                                  <m:r>
+                                    <a:rPr lang="en-US" altLang="zh-CN" sz="1400" i="1">
+                                      <a:latin typeface="Cambria Math" panose="02040503050406030204" charset="0"/>
+                                      <a:cs typeface="Cambria Math" panose="02040503050406030204" charset="0"/>
+                                    </a:rPr>
+                                    <m:t>𝑋</m:t>
+                                  </m:r>
+                                </m:e>
+                                <m:sub>
+                                  <m:r>
+                                    <a:rPr lang="en-US" altLang="zh-CN" sz="1400" i="1">
+                                      <a:latin typeface="Cambria Math" panose="02040503050406030204" charset="0"/>
+                                      <a:cs typeface="Cambria Math" panose="02040503050406030204" charset="0"/>
+                                    </a:rPr>
+                                    <m:t>𝑖</m:t>
+                                  </m:r>
+                                  <m:r>
+                                    <a:rPr lang="en-US" altLang="zh-CN" sz="1400" i="1">
+                                      <a:latin typeface="Cambria Math" panose="02040503050406030204" charset="0"/>
+                                      <a:cs typeface="Cambria Math" panose="02040503050406030204" charset="0"/>
+                                    </a:rPr>
+                                    <m:t>,</m:t>
+                                  </m:r>
+                                  <m:r>
+                                    <a:rPr lang="en-US" altLang="zh-CN" sz="1400" i="1">
+                                      <a:latin typeface="Cambria Math" panose="02040503050406030204" charset="0"/>
+                                      <a:cs typeface="Cambria Math" panose="02040503050406030204" charset="0"/>
+                                    </a:rPr>
+                                    <m:t>𝑗</m:t>
+                                  </m:r>
+                                </m:sub>
+                              </m:sSub>
+                            </m:oMath>
+                          </a14:m>
                           <a:endParaRPr lang="en-US" altLang="zh-CN" sz="1400" b="0">
                             <a:latin typeface="Times New Roman" panose="02020603050405020304" charset="0"/>
                             <a:cs typeface="Times New Roman" panose="02020603050405020304" charset="0"/>
@@ -8792,219 +8755,7 @@
                               <a:latin typeface="Times New Roman" panose="02020603050405020304" charset="0"/>
                               <a:cs typeface="Times New Roman" panose="02020603050405020304" charset="0"/>
                             </a:rPr>
-                            <a:t>9:             </a:t>
-                          </a:r>
-                          <a14:m>
-                            <m:oMath xmlns:m="http://schemas.openxmlformats.org/officeDocument/2006/math">
-                              <m:sSub>
-                                <m:sSubPr>
-                                  <m:ctrlPr>
-                                    <a:rPr lang="en-US" altLang="zh-CN" sz="1400" b="0" i="1">
-                                      <a:latin typeface="Cambria Math" panose="02040503050406030204" charset="0"/>
-                                      <a:cs typeface="Cambria Math" panose="02040503050406030204" charset="0"/>
-                                    </a:rPr>
-                                  </m:ctrlPr>
-                                </m:sSubPr>
-                                <m:e>
-                                  <m:r>
-                                    <a:rPr lang="en-US" altLang="zh-CN" sz="1400" b="0" i="1">
-                                      <a:latin typeface="Cambria Math" panose="02040503050406030204" charset="0"/>
-                                      <a:cs typeface="Cambria Math" panose="02040503050406030204" charset="0"/>
-                                    </a:rPr>
-                                    <m:t>𝐴</m:t>
-                                  </m:r>
-                                </m:e>
-                                <m:sub>
-                                  <m:r>
-                                    <a:rPr lang="en-US" altLang="zh-CN" sz="1400" b="0" i="1">
-                                      <a:latin typeface="Cambria Math" panose="02040503050406030204" charset="0"/>
-                                      <a:cs typeface="Cambria Math" panose="02040503050406030204" charset="0"/>
-                                    </a:rPr>
-                                    <m:t>𝑘</m:t>
-                                  </m:r>
-                                  <m:r>
-                                    <a:rPr lang="en-US" altLang="zh-CN" sz="1400" b="0" i="1">
-                                      <a:latin typeface="Cambria Math" panose="02040503050406030204" charset="0"/>
-                                      <a:cs typeface="Cambria Math" panose="02040503050406030204" charset="0"/>
-                                    </a:rPr>
-                                    <m:t>,</m:t>
-                                  </m:r>
-                                  <m:r>
-                                    <a:rPr lang="en-US" altLang="zh-CN" sz="1400" b="0" i="1">
-                                      <a:latin typeface="Cambria Math" panose="02040503050406030204" charset="0"/>
-                                      <a:cs typeface="Cambria Math" panose="02040503050406030204" charset="0"/>
-                                    </a:rPr>
-                                    <m:t>𝑗</m:t>
-                                  </m:r>
-                                </m:sub>
-                              </m:sSub>
-                              <m:r>
-                                <a:rPr lang="en-US" altLang="zh-CN" sz="1400" i="1">
-                                  <a:latin typeface="Cambria Math" panose="02040503050406030204" charset="0"/>
-                                  <a:cs typeface="Cambria Math" panose="02040503050406030204" charset="0"/>
-                                </a:rPr>
-                                <m:t>← </m:t>
-                              </m:r>
-                              <m:sSub>
-                                <m:sSubPr>
-                                  <m:ctrlPr>
-                                    <a:rPr lang="en-US" altLang="zh-CN" sz="1400" i="1">
-                                      <a:latin typeface="Cambria Math" panose="02040503050406030204" charset="0"/>
-                                      <a:cs typeface="Cambria Math" panose="02040503050406030204" charset="0"/>
-                                    </a:rPr>
-                                  </m:ctrlPr>
-                                </m:sSubPr>
-                                <m:e>
-                                  <m:r>
-                                    <a:rPr lang="en-US" altLang="zh-CN" sz="1400" i="1">
-                                      <a:latin typeface="Cambria Math" panose="02040503050406030204" charset="0"/>
-                                      <a:cs typeface="Cambria Math" panose="02040503050406030204" charset="0"/>
-                                    </a:rPr>
-                                    <m:t>𝐴</m:t>
-                                  </m:r>
-                                </m:e>
-                                <m:sub>
-                                  <m:r>
-                                    <a:rPr lang="en-US" altLang="zh-CN" sz="1400" i="1">
-                                      <a:latin typeface="Cambria Math" panose="02040503050406030204" charset="0"/>
-                                      <a:cs typeface="Cambria Math" panose="02040503050406030204" charset="0"/>
-                                    </a:rPr>
-                                    <m:t>𝑘</m:t>
-                                  </m:r>
-                                  <m:r>
-                                    <a:rPr lang="en-US" altLang="zh-CN" sz="1400" i="1">
-                                      <a:latin typeface="Cambria Math" panose="02040503050406030204" charset="0"/>
-                                      <a:cs typeface="Cambria Math" panose="02040503050406030204" charset="0"/>
-                                    </a:rPr>
-                                    <m:t>,</m:t>
-                                  </m:r>
-                                  <m:r>
-                                    <a:rPr lang="en-US" altLang="zh-CN" sz="1400" i="1">
-                                      <a:latin typeface="Cambria Math" panose="02040503050406030204" charset="0"/>
-                                      <a:cs typeface="Cambria Math" panose="02040503050406030204" charset="0"/>
-                                    </a:rPr>
-                                    <m:t>𝑗</m:t>
-                                  </m:r>
-                                </m:sub>
-                              </m:sSub>
-                              <m:r>
-                                <a:rPr lang="en-US" altLang="zh-CN" sz="1400" i="1">
-                                  <a:latin typeface="Cambria Math" panose="02040503050406030204" charset="0"/>
-                                  <a:cs typeface="Cambria Math" panose="02040503050406030204" charset="0"/>
-                                </a:rPr>
-                                <m:t>−</m:t>
-                              </m:r>
-                              <m:sSub>
-                                <m:sSubPr>
-                                  <m:ctrlPr>
-                                    <a:rPr lang="en-US" altLang="zh-CN" sz="1400" i="1">
-                                      <a:latin typeface="Cambria Math" panose="02040503050406030204" charset="0"/>
-                                      <a:cs typeface="Cambria Math" panose="02040503050406030204" charset="0"/>
-                                    </a:rPr>
-                                  </m:ctrlPr>
-                                </m:sSubPr>
-                                <m:e>
-                                  <m:r>
-                                    <a:rPr lang="en-US" altLang="zh-CN" sz="1400" i="1">
-                                      <a:latin typeface="Cambria Math" panose="02040503050406030204" charset="0"/>
-                                      <a:cs typeface="Cambria Math" panose="02040503050406030204" charset="0"/>
-                                    </a:rPr>
-                                    <m:t>𝐴</m:t>
-                                  </m:r>
-                                </m:e>
-                                <m:sub>
-                                  <m:r>
-                                    <a:rPr lang="en-US" altLang="zh-CN" sz="1400" i="1">
-                                      <a:latin typeface="Cambria Math" panose="02040503050406030204" charset="0"/>
-                                      <a:cs typeface="Cambria Math" panose="02040503050406030204" charset="0"/>
-                                    </a:rPr>
-                                    <m:t>𝑘</m:t>
-                                  </m:r>
-                                  <m:r>
-                                    <a:rPr lang="en-US" altLang="zh-CN" sz="1400" i="1">
-                                      <a:latin typeface="Cambria Math" panose="02040503050406030204" charset="0"/>
-                                      <a:cs typeface="Cambria Math" panose="02040503050406030204" charset="0"/>
-                                    </a:rPr>
-                                    <m:t>,</m:t>
-                                  </m:r>
-                                  <m:r>
-                                    <a:rPr lang="en-US" altLang="zh-CN" sz="1400" i="1">
-                                      <a:latin typeface="Cambria Math" panose="02040503050406030204" charset="0"/>
-                                      <a:cs typeface="Cambria Math" panose="02040503050406030204" charset="0"/>
-                                    </a:rPr>
-                                    <m:t>𝑖</m:t>
-                                  </m:r>
-                                </m:sub>
-                              </m:sSub>
-                              <m:sSub>
-                                <m:sSubPr>
-                                  <m:ctrlPr>
-                                    <a:rPr lang="en-US" altLang="zh-CN" sz="1400" i="1">
-                                      <a:latin typeface="Cambria Math" panose="02040503050406030204" charset="0"/>
-                                      <a:cs typeface="Cambria Math" panose="02040503050406030204" charset="0"/>
-                                    </a:rPr>
-                                  </m:ctrlPr>
-                                </m:sSubPr>
-                                <m:e>
-                                  <m:r>
-                                    <a:rPr lang="en-US" altLang="zh-CN" sz="1400" i="1">
-                                      <a:latin typeface="Cambria Math" panose="02040503050406030204" charset="0"/>
-                                      <a:cs typeface="Cambria Math" panose="02040503050406030204" charset="0"/>
-                                    </a:rPr>
-                                    <m:t>𝐴</m:t>
-                                  </m:r>
-                                </m:e>
-                                <m:sub>
-                                  <m:r>
-                                    <a:rPr lang="en-US" altLang="zh-CN" sz="1400" i="1">
-                                      <a:latin typeface="Cambria Math" panose="02040503050406030204" charset="0"/>
-                                      <a:cs typeface="Cambria Math" panose="02040503050406030204" charset="0"/>
-                                    </a:rPr>
-                                    <m:t>𝑖</m:t>
-                                  </m:r>
-                                  <m:r>
-                                    <a:rPr lang="en-US" altLang="zh-CN" sz="1400" i="1">
-                                      <a:latin typeface="Cambria Math" panose="02040503050406030204" charset="0"/>
-                                      <a:cs typeface="Cambria Math" panose="02040503050406030204" charset="0"/>
-                                    </a:rPr>
-                                    <m:t>,</m:t>
-                                  </m:r>
-                                  <m:r>
-                                    <a:rPr lang="en-US" altLang="zh-CN" sz="1400" i="1">
-                                      <a:latin typeface="Cambria Math" panose="02040503050406030204" charset="0"/>
-                                      <a:cs typeface="Cambria Math" panose="02040503050406030204" charset="0"/>
-                                    </a:rPr>
-                                    <m:t>𝑗</m:t>
-                                  </m:r>
-                                </m:sub>
-                              </m:sSub>
-                            </m:oMath>
-                          </a14:m>
-                          <a:r>
-                            <a:rPr lang="en-US" altLang="zh-CN" sz="1400" b="0">
-                              <a:latin typeface="Times New Roman" panose="02020603050405020304" charset="0"/>
-                              <a:cs typeface="Times New Roman" panose="02020603050405020304" charset="0"/>
-                            </a:rPr>
-                            <a:t> </a:t>
-                          </a:r>
-                          <a:endParaRPr lang="en-US" altLang="zh-CN" sz="1400" b="0">
-                            <a:latin typeface="Times New Roman" panose="02020603050405020304" charset="0"/>
-                            <a:cs typeface="Times New Roman" panose="02020603050405020304" charset="0"/>
-                          </a:endParaRPr>
-                        </a:p>
-                        <a:p>
-                          <a:pPr indent="0" fontAlgn="auto">
-                            <a:lnSpc>
-                              <a:spcPts val="1880"/>
-                            </a:lnSpc>
-                            <a:buNone/>
-                          </a:pPr>
-                          <a:r>
-                            <a:rPr lang="en-US" altLang="zh-CN" sz="1400" b="0">
-                              <a:latin typeface="Times New Roman" panose="02020603050405020304" charset="0"/>
-                              <a:cs typeface="Times New Roman" panose="02020603050405020304" charset="0"/>
-                            </a:rPr>
-                            <a:t>10:       </a:t>
+                            <a:t>8:          </a:t>
                           </a:r>
                           <a:r>
                             <a:rPr lang="en-US" altLang="zh-CN" sz="1400" b="1">
@@ -9030,7 +8781,7 @@
                               <a:latin typeface="Times New Roman" panose="02020603050405020304" charset="0"/>
                               <a:cs typeface="Times New Roman" panose="02020603050405020304" charset="0"/>
                             </a:rPr>
-                            <a:t>11:    </a:t>
+                            <a:t>9:      </a:t>
                           </a:r>
                           <a:r>
                             <a:rPr lang="en-US" altLang="zh-CN" sz="1400" b="1">
@@ -9056,7 +8807,7 @@
                               <a:latin typeface="Times New Roman" panose="02020603050405020304" charset="0"/>
                               <a:cs typeface="Times New Roman" panose="02020603050405020304" charset="0"/>
                             </a:rPr>
-                            <a:t>12: </a:t>
+                            <a:t>10:</a:t>
                           </a:r>
                           <a:r>
                             <a:rPr lang="en-US" altLang="zh-CN" sz="1400" b="1">
@@ -9145,16 +8896,16 @@
                               <a:latin typeface="Times New Roman" panose="02020603050405020304" charset="0"/>
                               <a:cs typeface="Times New Roman" panose="02020603050405020304" charset="0"/>
                             </a:rPr>
-                            <a:t>：块三角</a:t>
+                            <a:t>：块三角求解</a:t>
                           </a:r>
                           <a:r>
-                            <a:rPr lang="zh-CN" altLang="en-US">
+                            <a:rPr lang="en-US" altLang="zh-CN">
                               <a:latin typeface="Times New Roman" panose="02020603050405020304" charset="0"/>
                               <a:cs typeface="Times New Roman" panose="02020603050405020304" charset="0"/>
                             </a:rPr>
-                            <a:t>求解</a:t>
+                            <a:t>1</a:t>
                           </a:r>
-                          <a:endParaRPr lang="zh-CN" altLang="en-US">
+                          <a:endParaRPr lang="en-US" altLang="zh-CN">
                             <a:latin typeface="Times New Roman" panose="02020603050405020304" charset="0"/>
                             <a:cs typeface="Times New Roman" panose="02020603050405020304" charset="0"/>
                           </a:endParaRPr>
@@ -9191,7 +8942,7 @@
                       </a:tcPr>
                     </a:tc>
                   </a:tr>
-                  <a:tr h="3434080">
+                  <a:tr h="2956560">
                     <a:tc>
                       <a:txBody>
                         <a:bodyPr/>
@@ -9231,9 +8982,62 @@
           </p:graphicFrame>
         </mc:Fallback>
       </mc:AlternateContent>
+      <p:graphicFrame>
+        <p:nvGraphicFramePr>
+          <p:cNvPr id="2" name="对象 1">
+            <a:hlinkClick r:id="" action="ppaction://ole?verb="/>
+          </p:cNvPr>
+          <p:cNvGraphicFramePr>
+            <a:graphicFrameLocks noChangeAspect="1"/>
+          </p:cNvGraphicFramePr>
+          <p:nvPr/>
+        </p:nvGraphicFramePr>
+        <p:xfrm>
+          <a:off x="6038850" y="3321050"/>
+          <a:ext cx="114300" cy="215900"/>
+        </p:xfrm>
+        <a:graphic>
+          <a:graphicData uri="http://schemas.openxmlformats.org/presentationml/2006/ole">
+            <mc:AlternateContent xmlns:mc="http://schemas.openxmlformats.org/markup-compatibility/2006">
+              <mc:Choice xmlns:v="urn:schemas-microsoft-com:vml" Requires="v">
+                <p:oleObj spid="_x0000_s1025" name="" r:id="rId4" imgW="114300" imgH="215900" progId="Equation.KSEE3">
+                  <p:embed/>
+                </p:oleObj>
+              </mc:Choice>
+              <mc:Fallback>
+                <p:oleObj name="" r:id="rId4" imgW="114300" imgH="215900" progId="Equation.KSEE3">
+                  <p:embed/>
+                  <p:pic>
+                    <p:nvPicPr>
+                      <p:cNvPr id="0" name="图片 1024"/>
+                      <p:cNvPicPr/>
+                      <p:nvPr/>
+                    </p:nvPicPr>
+                    <p:blipFill>
+                      <a:blip r:embed="rId5"/>
+                      <a:stretch>
+                        <a:fillRect/>
+                      </a:stretch>
+                    </p:blipFill>
+                    <p:spPr>
+                      <a:xfrm>
+                        <a:off x="6038850" y="3321050"/>
+                        <a:ext cx="114300" cy="215900"/>
+                      </a:xfrm>
+                      <a:prstGeom prst="rect">
+                        <a:avLst/>
+                      </a:prstGeom>
+                    </p:spPr>
+                  </p:pic>
+                </p:oleObj>
+              </mc:Fallback>
+            </mc:AlternateContent>
+          </a:graphicData>
+        </a:graphic>
+      </p:graphicFrame>
     </p:spTree>
     <p:custDataLst>
-      <p:tags r:id="rId4"/>
+      <p:tags r:id="rId6"/>
     </p:custDataLst>
   </p:cSld>
   <p:clrMapOvr>
@@ -9243,6 +9047,1030 @@
 </file>
 
 <file path=ppt/slides/slide6.xml><?xml version="1.0" encoding="utf-8"?>
+<p:sld xmlns:a="http://schemas.openxmlformats.org/drawingml/2006/main" xmlns:r="http://schemas.openxmlformats.org/officeDocument/2006/relationships" xmlns:p="http://schemas.openxmlformats.org/presentationml/2006/main">
+  <p:cSld>
+    <p:spTree>
+      <p:nvGrpSpPr>
+        <p:cNvPr id="1" name=""/>
+        <p:cNvGrpSpPr/>
+        <p:nvPr/>
+      </p:nvGrpSpPr>
+      <p:grpSpPr/>
+      <mc:AlternateContent xmlns:mc="http://schemas.openxmlformats.org/markup-compatibility/2006" xmlns:a14="http://schemas.microsoft.com/office/drawing/2010/main">
+        <mc:Choice Requires="a14">
+          <p:graphicFrame>
+            <p:nvGraphicFramePr>
+              <p:cNvPr id="4" name="表格 3"/>
+              <p:cNvGraphicFramePr/>
+              <p:nvPr>
+                <p:custDataLst>
+                  <p:tags r:id="rId1"/>
+                </p:custDataLst>
+              </p:nvPr>
+            </p:nvGraphicFramePr>
+            <p:xfrm>
+              <a:off x="1828800" y="1085850"/>
+              <a:ext cx="8530590" cy="3295650"/>
+            </p:xfrm>
+            <a:graphic>
+              <a:graphicData uri="http://schemas.openxmlformats.org/drawingml/2006/table">
+                <a:tbl>
+                  <a:tblPr>
+                    <a:tableStyleId>{D7AC3CCA-C797-4891-BE02-D94E43425B78}</a:tableStyleId>
+                  </a:tblPr>
+                  <a:tblGrid>
+                    <a:gridCol w="8530590"/>
+                  </a:tblGrid>
+                  <a:tr h="396000">
+                    <a:tc>
+                      <a:txBody>
+                        <a:bodyPr/>
+                        <a:p>
+                          <a:pPr algn="l">
+                            <a:buNone/>
+                          </a:pPr>
+                          <a:r>
+                            <a:rPr lang="en-US" altLang="zh-CN">
+                              <a:latin typeface="Times New Roman" panose="02020603050405020304" charset="0"/>
+                              <a:cs typeface="Times New Roman" panose="02020603050405020304" charset="0"/>
+                            </a:rPr>
+                            <a:t>Algorithm 4</a:t>
+                          </a:r>
+                          <a:r>
+                            <a:rPr lang="zh-CN" altLang="en-US">
+                              <a:latin typeface="Times New Roman" panose="02020603050405020304" charset="0"/>
+                              <a:cs typeface="Times New Roman" panose="02020603050405020304" charset="0"/>
+                            </a:rPr>
+                            <a:t>：块三角求解</a:t>
+                          </a:r>
+                          <a:r>
+                            <a:rPr lang="en-US" altLang="zh-CN">
+                              <a:latin typeface="Times New Roman" panose="02020603050405020304" charset="0"/>
+                              <a:cs typeface="Times New Roman" panose="02020603050405020304" charset="0"/>
+                            </a:rPr>
+                            <a:t>2</a:t>
+                          </a:r>
+                          <a:endParaRPr lang="en-US" altLang="zh-CN">
+                            <a:latin typeface="Times New Roman" panose="02020603050405020304" charset="0"/>
+                            <a:cs typeface="Times New Roman" panose="02020603050405020304" charset="0"/>
+                          </a:endParaRPr>
+                        </a:p>
+                      </a:txBody>
+                      <a:tcPr>
+                        <a:lnL>
+                          <a:noFill/>
+                        </a:lnL>
+                        <a:lnR>
+                          <a:noFill/>
+                        </a:lnR>
+                        <a:lnT w="12700">
+                          <a:solidFill>
+                            <a:schemeClr val="tx1"/>
+                          </a:solidFill>
+                          <a:prstDash val="solid"/>
+                        </a:lnT>
+                        <a:lnB w="12700">
+                          <a:solidFill>
+                            <a:schemeClr val="tx1"/>
+                          </a:solidFill>
+                          <a:prstDash val="solid"/>
+                        </a:lnB>
+                        <a:lnTlToBr>
+                          <a:noFill/>
+                        </a:lnTlToBr>
+                        <a:lnBlToTr>
+                          <a:noFill/>
+                        </a:lnBlToTr>
+                        <a:solidFill>
+                          <a:schemeClr val="bg1"/>
+                        </a:solidFill>
+                      </a:tcPr>
+                    </a:tc>
+                  </a:tr>
+                  <a:tr h="2636520">
+                    <a:tc>
+                      <a:txBody>
+                        <a:bodyPr/>
+                        <a:p>
+                          <a:pPr indent="0" fontAlgn="auto">
+                            <a:lnSpc>
+                              <a:spcPts val="1880"/>
+                            </a:lnSpc>
+                            <a:buNone/>
+                          </a:pPr>
+                          <a:r>
+                            <a:rPr lang="en-US" altLang="zh-CN" sz="1400" b="1">
+                              <a:latin typeface="Times New Roman" panose="02020603050405020304" charset="0"/>
+                              <a:cs typeface="Times New Roman" panose="02020603050405020304" charset="0"/>
+                            </a:rPr>
+                            <a:t>Input: </a:t>
+                          </a:r>
+                          <a:r>
+                            <a:rPr lang="en-US" altLang="zh-CN" sz="1400" b="0">
+                              <a:latin typeface="Times New Roman" panose="02020603050405020304" charset="0"/>
+                              <a:cs typeface="Times New Roman" panose="02020603050405020304" charset="0"/>
+                            </a:rPr>
+                            <a:t>a n*n block matrix B, a n*n block matrix U(upper </a:t>
+                          </a:r>
+                          <a:r>
+                            <a:rPr lang="en-US" altLang="zh-CN" sz="1400" b="0">
+                              <a:latin typeface="Times New Roman" panose="02020603050405020304" charset="0"/>
+                              <a:cs typeface="Times New Roman" panose="02020603050405020304" charset="0"/>
+                            </a:rPr>
+                            <a:t>triangle)</a:t>
+                          </a:r>
+                          <a:endParaRPr lang="en-US" altLang="zh-CN" sz="1400" b="0">
+                            <a:latin typeface="Times New Roman" panose="02020603050405020304" charset="0"/>
+                            <a:cs typeface="Times New Roman" panose="02020603050405020304" charset="0"/>
+                          </a:endParaRPr>
+                        </a:p>
+                        <a:p>
+                          <a:pPr indent="0" fontAlgn="auto">
+                            <a:lnSpc>
+                              <a:spcPts val="1880"/>
+                            </a:lnSpc>
+                            <a:buNone/>
+                          </a:pPr>
+                          <a:r>
+                            <a:rPr lang="en-US" altLang="zh-CN" sz="1400" b="1">
+                              <a:latin typeface="Times New Roman" panose="02020603050405020304" charset="0"/>
+                              <a:cs typeface="Times New Roman" panose="02020603050405020304" charset="0"/>
+                            </a:rPr>
+                            <a:t>Output: X // XU=B</a:t>
+                          </a:r>
+                          <a:endParaRPr lang="en-US" altLang="zh-CN" sz="1400" b="0">
+                            <a:latin typeface="Times New Roman" panose="02020603050405020304" charset="0"/>
+                            <a:cs typeface="Times New Roman" panose="02020603050405020304" charset="0"/>
+                          </a:endParaRPr>
+                        </a:p>
+                        <a:p>
+                          <a:pPr indent="0" fontAlgn="auto">
+                            <a:lnSpc>
+                              <a:spcPts val="1880"/>
+                            </a:lnSpc>
+                            <a:buNone/>
+                          </a:pPr>
+                          <a:r>
+                            <a:rPr lang="en-US" altLang="zh-CN" sz="1400" b="0">
+                              <a:latin typeface="Times New Roman" panose="02020603050405020304" charset="0"/>
+                              <a:cs typeface="Times New Roman" panose="02020603050405020304" charset="0"/>
+                            </a:rPr>
+                            <a:t>1: </a:t>
+                          </a:r>
+                          <a:r>
+                            <a:rPr lang="en-US" altLang="zh-CN" sz="1400" b="1">
+                              <a:latin typeface="Times New Roman" panose="02020603050405020304" charset="0"/>
+                              <a:cs typeface="Times New Roman" panose="02020603050405020304" charset="0"/>
+                            </a:rPr>
+                            <a:t>for</a:t>
+                          </a:r>
+                          <a:r>
+                            <a:rPr lang="en-US" altLang="zh-CN" sz="1400" b="0">
+                              <a:latin typeface="Times New Roman" panose="02020603050405020304" charset="0"/>
+                              <a:cs typeface="Times New Roman" panose="02020603050405020304" charset="0"/>
+                            </a:rPr>
+                            <a:t> j = 1 to n </a:t>
+                          </a:r>
+                          <a:r>
+                            <a:rPr lang="en-US" altLang="zh-CN" sz="1400" b="1">
+                              <a:latin typeface="Times New Roman" panose="02020603050405020304" charset="0"/>
+                              <a:cs typeface="Times New Roman" panose="02020603050405020304" charset="0"/>
+                            </a:rPr>
+                            <a:t>do</a:t>
+                          </a:r>
+                          <a:endParaRPr lang="en-US" altLang="zh-CN" sz="1400" b="0">
+                            <a:latin typeface="Times New Roman" panose="02020603050405020304" charset="0"/>
+                            <a:cs typeface="Times New Roman" panose="02020603050405020304" charset="0"/>
+                          </a:endParaRPr>
+                        </a:p>
+                        <a:p>
+                          <a:pPr indent="0" fontAlgn="auto">
+                            <a:lnSpc>
+                              <a:spcPts val="1880"/>
+                            </a:lnSpc>
+                            <a:buNone/>
+                          </a:pPr>
+                          <a:r>
+                            <a:rPr lang="en-US" altLang="zh-CN" sz="1400" b="0">
+                              <a:latin typeface="Times New Roman" panose="02020603050405020304" charset="0"/>
+                              <a:cs typeface="Times New Roman" panose="02020603050405020304" charset="0"/>
+                            </a:rPr>
+                            <a:t>2:     </a:t>
+                          </a:r>
+                          <a:r>
+                            <a:rPr lang="en-US" altLang="zh-CN" sz="1400" b="1">
+                              <a:latin typeface="Times New Roman" panose="02020603050405020304" charset="0"/>
+                              <a:cs typeface="Times New Roman" panose="02020603050405020304" charset="0"/>
+                            </a:rPr>
+                            <a:t>for</a:t>
+                          </a:r>
+                          <a:r>
+                            <a:rPr lang="en-US" altLang="zh-CN" sz="1400" b="0">
+                              <a:latin typeface="Times New Roman" panose="02020603050405020304" charset="0"/>
+                              <a:cs typeface="Times New Roman" panose="02020603050405020304" charset="0"/>
+                            </a:rPr>
+                            <a:t> i = j to n </a:t>
+                          </a:r>
+                          <a:r>
+                            <a:rPr lang="en-US" altLang="zh-CN" sz="1400" b="1">
+                              <a:latin typeface="Times New Roman" panose="02020603050405020304" charset="0"/>
+                              <a:cs typeface="Times New Roman" panose="02020603050405020304" charset="0"/>
+                            </a:rPr>
+                            <a:t>do</a:t>
+                          </a:r>
+                          <a:endParaRPr lang="zh-CN" altLang="en-US" sz="1400" b="0">
+                            <a:latin typeface="Times New Roman" panose="02020603050405020304" charset="0"/>
+                            <a:cs typeface="Times New Roman" panose="02020603050405020304" charset="0"/>
+                          </a:endParaRPr>
+                        </a:p>
+                        <a:p>
+                          <a:pPr indent="0" fontAlgn="auto">
+                            <a:lnSpc>
+                              <a:spcPts val="1880"/>
+                            </a:lnSpc>
+                            <a:buNone/>
+                          </a:pPr>
+                          <a:r>
+                            <a:rPr lang="en-US" altLang="zh-CN" sz="1400" b="0">
+                              <a:latin typeface="Times New Roman" panose="02020603050405020304" charset="0"/>
+                              <a:cs typeface="Times New Roman" panose="02020603050405020304" charset="0"/>
+                            </a:rPr>
+                            <a:t>3:         </a:t>
+                          </a:r>
+                          <a14:m>
+                            <m:oMath xmlns:m="http://schemas.openxmlformats.org/officeDocument/2006/math">
+                              <m:sSub>
+                                <m:sSubPr>
+                                  <m:ctrlPr>
+                                    <a:rPr lang="en-US" altLang="zh-CN" sz="1400" b="0" i="1">
+                                      <a:latin typeface="Cambria Math" panose="02040503050406030204" charset="0"/>
+                                      <a:cs typeface="Cambria Math" panose="02040503050406030204" charset="0"/>
+                                    </a:rPr>
+                                  </m:ctrlPr>
+                                </m:sSubPr>
+                                <m:e>
+                                  <m:r>
+                                    <a:rPr lang="en-US" altLang="zh-CN" sz="1400" b="0" i="1">
+                                      <a:latin typeface="Cambria Math" panose="02040503050406030204" charset="0"/>
+                                      <a:cs typeface="Cambria Math" panose="02040503050406030204" charset="0"/>
+                                    </a:rPr>
+                                    <m:t>𝑋</m:t>
+                                  </m:r>
+                                </m:e>
+                                <m:sub>
+                                  <m:r>
+                                    <a:rPr lang="en-US" altLang="zh-CN" sz="1400" b="0" i="1">
+                                      <a:latin typeface="Cambria Math" panose="02040503050406030204" charset="0"/>
+                                      <a:cs typeface="Cambria Math" panose="02040503050406030204" charset="0"/>
+                                    </a:rPr>
+                                    <m:t>𝑖</m:t>
+                                  </m:r>
+                                  <m:r>
+                                    <a:rPr lang="en-US" altLang="zh-CN" sz="1400" b="0" i="1">
+                                      <a:latin typeface="Cambria Math" panose="02040503050406030204" charset="0"/>
+                                      <a:cs typeface="Cambria Math" panose="02040503050406030204" charset="0"/>
+                                    </a:rPr>
+                                    <m:t>,</m:t>
+                                  </m:r>
+                                  <m:r>
+                                    <a:rPr lang="en-US" altLang="zh-CN" sz="1400" b="0" i="1">
+                                      <a:latin typeface="Cambria Math" panose="02040503050406030204" charset="0"/>
+                                      <a:cs typeface="Cambria Math" panose="02040503050406030204" charset="0"/>
+                                    </a:rPr>
+                                    <m:t>𝑗</m:t>
+                                  </m:r>
+                                </m:sub>
+                              </m:sSub>
+                              <m:r>
+                                <a:rPr lang="en-US" altLang="zh-CN" sz="1400" i="1">
+                                  <a:latin typeface="Cambria Math" panose="02040503050406030204" charset="0"/>
+                                  <a:cs typeface="Cambria Math" panose="02040503050406030204" charset="0"/>
+                                </a:rPr>
+                                <m:t>←</m:t>
+                              </m:r>
+                              <m:sSub>
+                                <m:sSubPr>
+                                  <m:ctrlPr>
+                                    <a:rPr lang="en-US" altLang="zh-CN" sz="1400" i="1">
+                                      <a:latin typeface="Cambria Math" panose="02040503050406030204" charset="0"/>
+                                      <a:cs typeface="Cambria Math" panose="02040503050406030204" charset="0"/>
+                                    </a:rPr>
+                                  </m:ctrlPr>
+                                </m:sSubPr>
+                                <m:e>
+                                  <m:r>
+                                    <a:rPr lang="en-US" altLang="zh-CN" sz="1400" i="1">
+                                      <a:latin typeface="Cambria Math" panose="02040503050406030204" charset="0"/>
+                                      <a:cs typeface="Cambria Math" panose="02040503050406030204" charset="0"/>
+                                    </a:rPr>
+                                    <m:t>𝐵</m:t>
+                                  </m:r>
+                                </m:e>
+                                <m:sub>
+                                  <m:r>
+                                    <a:rPr lang="en-US" altLang="zh-CN" sz="1400" i="1">
+                                      <a:latin typeface="Cambria Math" panose="02040503050406030204" charset="0"/>
+                                      <a:cs typeface="Cambria Math" panose="02040503050406030204" charset="0"/>
+                                    </a:rPr>
+                                    <m:t>𝑖</m:t>
+                                  </m:r>
+                                  <m:r>
+                                    <a:rPr lang="en-US" altLang="zh-CN" sz="1400" i="1">
+                                      <a:latin typeface="Cambria Math" panose="02040503050406030204" charset="0"/>
+                                      <a:cs typeface="Cambria Math" panose="02040503050406030204" charset="0"/>
+                                    </a:rPr>
+                                    <m:t>,</m:t>
+                                  </m:r>
+                                  <m:r>
+                                    <a:rPr lang="en-US" altLang="zh-CN" sz="1400" i="1">
+                                      <a:latin typeface="Cambria Math" panose="02040503050406030204" charset="0"/>
+                                      <a:cs typeface="Cambria Math" panose="02040503050406030204" charset="0"/>
+                                    </a:rPr>
+                                    <m:t>𝑗</m:t>
+                                  </m:r>
+                                </m:sub>
+                              </m:sSub>
+                              <m:sSubSup>
+                                <m:sSubSupPr>
+                                  <m:ctrlPr>
+                                    <a:rPr lang="en-US" altLang="zh-CN" sz="1400" i="1">
+                                      <a:latin typeface="Cambria Math" panose="02040503050406030204" charset="0"/>
+                                      <a:cs typeface="Cambria Math" panose="02040503050406030204" charset="0"/>
+                                    </a:rPr>
+                                  </m:ctrlPr>
+                                </m:sSubSupPr>
+                                <m:e>
+                                  <m:r>
+                                    <a:rPr lang="en-US" altLang="zh-CN" sz="1400" i="1">
+                                      <a:latin typeface="Cambria Math" panose="02040503050406030204" charset="0"/>
+                                      <a:cs typeface="Cambria Math" panose="02040503050406030204" charset="0"/>
+                                    </a:rPr>
+                                    <m:t>𝑈</m:t>
+                                  </m:r>
+                                </m:e>
+                                <m:sub>
+                                  <m:r>
+                                    <a:rPr lang="en-US" altLang="zh-CN" sz="1400" i="1">
+                                      <a:latin typeface="Cambria Math" panose="02040503050406030204" charset="0"/>
+                                      <a:cs typeface="Cambria Math" panose="02040503050406030204" charset="0"/>
+                                    </a:rPr>
+                                    <m:t>𝑖</m:t>
+                                  </m:r>
+                                  <m:r>
+                                    <a:rPr lang="en-US" altLang="zh-CN" sz="1400" i="1">
+                                      <a:latin typeface="Cambria Math" panose="02040503050406030204" charset="0"/>
+                                      <a:cs typeface="Cambria Math" panose="02040503050406030204" charset="0"/>
+                                    </a:rPr>
+                                    <m:t>,</m:t>
+                                  </m:r>
+                                  <m:r>
+                                    <a:rPr lang="en-US" altLang="zh-CN" sz="1400" i="1">
+                                      <a:latin typeface="Cambria Math" panose="02040503050406030204" charset="0"/>
+                                      <a:cs typeface="Cambria Math" panose="02040503050406030204" charset="0"/>
+                                    </a:rPr>
+                                    <m:t>𝑖</m:t>
+                                  </m:r>
+                                </m:sub>
+                                <m:sup>
+                                  <m:r>
+                                    <a:rPr lang="en-US" altLang="zh-CN" sz="1400" i="1">
+                                      <a:latin typeface="Cambria Math" panose="02040503050406030204" charset="0"/>
+                                      <a:cs typeface="Cambria Math" panose="02040503050406030204" charset="0"/>
+                                    </a:rPr>
+                                    <m:t>−</m:t>
+                                  </m:r>
+                                  <m:r>
+                                    <a:rPr lang="en-US" altLang="zh-CN" sz="1400" i="1">
+                                      <a:latin typeface="Cambria Math" panose="02040503050406030204" charset="0"/>
+                                      <a:cs typeface="Cambria Math" panose="02040503050406030204" charset="0"/>
+                                    </a:rPr>
+                                    <m:t>1</m:t>
+                                  </m:r>
+                                </m:sup>
+                              </m:sSubSup>
+                            </m:oMath>
+                          </a14:m>
+                          <a:endParaRPr lang="en-US" altLang="zh-CN" sz="1400" b="1">
+                            <a:latin typeface="Times New Roman" panose="02020603050405020304" charset="0"/>
+                            <a:cs typeface="Times New Roman" panose="02020603050405020304" charset="0"/>
+                          </a:endParaRPr>
+                        </a:p>
+                        <a:p>
+                          <a:pPr indent="0" fontAlgn="auto">
+                            <a:lnSpc>
+                              <a:spcPts val="1880"/>
+                            </a:lnSpc>
+                            <a:buNone/>
+                          </a:pPr>
+                          <a:r>
+                            <a:rPr lang="en-US" altLang="zh-CN" sz="1400" b="0">
+                              <a:latin typeface="Times New Roman" panose="02020603050405020304" charset="0"/>
+                              <a:cs typeface="Times New Roman" panose="02020603050405020304" charset="0"/>
+                            </a:rPr>
+                            <a:t>4:     </a:t>
+                          </a:r>
+                          <a:r>
+                            <a:rPr lang="en-US" altLang="zh-CN" sz="1400" b="1">
+                              <a:latin typeface="Times New Roman" panose="02020603050405020304" charset="0"/>
+                              <a:cs typeface="Times New Roman" panose="02020603050405020304" charset="0"/>
+                              <a:sym typeface="+mn-ea"/>
+                            </a:rPr>
+                            <a:t>end for</a:t>
+                          </a:r>
+                          <a:endParaRPr lang="en-US" altLang="zh-CN" sz="1400" i="1">
+                            <a:latin typeface="Cambria Math" panose="02040503050406030204" charset="0"/>
+                            <a:cs typeface="Cambria Math" panose="02040503050406030204" charset="0"/>
+                          </a:endParaRPr>
+                        </a:p>
+                        <a:p>
+                          <a:pPr indent="0" fontAlgn="auto">
+                            <a:lnSpc>
+                              <a:spcPts val="1880"/>
+                            </a:lnSpc>
+                            <a:buNone/>
+                          </a:pPr>
+                          <a:r>
+                            <a:rPr lang="en-US" altLang="zh-CN" sz="1400" b="0">
+                              <a:latin typeface="Times New Roman" panose="02020603050405020304" charset="0"/>
+                              <a:cs typeface="Times New Roman" panose="02020603050405020304" charset="0"/>
+                            </a:rPr>
+                            <a:t>5:     </a:t>
+                          </a:r>
+                          <a:r>
+                            <a:rPr lang="en-US" altLang="zh-CN" sz="1400" b="1">
+                              <a:latin typeface="Times New Roman" panose="02020603050405020304" charset="0"/>
+                              <a:cs typeface="Times New Roman" panose="02020603050405020304" charset="0"/>
+                            </a:rPr>
+                            <a:t>for</a:t>
+                          </a:r>
+                          <a:r>
+                            <a:rPr lang="en-US" altLang="zh-CN" sz="1400" b="0">
+                              <a:latin typeface="Times New Roman" panose="02020603050405020304" charset="0"/>
+                              <a:cs typeface="Times New Roman" panose="02020603050405020304" charset="0"/>
+                            </a:rPr>
+                            <a:t> i = j+1 to n </a:t>
+                          </a:r>
+                          <a:r>
+                            <a:rPr lang="en-US" altLang="zh-CN" sz="1400" b="1">
+                              <a:latin typeface="Times New Roman" panose="02020603050405020304" charset="0"/>
+                              <a:cs typeface="Times New Roman" panose="02020603050405020304" charset="0"/>
+                            </a:rPr>
+                            <a:t>do</a:t>
+                          </a:r>
+                          <a:endParaRPr lang="en-US" altLang="zh-CN" sz="1400" b="1">
+                            <a:latin typeface="Times New Roman" panose="02020603050405020304" charset="0"/>
+                            <a:cs typeface="Times New Roman" panose="02020603050405020304" charset="0"/>
+                          </a:endParaRPr>
+                        </a:p>
+                        <a:p>
+                          <a:pPr indent="0" fontAlgn="auto">
+                            <a:lnSpc>
+                              <a:spcPts val="1880"/>
+                            </a:lnSpc>
+                            <a:buNone/>
+                          </a:pPr>
+                          <a:r>
+                            <a:rPr lang="en-US" altLang="zh-CN" sz="1400" b="0">
+                              <a:latin typeface="Times New Roman" panose="02020603050405020304" charset="0"/>
+                              <a:cs typeface="Times New Roman" panose="02020603050405020304" charset="0"/>
+                            </a:rPr>
+                            <a:t>6:         </a:t>
+                          </a:r>
+                          <a:r>
+                            <a:rPr lang="en-US" altLang="zh-CN" sz="1400" b="1">
+                              <a:latin typeface="Times New Roman" panose="02020603050405020304" charset="0"/>
+                              <a:cs typeface="Times New Roman" panose="02020603050405020304" charset="0"/>
+                            </a:rPr>
+                            <a:t>for</a:t>
+                          </a:r>
+                          <a:r>
+                            <a:rPr lang="en-US" altLang="zh-CN" sz="1400" b="0">
+                              <a:latin typeface="Times New Roman" panose="02020603050405020304" charset="0"/>
+                              <a:cs typeface="Times New Roman" panose="02020603050405020304" charset="0"/>
+                            </a:rPr>
+                            <a:t> k = j to n </a:t>
+                          </a:r>
+                          <a:r>
+                            <a:rPr lang="en-US" altLang="zh-CN" sz="1400" b="1">
+                              <a:latin typeface="Times New Roman" panose="02020603050405020304" charset="0"/>
+                              <a:cs typeface="Times New Roman" panose="02020603050405020304" charset="0"/>
+                            </a:rPr>
+                            <a:t>do</a:t>
+                          </a:r>
+                          <a:endParaRPr lang="en-US" altLang="zh-CN" sz="1400" b="0">
+                            <a:latin typeface="Times New Roman" panose="02020603050405020304" charset="0"/>
+                            <a:cs typeface="Times New Roman" panose="02020603050405020304" charset="0"/>
+                          </a:endParaRPr>
+                        </a:p>
+                        <a:p>
+                          <a:pPr indent="0" fontAlgn="auto">
+                            <a:lnSpc>
+                              <a:spcPts val="1880"/>
+                            </a:lnSpc>
+                            <a:buNone/>
+                          </a:pPr>
+                          <a:r>
+                            <a:rPr lang="en-US" altLang="zh-CN" sz="1400" b="0">
+                              <a:latin typeface="Times New Roman" panose="02020603050405020304" charset="0"/>
+                              <a:cs typeface="Times New Roman" panose="02020603050405020304" charset="0"/>
+                            </a:rPr>
+                            <a:t>7:             </a:t>
+                          </a:r>
+                          <a14:m>
+                            <m:oMath xmlns:m="http://schemas.openxmlformats.org/officeDocument/2006/math">
+                              <m:sSub>
+                                <m:sSubPr>
+                                  <m:ctrlPr>
+                                    <a:rPr lang="en-US" altLang="zh-CN" sz="1400" b="0" i="1">
+                                      <a:latin typeface="Cambria Math" panose="02040503050406030204" charset="0"/>
+                                      <a:cs typeface="Cambria Math" panose="02040503050406030204" charset="0"/>
+                                    </a:rPr>
+                                  </m:ctrlPr>
+                                </m:sSubPr>
+                                <m:e>
+                                  <m:r>
+                                    <a:rPr lang="en-US" altLang="zh-CN" sz="1400" b="0" i="1">
+                                      <a:latin typeface="Cambria Math" panose="02040503050406030204" charset="0"/>
+                                      <a:cs typeface="Cambria Math" panose="02040503050406030204" charset="0"/>
+                                    </a:rPr>
+                                    <m:t>𝐵</m:t>
+                                  </m:r>
+                                </m:e>
+                                <m:sub>
+                                  <m:r>
+                                    <a:rPr lang="en-US" altLang="zh-CN" sz="1400" b="0" i="1">
+                                      <a:latin typeface="Cambria Math" panose="02040503050406030204" charset="0"/>
+                                      <a:cs typeface="Cambria Math" panose="02040503050406030204" charset="0"/>
+                                    </a:rPr>
+                                    <m:t>𝑖</m:t>
+                                  </m:r>
+                                  <m:r>
+                                    <a:rPr lang="en-US" altLang="zh-CN" sz="1400" b="0" i="1">
+                                      <a:latin typeface="Cambria Math" panose="02040503050406030204" charset="0"/>
+                                      <a:cs typeface="Cambria Math" panose="02040503050406030204" charset="0"/>
+                                    </a:rPr>
+                                    <m:t>,</m:t>
+                                  </m:r>
+                                  <m:r>
+                                    <a:rPr lang="en-US" altLang="zh-CN" sz="1400" b="0" i="1">
+                                      <a:latin typeface="Cambria Math" panose="02040503050406030204" charset="0"/>
+                                      <a:cs typeface="Cambria Math" panose="02040503050406030204" charset="0"/>
+                                    </a:rPr>
+                                    <m:t>𝑘</m:t>
+                                  </m:r>
+                                </m:sub>
+                              </m:sSub>
+                              <m:r>
+                                <a:rPr lang="en-US" altLang="zh-CN" sz="1400" i="1">
+                                  <a:latin typeface="Cambria Math" panose="02040503050406030204" charset="0"/>
+                                  <a:cs typeface="Cambria Math" panose="02040503050406030204" charset="0"/>
+                                </a:rPr>
+                                <m:t>←</m:t>
+                              </m:r>
+                              <m:sSub>
+                                <m:sSubPr>
+                                  <m:ctrlPr>
+                                    <a:rPr lang="en-US" altLang="zh-CN" sz="1400" i="1">
+                                      <a:latin typeface="Cambria Math" panose="02040503050406030204" charset="0"/>
+                                      <a:cs typeface="Cambria Math" panose="02040503050406030204" charset="0"/>
+                                    </a:rPr>
+                                  </m:ctrlPr>
+                                </m:sSubPr>
+                                <m:e>
+                                  <m:r>
+                                    <a:rPr lang="en-US" altLang="zh-CN" sz="1400" i="1">
+                                      <a:latin typeface="Cambria Math" panose="02040503050406030204" charset="0"/>
+                                      <a:cs typeface="Cambria Math" panose="02040503050406030204" charset="0"/>
+                                    </a:rPr>
+                                    <m:t>𝐵</m:t>
+                                  </m:r>
+                                </m:e>
+                                <m:sub>
+                                  <m:r>
+                                    <a:rPr lang="en-US" altLang="zh-CN" sz="1400" i="1">
+                                      <a:latin typeface="Cambria Math" panose="02040503050406030204" charset="0"/>
+                                      <a:cs typeface="Cambria Math" panose="02040503050406030204" charset="0"/>
+                                    </a:rPr>
+                                    <m:t>𝑖</m:t>
+                                  </m:r>
+                                  <m:r>
+                                    <a:rPr lang="en-US" altLang="zh-CN" sz="1400" i="1">
+                                      <a:latin typeface="Cambria Math" panose="02040503050406030204" charset="0"/>
+                                      <a:cs typeface="Cambria Math" panose="02040503050406030204" charset="0"/>
+                                    </a:rPr>
+                                    <m:t>,</m:t>
+                                  </m:r>
+                                  <m:r>
+                                    <a:rPr lang="en-US" altLang="zh-CN" sz="1400" i="1">
+                                      <a:latin typeface="Cambria Math" panose="02040503050406030204" charset="0"/>
+                                      <a:cs typeface="Cambria Math" panose="02040503050406030204" charset="0"/>
+                                    </a:rPr>
+                                    <m:t>𝑘</m:t>
+                                  </m:r>
+                                </m:sub>
+                              </m:sSub>
+                              <m:r>
+                                <a:rPr lang="en-US" altLang="zh-CN" sz="1400" i="1">
+                                  <a:latin typeface="Cambria Math" panose="02040503050406030204" charset="0"/>
+                                  <a:cs typeface="Cambria Math" panose="02040503050406030204" charset="0"/>
+                                </a:rPr>
+                                <m:t>−</m:t>
+                              </m:r>
+                              <m:sSub>
+                                <m:sSubPr>
+                                  <m:ctrlPr>
+                                    <a:rPr lang="en-US" altLang="zh-CN" sz="1400" i="1">
+                                      <a:latin typeface="Cambria Math" panose="02040503050406030204" charset="0"/>
+                                      <a:cs typeface="Cambria Math" panose="02040503050406030204" charset="0"/>
+                                    </a:rPr>
+                                  </m:ctrlPr>
+                                </m:sSubPr>
+                                <m:e>
+                                  <m:r>
+                                    <a:rPr lang="en-US" altLang="zh-CN" sz="1400" i="1">
+                                      <a:latin typeface="Cambria Math" panose="02040503050406030204" charset="0"/>
+                                      <a:cs typeface="Cambria Math" panose="02040503050406030204" charset="0"/>
+                                    </a:rPr>
+                                    <m:t>𝑋</m:t>
+                                  </m:r>
+                                </m:e>
+                                <m:sub>
+                                  <m:r>
+                                    <a:rPr lang="en-US" altLang="zh-CN" sz="1400" i="1">
+                                      <a:latin typeface="Cambria Math" panose="02040503050406030204" charset="0"/>
+                                      <a:cs typeface="Cambria Math" panose="02040503050406030204" charset="0"/>
+                                    </a:rPr>
+                                    <m:t>𝑖</m:t>
+                                  </m:r>
+                                  <m:r>
+                                    <a:rPr lang="en-US" altLang="zh-CN" sz="1400" i="1">
+                                      <a:latin typeface="Cambria Math" panose="02040503050406030204" charset="0"/>
+                                      <a:cs typeface="Cambria Math" panose="02040503050406030204" charset="0"/>
+                                    </a:rPr>
+                                    <m:t>,</m:t>
+                                  </m:r>
+                                  <m:r>
+                                    <a:rPr lang="en-US" altLang="zh-CN" sz="1400" i="1">
+                                      <a:latin typeface="Cambria Math" panose="02040503050406030204" charset="0"/>
+                                      <a:cs typeface="Cambria Math" panose="02040503050406030204" charset="0"/>
+                                    </a:rPr>
+                                    <m:t>𝑗</m:t>
+                                  </m:r>
+                                </m:sub>
+                              </m:sSub>
+                              <m:sSub>
+                                <m:sSubPr>
+                                  <m:ctrlPr>
+                                    <a:rPr lang="en-US" altLang="zh-CN" sz="1400" i="1">
+                                      <a:latin typeface="Cambria Math" panose="02040503050406030204" charset="0"/>
+                                      <a:cs typeface="Cambria Math" panose="02040503050406030204" charset="0"/>
+                                    </a:rPr>
+                                  </m:ctrlPr>
+                                </m:sSubPr>
+                                <m:e>
+                                  <m:r>
+                                    <a:rPr lang="en-US" altLang="zh-CN" sz="1400" i="1">
+                                      <a:latin typeface="Cambria Math" panose="02040503050406030204" charset="0"/>
+                                      <a:cs typeface="Cambria Math" panose="02040503050406030204" charset="0"/>
+                                    </a:rPr>
+                                    <m:t>𝑈</m:t>
+                                  </m:r>
+                                </m:e>
+                                <m:sub>
+                                  <m:r>
+                                    <a:rPr lang="en-US" altLang="zh-CN" sz="1400" i="1">
+                                      <a:latin typeface="Cambria Math" panose="02040503050406030204" charset="0"/>
+                                      <a:cs typeface="Cambria Math" panose="02040503050406030204" charset="0"/>
+                                    </a:rPr>
+                                    <m:t>𝑗</m:t>
+                                  </m:r>
+                                  <m:r>
+                                    <a:rPr lang="en-US" altLang="zh-CN" sz="1400" i="1">
+                                      <a:latin typeface="Cambria Math" panose="02040503050406030204" charset="0"/>
+                                      <a:cs typeface="Cambria Math" panose="02040503050406030204" charset="0"/>
+                                    </a:rPr>
+                                    <m:t>,</m:t>
+                                  </m:r>
+                                  <m:r>
+                                    <a:rPr lang="en-US" altLang="zh-CN" sz="1400" i="1">
+                                      <a:latin typeface="Cambria Math" panose="02040503050406030204" charset="0"/>
+                                      <a:cs typeface="Cambria Math" panose="02040503050406030204" charset="0"/>
+                                    </a:rPr>
+                                    <m:t>𝑘</m:t>
+                                  </m:r>
+                                </m:sub>
+                              </m:sSub>
+                            </m:oMath>
+                          </a14:m>
+                          <a:endParaRPr lang="en-US" altLang="zh-CN" sz="1400" b="0">
+                            <a:latin typeface="Times New Roman" panose="02020603050405020304" charset="0"/>
+                            <a:cs typeface="Times New Roman" panose="02020603050405020304" charset="0"/>
+                          </a:endParaRPr>
+                        </a:p>
+                        <a:p>
+                          <a:pPr indent="0" fontAlgn="auto">
+                            <a:lnSpc>
+                              <a:spcPts val="1880"/>
+                            </a:lnSpc>
+                            <a:buNone/>
+                          </a:pPr>
+                          <a:r>
+                            <a:rPr lang="en-US" altLang="zh-CN" sz="1400" b="0">
+                              <a:latin typeface="Times New Roman" panose="02020603050405020304" charset="0"/>
+                              <a:cs typeface="Times New Roman" panose="02020603050405020304" charset="0"/>
+                            </a:rPr>
+                            <a:t>8:          </a:t>
+                          </a:r>
+                          <a:r>
+                            <a:rPr lang="en-US" altLang="zh-CN" sz="1400" b="1">
+                              <a:latin typeface="Times New Roman" panose="02020603050405020304" charset="0"/>
+                              <a:cs typeface="Times New Roman" panose="02020603050405020304" charset="0"/>
+                            </a:rPr>
+                            <a:t>end for</a:t>
+                          </a:r>
+                          <a:endParaRPr lang="en-US" altLang="zh-CN" sz="1400" b="0">
+                            <a:latin typeface="Times New Roman" panose="02020603050405020304" charset="0"/>
+                            <a:cs typeface="Times New Roman" panose="02020603050405020304" charset="0"/>
+                          </a:endParaRPr>
+                        </a:p>
+                        <a:p>
+                          <a:pPr indent="0" fontAlgn="auto">
+                            <a:lnSpc>
+                              <a:spcPts val="1880"/>
+                            </a:lnSpc>
+                            <a:buNone/>
+                          </a:pPr>
+                          <a:r>
+                            <a:rPr lang="en-US" altLang="zh-CN" sz="1400" b="0">
+                              <a:latin typeface="Times New Roman" panose="02020603050405020304" charset="0"/>
+                              <a:cs typeface="Times New Roman" panose="02020603050405020304" charset="0"/>
+                            </a:rPr>
+                            <a:t>9:      </a:t>
+                          </a:r>
+                          <a:r>
+                            <a:rPr lang="en-US" altLang="zh-CN" sz="1400" b="1">
+                              <a:latin typeface="Times New Roman" panose="02020603050405020304" charset="0"/>
+                              <a:cs typeface="Times New Roman" panose="02020603050405020304" charset="0"/>
+                            </a:rPr>
+                            <a:t>end for</a:t>
+                          </a:r>
+                          <a:endParaRPr lang="en-US" altLang="zh-CN" sz="1400" b="0">
+                            <a:latin typeface="Times New Roman" panose="02020603050405020304" charset="0"/>
+                            <a:cs typeface="Times New Roman" panose="02020603050405020304" charset="0"/>
+                          </a:endParaRPr>
+                        </a:p>
+                        <a:p>
+                          <a:pPr indent="0" fontAlgn="auto">
+                            <a:lnSpc>
+                              <a:spcPts val="1880"/>
+                            </a:lnSpc>
+                            <a:buNone/>
+                          </a:pPr>
+                          <a:r>
+                            <a:rPr lang="en-US" altLang="zh-CN" sz="1400" b="0">
+                              <a:latin typeface="Times New Roman" panose="02020603050405020304" charset="0"/>
+                              <a:cs typeface="Times New Roman" panose="02020603050405020304" charset="0"/>
+                            </a:rPr>
+                            <a:t>10:</a:t>
+                          </a:r>
+                          <a:r>
+                            <a:rPr lang="en-US" altLang="zh-CN" sz="1400" b="1">
+                              <a:latin typeface="Times New Roman" panose="02020603050405020304" charset="0"/>
+                              <a:cs typeface="Times New Roman" panose="02020603050405020304" charset="0"/>
+                            </a:rPr>
+                            <a:t>end for</a:t>
+                          </a:r>
+                          <a:endParaRPr lang="en-US" altLang="zh-CN" sz="1400" b="1">
+                            <a:latin typeface="Times New Roman" panose="02020603050405020304" charset="0"/>
+                            <a:cs typeface="Times New Roman" panose="02020603050405020304" charset="0"/>
+                          </a:endParaRPr>
+                        </a:p>
+                      </a:txBody>
+                      <a:tcPr>
+                        <a:lnL>
+                          <a:noFill/>
+                        </a:lnL>
+                        <a:lnR>
+                          <a:noFill/>
+                        </a:lnR>
+                        <a:lnT w="12700">
+                          <a:solidFill>
+                            <a:schemeClr val="tx1"/>
+                          </a:solidFill>
+                          <a:prstDash val="solid"/>
+                        </a:lnT>
+                        <a:lnB w="12700" cmpd="sng">
+                          <a:solidFill>
+                            <a:schemeClr val="tx1"/>
+                          </a:solidFill>
+                          <a:prstDash val="solid"/>
+                        </a:lnB>
+                        <a:solidFill>
+                          <a:schemeClr val="bg1"/>
+                        </a:solidFill>
+                      </a:tcPr>
+                    </a:tc>
+                  </a:tr>
+                </a:tbl>
+              </a:graphicData>
+            </a:graphic>
+          </p:graphicFrame>
+        </mc:Choice>
+        <mc:Fallback xmlns="">
+          <p:graphicFrame>
+            <p:nvGraphicFramePr>
+              <p:cNvPr id="4" name="表格 3"/>
+              <p:cNvGraphicFramePr/>
+              <p:nvPr>
+                <p:custDataLst>
+                  <p:tags r:id="rId2"/>
+                </p:custDataLst>
+              </p:nvPr>
+            </p:nvGraphicFramePr>
+            <p:xfrm>
+              <a:off x="1828800" y="1085850"/>
+              <a:ext cx="8530590" cy="3295650"/>
+            </p:xfrm>
+            <a:graphic>
+              <a:graphicData uri="http://schemas.openxmlformats.org/drawingml/2006/table">
+                <a:tbl>
+                  <a:tblPr>
+                    <a:tableStyleId>{D7AC3CCA-C797-4891-BE02-D94E43425B78}</a:tableStyleId>
+                  </a:tblPr>
+                  <a:tblGrid>
+                    <a:gridCol w="8530590"/>
+                  </a:tblGrid>
+                  <a:tr h="396000">
+                    <a:tc>
+                      <a:txBody>
+                        <a:bodyPr/>
+                        <a:p>
+                          <a:pPr algn="l">
+                            <a:buNone/>
+                          </a:pPr>
+                          <a:r>
+                            <a:rPr lang="en-US" altLang="zh-CN">
+                              <a:latin typeface="Times New Roman" panose="02020603050405020304" charset="0"/>
+                              <a:cs typeface="Times New Roman" panose="02020603050405020304" charset="0"/>
+                            </a:rPr>
+                            <a:t>Algorithm 4</a:t>
+                          </a:r>
+                          <a:r>
+                            <a:rPr lang="zh-CN" altLang="en-US">
+                              <a:latin typeface="Times New Roman" panose="02020603050405020304" charset="0"/>
+                              <a:cs typeface="Times New Roman" panose="02020603050405020304" charset="0"/>
+                            </a:rPr>
+                            <a:t>：块三角求解</a:t>
+                          </a:r>
+                          <a:r>
+                            <a:rPr lang="en-US" altLang="zh-CN">
+                              <a:latin typeface="Times New Roman" panose="02020603050405020304" charset="0"/>
+                              <a:cs typeface="Times New Roman" panose="02020603050405020304" charset="0"/>
+                            </a:rPr>
+                            <a:t>2</a:t>
+                          </a:r>
+                          <a:endParaRPr lang="en-US" altLang="zh-CN">
+                            <a:latin typeface="Times New Roman" panose="02020603050405020304" charset="0"/>
+                            <a:cs typeface="Times New Roman" panose="02020603050405020304" charset="0"/>
+                          </a:endParaRPr>
+                        </a:p>
+                      </a:txBody>
+                      <a:tcPr>
+                        <a:lnL>
+                          <a:noFill/>
+                        </a:lnL>
+                        <a:lnR>
+                          <a:noFill/>
+                        </a:lnR>
+                        <a:lnT w="12700">
+                          <a:solidFill>
+                            <a:schemeClr val="tx1"/>
+                          </a:solidFill>
+                          <a:prstDash val="solid"/>
+                        </a:lnT>
+                        <a:lnB w="12700">
+                          <a:solidFill>
+                            <a:schemeClr val="tx1"/>
+                          </a:solidFill>
+                          <a:prstDash val="solid"/>
+                        </a:lnB>
+                        <a:lnTlToBr>
+                          <a:noFill/>
+                        </a:lnTlToBr>
+                        <a:lnBlToTr>
+                          <a:noFill/>
+                        </a:lnBlToTr>
+                        <a:solidFill>
+                          <a:schemeClr val="bg1"/>
+                        </a:solidFill>
+                      </a:tcPr>
+                    </a:tc>
+                  </a:tr>
+                  <a:tr h="2956560">
+                    <a:tc>
+                      <a:txBody>
+                        <a:bodyPr/>
+                        <a:lstStyle/>
+                        <a:p>
+                          <a:endParaRPr lang="zh-CN"/>
+                        </a:p>
+                      </a:txBody>
+                      <a:tcPr>
+                        <a:lnL>
+                          <a:noFill/>
+                        </a:lnL>
+                        <a:lnR>
+                          <a:noFill/>
+                        </a:lnR>
+                        <a:lnT w="12700">
+                          <a:solidFill>
+                            <a:schemeClr val="tx1"/>
+                          </a:solidFill>
+                          <a:prstDash val="solid"/>
+                        </a:lnT>
+                        <a:lnB w="12700" cmpd="sng">
+                          <a:solidFill>
+                            <a:schemeClr val="tx1"/>
+                          </a:solidFill>
+                          <a:prstDash val="solid"/>
+                        </a:lnB>
+                        <a:blipFill>
+                          <a:blip r:embed="rId3"/>
+                        </a:blipFill>
+                      </a:tcPr>
+                    </a:tc>
+                  </a:tr>
+                </a:tbl>
+              </a:graphicData>
+            </a:graphic>
+          </p:graphicFrame>
+        </mc:Fallback>
+      </mc:AlternateContent>
+      <p:graphicFrame>
+        <p:nvGraphicFramePr>
+          <p:cNvPr id="5" name="对象 4">
+            <a:hlinkClick r:id="" action="ppaction://ole?verb="/>
+          </p:cNvPr>
+          <p:cNvGraphicFramePr>
+            <a:graphicFrameLocks noChangeAspect="1"/>
+          </p:cNvGraphicFramePr>
+          <p:nvPr/>
+        </p:nvGraphicFramePr>
+        <p:xfrm>
+          <a:off x="6038850" y="3321050"/>
+          <a:ext cx="114300" cy="215900"/>
+        </p:xfrm>
+        <a:graphic>
+          <a:graphicData uri="http://schemas.openxmlformats.org/presentationml/2006/ole">
+            <mc:AlternateContent xmlns:mc="http://schemas.openxmlformats.org/markup-compatibility/2006">
+              <mc:Choice xmlns:v="urn:schemas-microsoft-com:vml" Requires="v">
+                <p:oleObj spid="_x0000_s1025" name="" r:id="rId4" imgW="114300" imgH="215900" progId="Equation.KSEE3">
+                  <p:embed/>
+                </p:oleObj>
+              </mc:Choice>
+              <mc:Fallback>
+                <p:oleObj name="" r:id="rId4" imgW="114300" imgH="215900" progId="Equation.KSEE3">
+                  <p:embed/>
+                  <p:pic>
+                    <p:nvPicPr>
+                      <p:cNvPr id="0" name="图片 1024"/>
+                      <p:cNvPicPr/>
+                      <p:nvPr/>
+                    </p:nvPicPr>
+                    <p:blipFill>
+                      <a:blip r:embed="rId5"/>
+                      <a:stretch>
+                        <a:fillRect/>
+                      </a:stretch>
+                    </p:blipFill>
+                    <p:spPr>
+                      <a:xfrm>
+                        <a:off x="6038850" y="3321050"/>
+                        <a:ext cx="114300" cy="215900"/>
+                      </a:xfrm>
+                      <a:prstGeom prst="rect">
+                        <a:avLst/>
+                      </a:prstGeom>
+                    </p:spPr>
+                  </p:pic>
+                </p:oleObj>
+              </mc:Fallback>
+            </mc:AlternateContent>
+          </a:graphicData>
+        </a:graphic>
+      </p:graphicFrame>
+    </p:spTree>
+    <p:custDataLst>
+      <p:tags r:id="rId6"/>
+    </p:custDataLst>
+  </p:cSld>
+  <p:clrMapOvr>
+    <a:masterClrMapping/>
+  </p:clrMapOvr>
+</p:sld>
+</file>
+
+<file path=ppt/slides/slide7.xml><?xml version="1.0" encoding="utf-8"?>
 <p:sld xmlns:a="http://schemas.openxmlformats.org/drawingml/2006/main" xmlns:r="http://schemas.openxmlformats.org/officeDocument/2006/relationships" xmlns:p="http://schemas.openxmlformats.org/presentationml/2006/main">
   <p:cSld>
     <p:spTree>
@@ -14448,7 +15276,7 @@
 </p:sld>
 </file>
 
-<file path=ppt/slides/slide7.xml><?xml version="1.0" encoding="utf-8"?>
+<file path=ppt/slides/slide8.xml><?xml version="1.0" encoding="utf-8"?>
 <p:sld xmlns:a="http://schemas.openxmlformats.org/drawingml/2006/main" xmlns:r="http://schemas.openxmlformats.org/officeDocument/2006/relationships" xmlns:p="http://schemas.openxmlformats.org/presentationml/2006/main">
   <p:cSld>
     <p:spTree>
@@ -15803,7 +16631,7 @@
 </p:sld>
 </file>
 
-<file path=ppt/slides/slide8.xml><?xml version="1.0" encoding="utf-8"?>
+<file path=ppt/slides/slide9.xml><?xml version="1.0" encoding="utf-8"?>
 <p:sld xmlns:a="http://schemas.openxmlformats.org/drawingml/2006/main" xmlns:r="http://schemas.openxmlformats.org/officeDocument/2006/relationships" xmlns:p="http://schemas.openxmlformats.org/presentationml/2006/main">
   <p:cSld>
     <p:spTree>
@@ -17529,16 +18357,15 @@
 
 <file path=ppt/tags/tag81.xml><?xml version="1.0" encoding="utf-8"?>
 <p:tagLst xmlns:p="http://schemas.openxmlformats.org/presentationml/2006/main">
-  <p:tag name="KSO_DOCER_RESOURCE_TRACE_INFO" val="{&quot;id&quot;:&quot;50059176&quot;,&quot;origin&quot;:0,&quot;type&quot;:&quot;icons&quot;,&quot;user&quot;:&quot;1040096332&quot;}"/>
+  <p:tag name="TABLE_ENDDRAG_ORIGIN_RECT" val="671*259"/>
+  <p:tag name="TABLE_ENDDRAG_RECT" val="144*85*671*259"/>
 </p:tagLst>
 </file>
 
 <file path=ppt/tags/tag82.xml><?xml version="1.0" encoding="utf-8"?>
 <p:tagLst xmlns:p="http://schemas.openxmlformats.org/presentationml/2006/main">
-  <p:tag name="KSO_WM_BEAUTIFY_FLAG" val="#wm#"/>
-  <p:tag name="KSO_WM_TEMPLATE_CATEGORY" val="custom"/>
-  <p:tag name="KSO_WM_TEMPLATE_INDEX" val="20205081"/>
-  <p:tag name="resource_record_key" val="{&quot;10&quot;:[50062469,50062354,50059176],&quot;65&quot;:[20205081]}"/>
+  <p:tag name="TABLE_ENDDRAG_ORIGIN_RECT" val="671*259"/>
+  <p:tag name="TABLE_ENDDRAG_RECT" val="144*85*671*259"/>
 </p:tagLst>
 </file>
 
@@ -17552,13 +18379,36 @@
 
 <file path=ppt/tags/tag84.xml><?xml version="1.0" encoding="utf-8"?>
 <p:tagLst xmlns:p="http://schemas.openxmlformats.org/presentationml/2006/main">
+  <p:tag name="KSO_DOCER_RESOURCE_TRACE_INFO" val="{&quot;id&quot;:&quot;50059176&quot;,&quot;origin&quot;:0,&quot;type&quot;:&quot;icons&quot;,&quot;user&quot;:&quot;1040096332&quot;}"/>
+</p:tagLst>
+</file>
+
+<file path=ppt/tags/tag85.xml><?xml version="1.0" encoding="utf-8"?>
+<p:tagLst xmlns:p="http://schemas.openxmlformats.org/presentationml/2006/main">
+  <p:tag name="KSO_WM_BEAUTIFY_FLAG" val="#wm#"/>
+  <p:tag name="KSO_WM_TEMPLATE_CATEGORY" val="custom"/>
+  <p:tag name="KSO_WM_TEMPLATE_INDEX" val="20205081"/>
+  <p:tag name="resource_record_key" val="{&quot;10&quot;:[50062469,50062354,50059176],&quot;65&quot;:[20205081]}"/>
+</p:tagLst>
+</file>
+
+<file path=ppt/tags/tag86.xml><?xml version="1.0" encoding="utf-8"?>
+<p:tagLst xmlns:p="http://schemas.openxmlformats.org/presentationml/2006/main">
   <p:tag name="KSO_WM_BEAUTIFY_FLAG" val="#wm#"/>
   <p:tag name="KSO_WM_TEMPLATE_CATEGORY" val="custom"/>
   <p:tag name="KSO_WM_TEMPLATE_INDEX" val="20205081"/>
 </p:tagLst>
 </file>
 
-<file path=ppt/tags/tag85.xml><?xml version="1.0" encoding="utf-8"?>
+<file path=ppt/tags/tag87.xml><?xml version="1.0" encoding="utf-8"?>
+<p:tagLst xmlns:p="http://schemas.openxmlformats.org/presentationml/2006/main">
+  <p:tag name="KSO_WM_BEAUTIFY_FLAG" val="#wm#"/>
+  <p:tag name="KSO_WM_TEMPLATE_CATEGORY" val="custom"/>
+  <p:tag name="KSO_WM_TEMPLATE_INDEX" val="20205081"/>
+</p:tagLst>
+</file>
+
+<file path=ppt/tags/tag88.xml><?xml version="1.0" encoding="utf-8"?>
 <p:tagLst xmlns:p="http://schemas.openxmlformats.org/presentationml/2006/main">
   <p:tag name="resource_record_key" val="{&quot;10&quot;:[50059496,50059429,50062469,50062354,50059176],&quot;65&quot;:[20205081]}"/>
 </p:tagLst>

--- a/graduation-project/绘图.pptx
+++ b/graduation-project/绘图.pptx
@@ -11,14 +11,15 @@
     <p:sldId id="258" r:id="rId6"/>
     <p:sldId id="263" r:id="rId7"/>
     <p:sldId id="264" r:id="rId8"/>
-    <p:sldId id="259" r:id="rId9"/>
-    <p:sldId id="261" r:id="rId10"/>
-    <p:sldId id="262" r:id="rId11"/>
+    <p:sldId id="265" r:id="rId9"/>
+    <p:sldId id="259" r:id="rId10"/>
+    <p:sldId id="261" r:id="rId11"/>
+    <p:sldId id="262" r:id="rId12"/>
   </p:sldIdLst>
   <p:sldSz cx="12192000" cy="6858000"/>
   <p:notesSz cx="6858000" cy="9144000"/>
   <p:custDataLst>
-    <p:tags r:id="rId15"/>
+    <p:tags r:id="rId16"/>
   </p:custDataLst>
   <p:defaultTextStyle>
     <a:defPPr>
@@ -3147,6 +3148,759 @@
 </p:sld>
 </file>
 
+<file path=ppt/slides/slide10.xml><?xml version="1.0" encoding="utf-8"?>
+<p:sld xmlns:a="http://schemas.openxmlformats.org/drawingml/2006/main" xmlns:r="http://schemas.openxmlformats.org/officeDocument/2006/relationships" xmlns:p="http://schemas.openxmlformats.org/presentationml/2006/main">
+  <p:cSld>
+    <p:spTree>
+      <p:nvGrpSpPr>
+        <p:cNvPr id="1" name=""/>
+        <p:cNvGrpSpPr/>
+        <p:nvPr/>
+      </p:nvGrpSpPr>
+      <p:grpSpPr/>
+      <p:sp>
+        <p:nvSpPr>
+          <p:cNvPr id="7" name="Rectangle 5"/>
+          <p:cNvSpPr/>
+          <p:nvPr/>
+        </p:nvSpPr>
+        <p:spPr>
+          <a:xfrm>
+            <a:off x="594360" y="2121408"/>
+            <a:ext cx="1691640" cy="1243584"/>
+          </a:xfrm>
+          <a:prstGeom prst="rect">
+            <a:avLst/>
+          </a:prstGeom>
+          <a:solidFill>
+            <a:srgbClr val="EAF3FF"/>
+          </a:solidFill>
+          <a:ln w="12700">
+            <a:solidFill>
+              <a:srgbClr val="7A9AB8"/>
+            </a:solidFill>
+          </a:ln>
+        </p:spPr>
+        <p:txBody>
+          <a:bodyPr wrap="square" anchor="ctr">
+            <a:spAutoFit/>
+          </a:bodyPr>
+          <a:lstStyle/>
+          <a:p>
+            <a:pPr algn="ctr">
+              <a:buNone/>
+            </a:pPr>
+            <a:r>
+              <a:rPr lang="zh-CN" sz="1300" b="1">
+                <a:solidFill>
+                  <a:srgbClr val="1F2937"/>
+                </a:solidFill>
+                <a:latin typeface="Arial" panose="020B0604020202020204"/>
+                <a:ea typeface="微软雅黑" panose="020B0503020204020204" charset="-122"/>
+              </a:rPr>
+              <a:t>Assembly</a:t>
+            </a:r>
+            <a:endParaRPr lang="zh-CN"/>
+          </a:p>
+          <a:p>
+            <a:pPr algn="ctr">
+              <a:buNone/>
+            </a:pPr>
+            <a:r>
+              <a:rPr lang="zh-CN" sz="1100">
+                <a:solidFill>
+                  <a:srgbClr val="1F2937"/>
+                </a:solidFill>
+                <a:latin typeface="Arial" panose="020B0604020202020204"/>
+                <a:ea typeface="微软雅黑" panose="020B0503020204020204" charset="-122"/>
+              </a:rPr>
+              <a:t>装配 A_local 与</a:t>
+            </a:r>
+            <a:endParaRPr lang="zh-CN"/>
+          </a:p>
+          <a:p>
+            <a:pPr algn="ctr">
+              <a:buNone/>
+            </a:pPr>
+            <a:r>
+              <a:rPr lang="zh-CN" sz="1100">
+                <a:solidFill>
+                  <a:srgbClr val="1F2937"/>
+                </a:solidFill>
+                <a:latin typeface="Arial" panose="020B0604020202020204"/>
+                <a:ea typeface="微软雅黑" panose="020B0503020204020204" charset="-122"/>
+              </a:rPr>
+              <a:t>child updates</a:t>
+            </a:r>
+            <a:endParaRPr lang="zh-CN"/>
+          </a:p>
+        </p:txBody>
+      </p:sp>
+      <p:sp>
+        <p:nvSpPr>
+          <p:cNvPr id="8" name="Rectangle 6"/>
+          <p:cNvSpPr/>
+          <p:nvPr/>
+        </p:nvSpPr>
+        <p:spPr>
+          <a:xfrm>
+            <a:off x="2788920" y="2121408"/>
+            <a:ext cx="1691640" cy="1243584"/>
+          </a:xfrm>
+          <a:prstGeom prst="rect">
+            <a:avLst/>
+          </a:prstGeom>
+          <a:solidFill>
+            <a:srgbClr val="EAF3FF"/>
+          </a:solidFill>
+          <a:ln w="12700">
+            <a:solidFill>
+              <a:srgbClr val="7A9AB8"/>
+            </a:solidFill>
+          </a:ln>
+        </p:spPr>
+        <p:txBody>
+          <a:bodyPr wrap="square" anchor="ctr">
+            <a:spAutoFit/>
+          </a:bodyPr>
+          <a:lstStyle/>
+          <a:p>
+            <a:pPr algn="ctr">
+              <a:buNone/>
+            </a:pPr>
+            <a:r>
+              <a:rPr lang="zh-CN" sz="1300" b="1">
+                <a:solidFill>
+                  <a:srgbClr val="1F2937"/>
+                </a:solidFill>
+                <a:latin typeface="Arial" panose="020B0604020202020204"/>
+                <a:ea typeface="微软雅黑" panose="020B0503020204020204" charset="-122"/>
+              </a:rPr>
+              <a:t>Pivot / Block LU</a:t>
+            </a:r>
+            <a:endParaRPr lang="zh-CN"/>
+          </a:p>
+          <a:p>
+            <a:pPr algn="ctr">
+              <a:buNone/>
+            </a:pPr>
+            <a:r>
+              <a:rPr lang="zh-CN" sz="1100">
+                <a:solidFill>
+                  <a:srgbClr val="1F2937"/>
+                </a:solidFill>
+                <a:latin typeface="Arial" panose="020B0604020202020204"/>
+                <a:ea typeface="微软雅黑" panose="020B0503020204020204" charset="-122"/>
+              </a:rPr>
+              <a:t>主元选择与</a:t>
+            </a:r>
+            <a:endParaRPr lang="zh-CN"/>
+          </a:p>
+          <a:p>
+            <a:pPr algn="ctr">
+              <a:buNone/>
+            </a:pPr>
+            <a:r>
+              <a:rPr lang="zh-CN" sz="1100">
+                <a:solidFill>
+                  <a:srgbClr val="1F2937"/>
+                </a:solidFill>
+                <a:latin typeface="Arial" panose="020B0604020202020204"/>
+                <a:ea typeface="微软雅黑" panose="020B0503020204020204" charset="-122"/>
+              </a:rPr>
+              <a:t>主元块分解</a:t>
+            </a:r>
+            <a:endParaRPr lang="zh-CN"/>
+          </a:p>
+        </p:txBody>
+      </p:sp>
+      <p:sp>
+        <p:nvSpPr>
+          <p:cNvPr id="9" name="Rectangle 7"/>
+          <p:cNvSpPr/>
+          <p:nvPr/>
+        </p:nvSpPr>
+        <p:spPr>
+          <a:xfrm>
+            <a:off x="4983480" y="2121408"/>
+            <a:ext cx="1691640" cy="1243584"/>
+          </a:xfrm>
+          <a:prstGeom prst="rect">
+            <a:avLst/>
+          </a:prstGeom>
+          <a:solidFill>
+            <a:srgbClr val="EAF3FF"/>
+          </a:solidFill>
+          <a:ln w="12700">
+            <a:solidFill>
+              <a:srgbClr val="7A9AB8"/>
+            </a:solidFill>
+          </a:ln>
+        </p:spPr>
+        <p:txBody>
+          <a:bodyPr wrap="square" anchor="ctr">
+            <a:spAutoFit/>
+          </a:bodyPr>
+          <a:lstStyle/>
+          <a:p>
+            <a:pPr algn="ctr">
+              <a:buNone/>
+            </a:pPr>
+            <a:r>
+              <a:rPr lang="zh-CN" sz="1300" b="1">
+                <a:solidFill>
+                  <a:srgbClr val="1F2937"/>
+                </a:solidFill>
+                <a:latin typeface="Arial" panose="020B0604020202020204"/>
+                <a:ea typeface="微软雅黑" panose="020B0503020204020204" charset="-122"/>
+              </a:rPr>
+              <a:t>TRSM</a:t>
+            </a:r>
+            <a:endParaRPr lang="zh-CN"/>
+          </a:p>
+          <a:p>
+            <a:pPr algn="ctr">
+              <a:buNone/>
+            </a:pPr>
+            <a:r>
+              <a:rPr lang="zh-CN" sz="1100">
+                <a:solidFill>
+                  <a:srgbClr val="1F2937"/>
+                </a:solidFill>
+                <a:latin typeface="Arial" panose="020B0604020202020204"/>
+                <a:ea typeface="微软雅黑" panose="020B0503020204020204" charset="-122"/>
+              </a:rPr>
+              <a:t>求解 F21U11^{-1}</a:t>
+            </a:r>
+            <a:endParaRPr lang="zh-CN"/>
+          </a:p>
+          <a:p>
+            <a:pPr algn="ctr">
+              <a:buNone/>
+            </a:pPr>
+            <a:r>
+              <a:rPr lang="zh-CN" sz="1100">
+                <a:solidFill>
+                  <a:srgbClr val="1F2937"/>
+                </a:solidFill>
+                <a:latin typeface="Arial" panose="020B0604020202020204"/>
+                <a:ea typeface="微软雅黑" panose="020B0503020204020204" charset="-122"/>
+              </a:rPr>
+              <a:t>与 L11^{-1}F12</a:t>
+            </a:r>
+            <a:endParaRPr lang="zh-CN"/>
+          </a:p>
+        </p:txBody>
+      </p:sp>
+      <p:sp>
+        <p:nvSpPr>
+          <p:cNvPr id="10" name="Rectangle 8"/>
+          <p:cNvSpPr/>
+          <p:nvPr/>
+        </p:nvSpPr>
+        <p:spPr>
+          <a:xfrm>
+            <a:off x="7178040" y="2121408"/>
+            <a:ext cx="1691640" cy="1243584"/>
+          </a:xfrm>
+          <a:prstGeom prst="rect">
+            <a:avLst/>
+          </a:prstGeom>
+          <a:solidFill>
+            <a:srgbClr val="F3F6F9"/>
+          </a:solidFill>
+          <a:ln w="12700">
+            <a:solidFill>
+              <a:srgbClr val="7A9AB8"/>
+            </a:solidFill>
+          </a:ln>
+        </p:spPr>
+        <p:txBody>
+          <a:bodyPr wrap="square" anchor="ctr">
+            <a:spAutoFit/>
+          </a:bodyPr>
+          <a:lstStyle/>
+          <a:p>
+            <a:pPr algn="ctr">
+              <a:buNone/>
+            </a:pPr>
+            <a:r>
+              <a:rPr lang="zh-CN" sz="1300" b="1">
+                <a:solidFill>
+                  <a:srgbClr val="1F2937"/>
+                </a:solidFill>
+                <a:latin typeface="Arial" panose="020B0604020202020204"/>
+                <a:ea typeface="微软雅黑" panose="020B0503020204020204" charset="-122"/>
+              </a:rPr>
+              <a:t>Schur Update</a:t>
+            </a:r>
+            <a:endParaRPr lang="zh-CN"/>
+          </a:p>
+          <a:p>
+            <a:pPr algn="ctr">
+              <a:buNone/>
+            </a:pPr>
+            <a:r>
+              <a:rPr lang="zh-CN" sz="1100">
+                <a:solidFill>
+                  <a:srgbClr val="1F2937"/>
+                </a:solidFill>
+                <a:latin typeface="Arial" panose="020B0604020202020204"/>
+                <a:ea typeface="微软雅黑" panose="020B0503020204020204" charset="-122"/>
+              </a:rPr>
+              <a:t>(GEMM)</a:t>
+            </a:r>
+            <a:endParaRPr lang="zh-CN"/>
+          </a:p>
+          <a:p>
+            <a:pPr algn="ctr">
+              <a:buNone/>
+            </a:pPr>
+            <a:r>
+              <a:rPr lang="zh-CN" sz="1100">
+                <a:solidFill>
+                  <a:srgbClr val="1F2937"/>
+                </a:solidFill>
+                <a:latin typeface="Arial" panose="020B0604020202020204"/>
+                <a:ea typeface="微软雅黑" panose="020B0503020204020204" charset="-122"/>
+              </a:rPr>
+              <a:t>F22 ← F22 - F21F12</a:t>
+            </a:r>
+            <a:endParaRPr lang="zh-CN"/>
+          </a:p>
+        </p:txBody>
+      </p:sp>
+      <p:sp>
+        <p:nvSpPr>
+          <p:cNvPr id="11" name="Rectangle 9"/>
+          <p:cNvSpPr/>
+          <p:nvPr/>
+        </p:nvSpPr>
+        <p:spPr>
+          <a:xfrm>
+            <a:off x="9372600" y="2121408"/>
+            <a:ext cx="1691640" cy="1243584"/>
+          </a:xfrm>
+          <a:prstGeom prst="rect">
+            <a:avLst/>
+          </a:prstGeom>
+          <a:solidFill>
+            <a:srgbClr val="F8FBFF"/>
+          </a:solidFill>
+          <a:ln w="12700">
+            <a:solidFill>
+              <a:srgbClr val="2E5E8C"/>
+            </a:solidFill>
+          </a:ln>
+        </p:spPr>
+        <p:txBody>
+          <a:bodyPr wrap="square" anchor="ctr">
+            <a:spAutoFit/>
+          </a:bodyPr>
+          <a:lstStyle/>
+          <a:p>
+            <a:pPr algn="ctr">
+              <a:buNone/>
+            </a:pPr>
+            <a:r>
+              <a:rPr lang="zh-CN" sz="1700" b="1">
+                <a:solidFill>
+                  <a:srgbClr val="1F2937"/>
+                </a:solidFill>
+                <a:latin typeface="Arial" panose="020B0604020202020204"/>
+                <a:ea typeface="微软雅黑" panose="020B0503020204020204" charset="-122"/>
+              </a:rPr>
+              <a:t>Output</a:t>
+            </a:r>
+            <a:endParaRPr lang="zh-CN"/>
+          </a:p>
+        </p:txBody>
+      </p:sp>
+      <p:sp>
+        <p:nvSpPr>
+          <p:cNvPr id="12" name="Rectangle 10"/>
+          <p:cNvSpPr/>
+          <p:nvPr/>
+        </p:nvSpPr>
+        <p:spPr>
+          <a:xfrm>
+            <a:off x="9482328" y="2560320"/>
+            <a:ext cx="1472184" cy="320040"/>
+          </a:xfrm>
+          <a:prstGeom prst="rect">
+            <a:avLst/>
+          </a:prstGeom>
+          <a:solidFill>
+            <a:srgbClr val="E7F1FB"/>
+          </a:solidFill>
+          <a:ln w="12700">
+            <a:solidFill>
+              <a:srgbClr val="A7B3C0"/>
+            </a:solidFill>
+          </a:ln>
+        </p:spPr>
+        <p:txBody>
+          <a:bodyPr wrap="square" anchor="ctr">
+            <a:spAutoFit/>
+          </a:bodyPr>
+          <a:lstStyle/>
+          <a:p>
+            <a:pPr algn="ctr">
+              <a:buNone/>
+            </a:pPr>
+            <a:r>
+              <a:rPr lang="zh-CN" sz="800">
+                <a:solidFill>
+                  <a:srgbClr val="1F2937"/>
+                </a:solidFill>
+                <a:latin typeface="Arial" panose="020B0604020202020204"/>
+                <a:ea typeface="微软雅黑" panose="020B0503020204020204" charset="-122"/>
+              </a:rPr>
+              <a:t>factor writeback: L/U</a:t>
+            </a:r>
+            <a:endParaRPr lang="zh-CN"/>
+          </a:p>
+        </p:txBody>
+      </p:sp>
+      <p:sp>
+        <p:nvSpPr>
+          <p:cNvPr id="13" name="Rectangle 11"/>
+          <p:cNvSpPr/>
+          <p:nvPr/>
+        </p:nvSpPr>
+        <p:spPr>
+          <a:xfrm>
+            <a:off x="9482328" y="2926080"/>
+            <a:ext cx="1472184" cy="320040"/>
+          </a:xfrm>
+          <a:prstGeom prst="rect">
+            <a:avLst/>
+          </a:prstGeom>
+          <a:solidFill>
+            <a:srgbClr val="F1F4F7"/>
+          </a:solidFill>
+          <a:ln w="12700">
+            <a:solidFill>
+              <a:srgbClr val="A7B3C0"/>
+            </a:solidFill>
+          </a:ln>
+        </p:spPr>
+        <p:txBody>
+          <a:bodyPr wrap="square" anchor="ctr">
+            <a:spAutoFit/>
+          </a:bodyPr>
+          <a:lstStyle/>
+          <a:p>
+            <a:pPr algn="ctr">
+              <a:buNone/>
+            </a:pPr>
+            <a:r>
+              <a:rPr lang="zh-CN" sz="800">
+                <a:solidFill>
+                  <a:srgbClr val="1F2937"/>
+                </a:solidFill>
+                <a:latin typeface="Arial" panose="020B0604020202020204"/>
+                <a:ea typeface="微软雅黑" panose="020B0503020204020204" charset="-122"/>
+              </a:rPr>
+              <a:t>update writeback</a:t>
+            </a:r>
+            <a:endParaRPr lang="zh-CN"/>
+          </a:p>
+          <a:p>
+            <a:pPr algn="ctr">
+              <a:buNone/>
+            </a:pPr>
+            <a:r>
+              <a:rPr lang="zh-CN" sz="800">
+                <a:solidFill>
+                  <a:srgbClr val="1F2937"/>
+                </a:solidFill>
+                <a:latin typeface="Arial" panose="020B0604020202020204"/>
+                <a:ea typeface="微软雅黑" panose="020B0503020204020204" charset="-122"/>
+              </a:rPr>
+              <a:t>to parent</a:t>
+            </a:r>
+            <a:endParaRPr lang="zh-CN"/>
+          </a:p>
+        </p:txBody>
+      </p:sp>
+      <p:cxnSp>
+        <p:nvCxnSpPr>
+          <p:cNvPr id="14" name="Connector 12"/>
+          <p:cNvCxnSpPr/>
+          <p:nvPr/>
+        </p:nvCxnSpPr>
+        <p:spPr>
+          <a:xfrm>
+            <a:off x="2286000" y="2743200"/>
+            <a:ext cx="384048" cy="1"/>
+          </a:xfrm>
+          <a:prstGeom prst="line">
+            <a:avLst/>
+          </a:prstGeom>
+          <a:ln w="25400">
+            <a:solidFill>
+              <a:srgbClr val="111827"/>
+            </a:solidFill>
+            <a:tailEnd type="triangle"/>
+          </a:ln>
+        </p:spPr>
+      </p:cxnSp>
+      <p:cxnSp>
+        <p:nvCxnSpPr>
+          <p:cNvPr id="15" name="Connector 13"/>
+          <p:cNvCxnSpPr/>
+          <p:nvPr/>
+        </p:nvCxnSpPr>
+        <p:spPr>
+          <a:xfrm>
+            <a:off x="4480560" y="2743200"/>
+            <a:ext cx="384048" cy="1"/>
+          </a:xfrm>
+          <a:prstGeom prst="line">
+            <a:avLst/>
+          </a:prstGeom>
+          <a:ln w="25400">
+            <a:solidFill>
+              <a:srgbClr val="111827"/>
+            </a:solidFill>
+            <a:tailEnd type="triangle"/>
+          </a:ln>
+        </p:spPr>
+      </p:cxnSp>
+      <p:cxnSp>
+        <p:nvCxnSpPr>
+          <p:cNvPr id="16" name="Connector 14"/>
+          <p:cNvCxnSpPr/>
+          <p:nvPr/>
+        </p:nvCxnSpPr>
+        <p:spPr>
+          <a:xfrm>
+            <a:off x="6675120" y="2743200"/>
+            <a:ext cx="384048" cy="1"/>
+          </a:xfrm>
+          <a:prstGeom prst="line">
+            <a:avLst/>
+          </a:prstGeom>
+          <a:ln w="25400">
+            <a:solidFill>
+              <a:srgbClr val="111827"/>
+            </a:solidFill>
+            <a:tailEnd type="triangle"/>
+          </a:ln>
+        </p:spPr>
+      </p:cxnSp>
+      <p:cxnSp>
+        <p:nvCxnSpPr>
+          <p:cNvPr id="17" name="Connector 15"/>
+          <p:cNvCxnSpPr/>
+          <p:nvPr/>
+        </p:nvCxnSpPr>
+        <p:spPr>
+          <a:xfrm>
+            <a:off x="8869680" y="2743200"/>
+            <a:ext cx="384048" cy="1"/>
+          </a:xfrm>
+          <a:prstGeom prst="line">
+            <a:avLst/>
+          </a:prstGeom>
+          <a:ln w="25400">
+            <a:solidFill>
+              <a:srgbClr val="111827"/>
+            </a:solidFill>
+            <a:tailEnd type="triangle"/>
+          </a:ln>
+        </p:spPr>
+      </p:cxnSp>
+      <p:sp>
+        <p:nvSpPr>
+          <p:cNvPr id="18" name="Rectangle 16"/>
+          <p:cNvSpPr/>
+          <p:nvPr/>
+        </p:nvSpPr>
+        <p:spPr>
+          <a:xfrm>
+            <a:off x="822960" y="3977640"/>
+            <a:ext cx="2103120" cy="438912"/>
+          </a:xfrm>
+          <a:prstGeom prst="rect">
+            <a:avLst/>
+          </a:prstGeom>
+          <a:solidFill>
+            <a:srgbClr val="FFFFFF"/>
+          </a:solidFill>
+          <a:ln w="12700">
+            <a:solidFill>
+              <a:srgbClr val="C2CEDA"/>
+            </a:solidFill>
+          </a:ln>
+        </p:spPr>
+        <p:txBody>
+          <a:bodyPr wrap="square" anchor="ctr">
+            <a:spAutoFit/>
+          </a:bodyPr>
+          <a:lstStyle/>
+          <a:p>
+            <a:pPr algn="ctr">
+              <a:buNone/>
+            </a:pPr>
+            <a:r>
+              <a:rPr lang="zh-CN" sz="1000">
+                <a:solidFill>
+                  <a:srgbClr val="1F2937"/>
+                </a:solidFill>
+                <a:latin typeface="Arial" panose="020B0604020202020204"/>
+                <a:ea typeface="微软雅黑" panose="020B0503020204020204" charset="-122"/>
+              </a:rPr>
+              <a:t>装配完成后确定 node-scale</a:t>
+            </a:r>
+            <a:endParaRPr lang="zh-CN"/>
+          </a:p>
+        </p:txBody>
+      </p:sp>
+      <p:cxnSp>
+        <p:nvCxnSpPr>
+          <p:cNvPr id="19" name="Connector 17"/>
+          <p:cNvCxnSpPr/>
+          <p:nvPr/>
+        </p:nvCxnSpPr>
+        <p:spPr>
+          <a:xfrm flipH="1" flipV="1">
+            <a:off x="1508760" y="3419856"/>
+            <a:ext cx="274320" cy="548640"/>
+          </a:xfrm>
+          <a:prstGeom prst="line">
+            <a:avLst/>
+          </a:prstGeom>
+          <a:ln w="12700">
+            <a:solidFill>
+              <a:srgbClr val="4B5563"/>
+            </a:solidFill>
+            <a:tailEnd type="triangle"/>
+          </a:ln>
+        </p:spPr>
+      </p:cxnSp>
+      <p:sp>
+        <p:nvSpPr>
+          <p:cNvPr id="20" name="Rectangle 18"/>
+          <p:cNvSpPr/>
+          <p:nvPr/>
+        </p:nvSpPr>
+        <p:spPr>
+          <a:xfrm>
+            <a:off x="7269480" y="3977640"/>
+            <a:ext cx="2084832" cy="438912"/>
+          </a:xfrm>
+          <a:prstGeom prst="rect">
+            <a:avLst/>
+          </a:prstGeom>
+          <a:solidFill>
+            <a:srgbClr val="FFFFFF"/>
+          </a:solidFill>
+          <a:ln w="12700">
+            <a:solidFill>
+              <a:srgbClr val="C2CEDA"/>
+            </a:solidFill>
+          </a:ln>
+        </p:spPr>
+        <p:txBody>
+          <a:bodyPr wrap="square" anchor="ctr">
+            <a:spAutoFit/>
+          </a:bodyPr>
+          <a:lstStyle/>
+          <a:p>
+            <a:pPr algn="ctr">
+              <a:buNone/>
+            </a:pPr>
+            <a:r>
+              <a:rPr lang="zh-CN" sz="1000">
+                <a:solidFill>
+                  <a:srgbClr val="1F2937"/>
+                </a:solidFill>
+                <a:latin typeface="Arial" panose="020B0604020202020204"/>
+                <a:ea typeface="微软雅黑" panose="020B0503020204020204" charset="-122"/>
+              </a:rPr>
+              <a:t>高吞吐矩阵乘更新</a:t>
+            </a:r>
+            <a:endParaRPr lang="zh-CN"/>
+          </a:p>
+        </p:txBody>
+      </p:sp>
+      <p:cxnSp>
+        <p:nvCxnSpPr>
+          <p:cNvPr id="21" name="Connector 19"/>
+          <p:cNvCxnSpPr/>
+          <p:nvPr/>
+        </p:nvCxnSpPr>
+        <p:spPr>
+          <a:xfrm flipH="1" flipV="1">
+            <a:off x="8028432" y="3429000"/>
+            <a:ext cx="228600" cy="539496"/>
+          </a:xfrm>
+          <a:prstGeom prst="line">
+            <a:avLst/>
+          </a:prstGeom>
+          <a:ln w="12700">
+            <a:solidFill>
+              <a:srgbClr val="4B5563"/>
+            </a:solidFill>
+            <a:tailEnd type="triangle"/>
+          </a:ln>
+        </p:spPr>
+      </p:cxnSp>
+      <p:sp>
+        <p:nvSpPr>
+          <p:cNvPr id="22" name="TextBox 20"/>
+          <p:cNvSpPr txBox="1"/>
+          <p:nvPr/>
+        </p:nvSpPr>
+        <p:spPr>
+          <a:xfrm>
+            <a:off x="685800" y="5230368"/>
+            <a:ext cx="10789920" cy="411480"/>
+          </a:xfrm>
+          <a:prstGeom prst="rect">
+            <a:avLst/>
+          </a:prstGeom>
+          <a:noFill/>
+          <a:ln>
+            <a:noFill/>
+          </a:ln>
+        </p:spPr>
+        <p:txBody>
+          <a:bodyPr wrap="square" anchor="ctr">
+            <a:spAutoFit/>
+          </a:bodyPr>
+          <a:lstStyle/>
+          <a:p>
+            <a:pPr algn="ctr">
+              <a:buNone/>
+            </a:pPr>
+            <a:r>
+              <a:rPr lang="zh-CN" sz="1300">
+                <a:solidFill>
+                  <a:srgbClr val="4B5563"/>
+                </a:solidFill>
+                <a:latin typeface="Arial" panose="020B0604020202020204"/>
+                <a:ea typeface="微软雅黑" panose="020B0503020204020204" charset="-122"/>
+              </a:rPr>
+              <a:t>每个 front 在本节点完成装配、块分解、TRSM 与 Schur 更新；因子写回本节点，贡献块继续上传父节点。</a:t>
+            </a:r>
+            <a:endParaRPr lang="zh-CN"/>
+          </a:p>
+        </p:txBody>
+      </p:sp>
+    </p:spTree>
+    <p:custDataLst>
+      <p:tags r:id="rId1"/>
+    </p:custDataLst>
+  </p:cSld>
+  <p:clrMapOvr>
+    <a:masterClrMapping/>
+  </p:clrMapOvr>
+</p:sld>
+</file>
+
 <file path=ppt/slides/slide2.xml><?xml version="1.0" encoding="utf-8"?>
 <p:sld xmlns:a="http://schemas.openxmlformats.org/drawingml/2006/main" xmlns:r="http://schemas.openxmlformats.org/officeDocument/2006/relationships" xmlns:p="http://schemas.openxmlformats.org/presentationml/2006/main">
   <p:cSld>
@@ -10080,6 +10834,747 @@
         <p:nvPr/>
       </p:nvGrpSpPr>
       <p:grpSpPr/>
+      <mc:AlternateContent xmlns:mc="http://schemas.openxmlformats.org/markup-compatibility/2006" xmlns:a14="http://schemas.microsoft.com/office/drawing/2010/main">
+        <mc:Choice Requires="a14">
+          <p:graphicFrame>
+            <p:nvGraphicFramePr>
+              <p:cNvPr id="4" name="表格 3"/>
+              <p:cNvGraphicFramePr/>
+              <p:nvPr>
+                <p:custDataLst>
+                  <p:tags r:id="rId1"/>
+                </p:custDataLst>
+              </p:nvPr>
+            </p:nvGraphicFramePr>
+            <p:xfrm>
+              <a:off x="1822450" y="76200"/>
+              <a:ext cx="8530590" cy="3295650"/>
+            </p:xfrm>
+            <a:graphic>
+              <a:graphicData uri="http://schemas.openxmlformats.org/drawingml/2006/table">
+                <a:tbl>
+                  <a:tblPr>
+                    <a:tableStyleId>{D7AC3CCA-C797-4891-BE02-D94E43425B78}</a:tableStyleId>
+                  </a:tblPr>
+                  <a:tblGrid>
+                    <a:gridCol w="8530590"/>
+                  </a:tblGrid>
+                  <a:tr h="396000">
+                    <a:tc>
+                      <a:txBody>
+                        <a:bodyPr/>
+                        <a:p>
+                          <a:pPr algn="l">
+                            <a:buNone/>
+                          </a:pPr>
+                          <a:r>
+                            <a:rPr lang="en-US" altLang="zh-CN">
+                              <a:latin typeface="Times New Roman" panose="02020603050405020304" charset="0"/>
+                              <a:cs typeface="Times New Roman" panose="02020603050405020304" charset="0"/>
+                            </a:rPr>
+                            <a:t>Algorithm 5</a:t>
+                          </a:r>
+                          <a:r>
+                            <a:rPr lang="zh-CN" altLang="en-US">
+                              <a:latin typeface="Times New Roman" panose="02020603050405020304" charset="0"/>
+                              <a:cs typeface="Times New Roman" panose="02020603050405020304" charset="0"/>
+                            </a:rPr>
+                            <a:t>：</a:t>
+                          </a:r>
+                          <a:r>
+                            <a:rPr lang="en-US" altLang="zh-CN">
+                              <a:latin typeface="Times New Roman" panose="02020603050405020304" charset="0"/>
+                              <a:cs typeface="Times New Roman" panose="02020603050405020304" charset="0"/>
+                            </a:rPr>
+                            <a:t>AMD</a:t>
+                          </a:r>
+                          <a:endParaRPr lang="en-US" altLang="zh-CN">
+                            <a:latin typeface="Times New Roman" panose="02020603050405020304" charset="0"/>
+                            <a:cs typeface="Times New Roman" panose="02020603050405020304" charset="0"/>
+                          </a:endParaRPr>
+                        </a:p>
+                      </a:txBody>
+                      <a:tcPr>
+                        <a:lnL>
+                          <a:noFill/>
+                        </a:lnL>
+                        <a:lnR>
+                          <a:noFill/>
+                        </a:lnR>
+                        <a:lnT w="12700">
+                          <a:solidFill>
+                            <a:schemeClr val="tx1"/>
+                          </a:solidFill>
+                          <a:prstDash val="solid"/>
+                        </a:lnT>
+                        <a:lnB w="12700">
+                          <a:solidFill>
+                            <a:schemeClr val="tx1"/>
+                          </a:solidFill>
+                          <a:prstDash val="solid"/>
+                        </a:lnB>
+                        <a:lnTlToBr>
+                          <a:noFill/>
+                        </a:lnTlToBr>
+                        <a:lnBlToTr>
+                          <a:noFill/>
+                        </a:lnBlToTr>
+                        <a:solidFill>
+                          <a:schemeClr val="bg1"/>
+                        </a:solidFill>
+                      </a:tcPr>
+                    </a:tc>
+                  </a:tr>
+                  <a:tr h="2636520">
+                    <a:tc>
+                      <a:txBody>
+                        <a:bodyPr/>
+                        <a:p>
+                          <a:pPr indent="0" fontAlgn="auto">
+                            <a:lnSpc>
+                              <a:spcPts val="1880"/>
+                            </a:lnSpc>
+                            <a:buNone/>
+                          </a:pPr>
+                          <a:r>
+                            <a:rPr lang="en-US" altLang="zh-CN" sz="1400" b="1">
+                              <a:latin typeface="Times New Roman" panose="02020603050405020304" charset="0"/>
+                              <a:cs typeface="Times New Roman" panose="02020603050405020304" charset="0"/>
+                            </a:rPr>
+                            <a:t>Input: </a:t>
+                          </a:r>
+                          <a:r>
+                            <a:rPr lang="en-US" altLang="zh-CN" sz="1400" b="0">
+                              <a:latin typeface="Times New Roman" panose="02020603050405020304" charset="0"/>
+                              <a:cs typeface="Times New Roman" panose="02020603050405020304" charset="0"/>
+                            </a:rPr>
+                            <a:t>a n*n sprase matrix </a:t>
+                          </a:r>
+                          <a:r>
+                            <a:rPr lang="en-US" altLang="zh-CN" sz="1400" b="0">
+                              <a:latin typeface="Times New Roman" panose="02020603050405020304" charset="0"/>
+                              <a:cs typeface="Times New Roman" panose="02020603050405020304" charset="0"/>
+                            </a:rPr>
+                            <a:t>A</a:t>
+                          </a:r>
+                          <a:endParaRPr lang="en-US" altLang="zh-CN" sz="1400" b="0">
+                            <a:latin typeface="Times New Roman" panose="02020603050405020304" charset="0"/>
+                            <a:cs typeface="Times New Roman" panose="02020603050405020304" charset="0"/>
+                          </a:endParaRPr>
+                        </a:p>
+                        <a:p>
+                          <a:pPr indent="0" fontAlgn="auto">
+                            <a:lnSpc>
+                              <a:spcPts val="1880"/>
+                            </a:lnSpc>
+                            <a:buNone/>
+                          </a:pPr>
+                          <a:r>
+                            <a:rPr lang="en-US" altLang="zh-CN" sz="1400" b="1">
+                              <a:latin typeface="Times New Roman" panose="02020603050405020304" charset="0"/>
+                              <a:cs typeface="Times New Roman" panose="02020603050405020304" charset="0"/>
+                            </a:rPr>
+                            <a:t>Output: a permutation vector p</a:t>
+                          </a:r>
+                          <a:endParaRPr lang="en-US" altLang="zh-CN" sz="1400" b="0">
+                            <a:latin typeface="Times New Roman" panose="02020603050405020304" charset="0"/>
+                            <a:cs typeface="Times New Roman" panose="02020603050405020304" charset="0"/>
+                          </a:endParaRPr>
+                        </a:p>
+                        <a:p>
+                          <a:pPr indent="0" fontAlgn="auto">
+                            <a:lnSpc>
+                              <a:spcPts val="1880"/>
+                            </a:lnSpc>
+                            <a:buNone/>
+                          </a:pPr>
+                          <a:r>
+                            <a:rPr lang="en-US" altLang="zh-CN" sz="1400" b="0">
+                              <a:latin typeface="Times New Roman" panose="02020603050405020304" charset="0"/>
+                              <a:cs typeface="Times New Roman" panose="02020603050405020304" charset="0"/>
+                            </a:rPr>
+                            <a:t>1:  </a:t>
+                          </a:r>
+                          <a14:m>
+                            <m:oMath xmlns:m="http://schemas.openxmlformats.org/officeDocument/2006/math">
+                              <m:r>
+                                <a:rPr lang="en-US" altLang="zh-CN" sz="1400" b="0" i="1">
+                                  <a:latin typeface="Cambria Math" panose="02040503050406030204" charset="0"/>
+                                  <a:cs typeface="Cambria Math" panose="02040503050406030204" charset="0"/>
+                                </a:rPr>
+                                <m:t>𝑆</m:t>
+                              </m:r>
+                              <m:r>
+                                <a:rPr lang="en-US" altLang="zh-CN" sz="1400" i="1">
+                                  <a:latin typeface="Cambria Math" panose="02040503050406030204" charset="0"/>
+                                  <a:cs typeface="Cambria Math" panose="02040503050406030204" charset="0"/>
+                                </a:rPr>
+                                <m:t>←</m:t>
+                              </m:r>
+                              <m:r>
+                                <a:rPr lang="en-US" altLang="zh-CN" sz="1400" i="1">
+                                  <a:latin typeface="Cambria Math" panose="02040503050406030204" charset="0"/>
+                                  <a:cs typeface="Cambria Math" panose="02040503050406030204" charset="0"/>
+                                </a:rPr>
+                                <m:t>𝐴</m:t>
+                              </m:r>
+                              <m:r>
+                                <a:rPr lang="en-US" altLang="zh-CN" sz="1400" i="1">
+                                  <a:latin typeface="Cambria Math" panose="02040503050406030204" charset="0"/>
+                                  <a:cs typeface="Cambria Math" panose="02040503050406030204" charset="0"/>
+                                </a:rPr>
+                                <m:t>+</m:t>
+                              </m:r>
+                              <m:sSup>
+                                <m:sSupPr>
+                                  <m:ctrlPr>
+                                    <a:rPr lang="en-US" altLang="zh-CN" sz="1400" i="1">
+                                      <a:latin typeface="Cambria Math" panose="02040503050406030204" charset="0"/>
+                                      <a:cs typeface="Cambria Math" panose="02040503050406030204" charset="0"/>
+                                    </a:rPr>
+                                  </m:ctrlPr>
+                                </m:sSupPr>
+                                <m:e>
+                                  <m:r>
+                                    <a:rPr lang="en-US" altLang="zh-CN" sz="1400" i="1">
+                                      <a:latin typeface="Cambria Math" panose="02040503050406030204" charset="0"/>
+                                      <a:cs typeface="Cambria Math" panose="02040503050406030204" charset="0"/>
+                                    </a:rPr>
+                                    <m:t>𝐴</m:t>
+                                  </m:r>
+                                </m:e>
+                                <m:sup>
+                                  <m:r>
+                                    <a:rPr lang="en-US" altLang="zh-CN" sz="1400" i="1">
+                                      <a:latin typeface="Cambria Math" panose="02040503050406030204" charset="0"/>
+                                      <a:cs typeface="Cambria Math" panose="02040503050406030204" charset="0"/>
+                                    </a:rPr>
+                                    <m:t>𝑇</m:t>
+                                  </m:r>
+                                </m:sup>
+                              </m:sSup>
+                            </m:oMath>
+                          </a14:m>
+                          <a:r>
+                            <a:rPr lang="en-US" altLang="zh-CN" sz="1400" b="0">
+                              <a:latin typeface="Times New Roman" panose="02020603050405020304" charset="0"/>
+                              <a:cs typeface="Times New Roman" panose="02020603050405020304" charset="0"/>
+                            </a:rPr>
+                            <a:t>; </a:t>
+                          </a:r>
+                          <a14:m>
+                            <m:oMath xmlns:m="http://schemas.openxmlformats.org/officeDocument/2006/math">
+                              <m:r>
+                                <a:rPr lang="en-US" altLang="zh-CN" sz="1400" b="0" i="1">
+                                  <a:latin typeface="Cambria Math" panose="02040503050406030204" charset="0"/>
+                                  <a:cs typeface="Cambria Math" panose="02040503050406030204" charset="0"/>
+                                </a:rPr>
+                                <m:t>𝑉</m:t>
+                              </m:r>
+                              <m:r>
+                                <a:rPr lang="en-US" altLang="zh-CN" sz="1400" i="1">
+                                  <a:latin typeface="Cambria Math" panose="02040503050406030204" charset="0"/>
+                                  <a:cs typeface="Cambria Math" panose="02040503050406030204" charset="0"/>
+                                </a:rPr>
+                                <m:t>←{</m:t>
+                              </m:r>
+                              <m:r>
+                                <a:rPr lang="en-US" altLang="zh-CN" sz="1400" i="1">
+                                  <a:latin typeface="Cambria Math" panose="02040503050406030204" charset="0"/>
+                                  <a:cs typeface="Cambria Math" panose="02040503050406030204" charset="0"/>
+                                </a:rPr>
+                                <m:t>1</m:t>
+                              </m:r>
+                              <m:r>
+                                <a:rPr lang="en-US" altLang="zh-CN" sz="1400" i="1">
+                                  <a:latin typeface="Cambria Math" panose="02040503050406030204" charset="0"/>
+                                  <a:cs typeface="Cambria Math" panose="02040503050406030204" charset="0"/>
+                                </a:rPr>
+                                <m:t>,</m:t>
+                              </m:r>
+                              <m:r>
+                                <a:rPr lang="en-US" altLang="zh-CN" sz="1400" i="1">
+                                  <a:latin typeface="Cambria Math" panose="02040503050406030204" charset="0"/>
+                                  <a:cs typeface="Cambria Math" panose="02040503050406030204" charset="0"/>
+                                </a:rPr>
+                                <m:t>2</m:t>
+                              </m:r>
+                              <m:r>
+                                <a:rPr lang="en-US" altLang="zh-CN" sz="1400" i="1">
+                                  <a:latin typeface="Cambria Math" panose="02040503050406030204" charset="0"/>
+                                  <a:cs typeface="Cambria Math" panose="02040503050406030204" charset="0"/>
+                                </a:rPr>
+                                <m:t>,</m:t>
+                              </m:r>
+                              <m:r>
+                                <a:rPr lang="en-US" altLang="zh-CN" sz="1400" i="1">
+                                  <a:latin typeface="Cambria Math" panose="02040503050406030204" charset="0"/>
+                                  <a:cs typeface="Cambria Math" panose="02040503050406030204" charset="0"/>
+                                </a:rPr>
+                                <m:t>3</m:t>
+                              </m:r>
+                              <m:r>
+                                <a:rPr lang="en-US" altLang="zh-CN" sz="1400" i="1">
+                                  <a:latin typeface="Cambria Math" panose="02040503050406030204" charset="0"/>
+                                  <a:cs typeface="Cambria Math" panose="02040503050406030204" charset="0"/>
+                                </a:rPr>
+                                <m:t>,...,</m:t>
+                              </m:r>
+                              <m:r>
+                                <a:rPr lang="en-US" altLang="zh-CN" sz="1400" i="1">
+                                  <a:latin typeface="Cambria Math" panose="02040503050406030204" charset="0"/>
+                                  <a:cs typeface="Cambria Math" panose="02040503050406030204" charset="0"/>
+                                </a:rPr>
+                                <m:t>𝑛</m:t>
+                              </m:r>
+                              <m:r>
+                                <a:rPr lang="en-US" altLang="zh-CN" sz="1400" i="1">
+                                  <a:latin typeface="Cambria Math" panose="02040503050406030204" charset="0"/>
+                                  <a:cs typeface="Cambria Math" panose="02040503050406030204" charset="0"/>
+                                </a:rPr>
+                                <m:t>}</m:t>
+                              </m:r>
+                            </m:oMath>
+                          </a14:m>
+                          <a:endParaRPr lang="en-US" altLang="zh-CN" sz="1400" b="0">
+                            <a:latin typeface="Times New Roman" panose="02020603050405020304" charset="0"/>
+                            <a:cs typeface="Times New Roman" panose="02020603050405020304" charset="0"/>
+                          </a:endParaRPr>
+                        </a:p>
+                        <a:p>
+                          <a:pPr indent="0" fontAlgn="auto">
+                            <a:lnSpc>
+                              <a:spcPts val="1880"/>
+                            </a:lnSpc>
+                            <a:buNone/>
+                          </a:pPr>
+                          <a:r>
+                            <a:rPr lang="en-US" altLang="zh-CN" sz="1400" b="0">
+                              <a:latin typeface="Times New Roman" panose="02020603050405020304" charset="0"/>
+                              <a:cs typeface="Times New Roman" panose="02020603050405020304" charset="0"/>
+                            </a:rPr>
+                            <a:t>2: </a:t>
+                          </a:r>
+                          <a:r>
+                            <a:rPr lang="en-US" altLang="zh-CN" sz="1400" b="1">
+                              <a:latin typeface="Times New Roman" panose="02020603050405020304" charset="0"/>
+                              <a:cs typeface="Times New Roman" panose="02020603050405020304" charset="0"/>
+                            </a:rPr>
+                            <a:t>for</a:t>
+                          </a:r>
+                          <a:r>
+                            <a:rPr lang="en-US" altLang="zh-CN" sz="1400" b="0">
+                              <a:latin typeface="Times New Roman" panose="02020603050405020304" charset="0"/>
+                              <a:cs typeface="Times New Roman" panose="02020603050405020304" charset="0"/>
+                            </a:rPr>
+                            <a:t> i in V </a:t>
+                          </a:r>
+                          <a:r>
+                            <a:rPr lang="en-US" altLang="zh-CN" sz="1400" b="1">
+                              <a:latin typeface="Times New Roman" panose="02020603050405020304" charset="0"/>
+                              <a:cs typeface="Times New Roman" panose="02020603050405020304" charset="0"/>
+                            </a:rPr>
+                            <a:t>do</a:t>
+                          </a:r>
+                          <a:r>
+                            <a:rPr lang="en-US" altLang="zh-CN" sz="1400" b="0">
+                              <a:latin typeface="Times New Roman" panose="02020603050405020304" charset="0"/>
+                              <a:cs typeface="Times New Roman" panose="02020603050405020304" charset="0"/>
+                            </a:rPr>
+                            <a:t>:</a:t>
+                          </a:r>
+                          <a:endParaRPr lang="zh-CN" altLang="en-US" sz="1400" b="0">
+                            <a:latin typeface="Times New Roman" panose="02020603050405020304" charset="0"/>
+                            <a:cs typeface="Times New Roman" panose="02020603050405020304" charset="0"/>
+                          </a:endParaRPr>
+                        </a:p>
+                        <a:p>
+                          <a:pPr indent="0" fontAlgn="auto">
+                            <a:lnSpc>
+                              <a:spcPts val="1880"/>
+                            </a:lnSpc>
+                            <a:buNone/>
+                          </a:pPr>
+                          <a:r>
+                            <a:rPr lang="en-US" altLang="zh-CN" sz="1400" b="0">
+                              <a:latin typeface="Times New Roman" panose="02020603050405020304" charset="0"/>
+                              <a:cs typeface="Times New Roman" panose="02020603050405020304" charset="0"/>
+                            </a:rPr>
+                            <a:t>3: Adj[i] </a:t>
+                          </a:r>
+                          <a:endParaRPr lang="en-US" altLang="zh-CN" sz="1400" b="1">
+                            <a:latin typeface="Times New Roman" panose="02020603050405020304" charset="0"/>
+                            <a:cs typeface="Times New Roman" panose="02020603050405020304" charset="0"/>
+                          </a:endParaRPr>
+                        </a:p>
+                        <a:p>
+                          <a:pPr indent="0" fontAlgn="auto">
+                            <a:lnSpc>
+                              <a:spcPts val="1880"/>
+                            </a:lnSpc>
+                            <a:buNone/>
+                          </a:pPr>
+                          <a:r>
+                            <a:rPr lang="en-US" altLang="zh-CN" sz="1400" b="0">
+                              <a:latin typeface="Times New Roman" panose="02020603050405020304" charset="0"/>
+                              <a:cs typeface="Times New Roman" panose="02020603050405020304" charset="0"/>
+                            </a:rPr>
+                            <a:t>4: </a:t>
+                          </a:r>
+                          <a:endParaRPr lang="en-US" altLang="zh-CN" sz="1400" i="1">
+                            <a:latin typeface="Cambria Math" panose="02040503050406030204" charset="0"/>
+                            <a:cs typeface="Cambria Math" panose="02040503050406030204" charset="0"/>
+                          </a:endParaRPr>
+                        </a:p>
+                        <a:p>
+                          <a:pPr indent="0" fontAlgn="auto">
+                            <a:lnSpc>
+                              <a:spcPts val="1880"/>
+                            </a:lnSpc>
+                            <a:buNone/>
+                          </a:pPr>
+                          <a:r>
+                            <a:rPr lang="en-US" altLang="zh-CN" sz="1400" b="0">
+                              <a:latin typeface="Times New Roman" panose="02020603050405020304" charset="0"/>
+                              <a:cs typeface="Times New Roman" panose="02020603050405020304" charset="0"/>
+                            </a:rPr>
+                            <a:t>5: </a:t>
+                          </a:r>
+                          <a:endParaRPr lang="en-US" altLang="zh-CN" sz="1400" b="1">
+                            <a:latin typeface="Times New Roman" panose="02020603050405020304" charset="0"/>
+                            <a:cs typeface="Times New Roman" panose="02020603050405020304" charset="0"/>
+                          </a:endParaRPr>
+                        </a:p>
+                        <a:p>
+                          <a:pPr indent="0" fontAlgn="auto">
+                            <a:lnSpc>
+                              <a:spcPts val="1880"/>
+                            </a:lnSpc>
+                            <a:buNone/>
+                          </a:pPr>
+                          <a:r>
+                            <a:rPr lang="en-US" altLang="zh-CN" sz="1400" b="0">
+                              <a:latin typeface="Times New Roman" panose="02020603050405020304" charset="0"/>
+                              <a:cs typeface="Times New Roman" panose="02020603050405020304" charset="0"/>
+                            </a:rPr>
+                            <a:t>6: </a:t>
+                          </a:r>
+                          <a:endParaRPr lang="en-US" altLang="zh-CN" sz="1400" b="0">
+                            <a:latin typeface="Times New Roman" panose="02020603050405020304" charset="0"/>
+                            <a:cs typeface="Times New Roman" panose="02020603050405020304" charset="0"/>
+                          </a:endParaRPr>
+                        </a:p>
+                        <a:p>
+                          <a:pPr indent="0" fontAlgn="auto">
+                            <a:lnSpc>
+                              <a:spcPts val="1880"/>
+                            </a:lnSpc>
+                            <a:buNone/>
+                          </a:pPr>
+                          <a:r>
+                            <a:rPr lang="en-US" altLang="zh-CN" sz="1400" b="0">
+                              <a:latin typeface="Times New Roman" panose="02020603050405020304" charset="0"/>
+                              <a:cs typeface="Times New Roman" panose="02020603050405020304" charset="0"/>
+                            </a:rPr>
+                            <a:t>7: </a:t>
+                          </a:r>
+                          <a:endParaRPr lang="en-US" altLang="zh-CN" sz="1400" b="0">
+                            <a:latin typeface="Times New Roman" panose="02020603050405020304" charset="0"/>
+                            <a:cs typeface="Times New Roman" panose="02020603050405020304" charset="0"/>
+                          </a:endParaRPr>
+                        </a:p>
+                        <a:p>
+                          <a:pPr indent="0" fontAlgn="auto">
+                            <a:lnSpc>
+                              <a:spcPts val="1880"/>
+                            </a:lnSpc>
+                            <a:buNone/>
+                          </a:pPr>
+                          <a:r>
+                            <a:rPr lang="en-US" altLang="zh-CN" sz="1400" b="0">
+                              <a:latin typeface="Times New Roman" panose="02020603050405020304" charset="0"/>
+                              <a:cs typeface="Times New Roman" panose="02020603050405020304" charset="0"/>
+                            </a:rPr>
+                            <a:t>8: </a:t>
+                          </a:r>
+                          <a:endParaRPr lang="en-US" altLang="zh-CN" sz="1400" b="0">
+                            <a:latin typeface="Times New Roman" panose="02020603050405020304" charset="0"/>
+                            <a:cs typeface="Times New Roman" panose="02020603050405020304" charset="0"/>
+                          </a:endParaRPr>
+                        </a:p>
+                        <a:p>
+                          <a:pPr indent="0" fontAlgn="auto">
+                            <a:lnSpc>
+                              <a:spcPts val="1880"/>
+                            </a:lnSpc>
+                            <a:buNone/>
+                          </a:pPr>
+                          <a:r>
+                            <a:rPr lang="en-US" altLang="zh-CN" sz="1400" b="0">
+                              <a:latin typeface="Times New Roman" panose="02020603050405020304" charset="0"/>
+                              <a:cs typeface="Times New Roman" panose="02020603050405020304" charset="0"/>
+                            </a:rPr>
+                            <a:t>9: </a:t>
+                          </a:r>
+                          <a:endParaRPr lang="en-US" altLang="zh-CN" sz="1400" b="0">
+                            <a:latin typeface="Times New Roman" panose="02020603050405020304" charset="0"/>
+                            <a:cs typeface="Times New Roman" panose="02020603050405020304" charset="0"/>
+                          </a:endParaRPr>
+                        </a:p>
+                        <a:p>
+                          <a:pPr indent="0" fontAlgn="auto">
+                            <a:lnSpc>
+                              <a:spcPts val="1880"/>
+                            </a:lnSpc>
+                            <a:buNone/>
+                          </a:pPr>
+                          <a:r>
+                            <a:rPr lang="en-US" altLang="zh-CN" sz="1400" b="0">
+                              <a:latin typeface="Times New Roman" panose="02020603050405020304" charset="0"/>
+                              <a:cs typeface="Times New Roman" panose="02020603050405020304" charset="0"/>
+                            </a:rPr>
+                            <a:t>10:</a:t>
+                          </a:r>
+                          <a:endParaRPr lang="en-US" altLang="zh-CN" sz="1400" b="1">
+                            <a:latin typeface="Times New Roman" panose="02020603050405020304" charset="0"/>
+                            <a:cs typeface="Times New Roman" panose="02020603050405020304" charset="0"/>
+                          </a:endParaRPr>
+                        </a:p>
+                      </a:txBody>
+                      <a:tcPr>
+                        <a:lnL>
+                          <a:noFill/>
+                        </a:lnL>
+                        <a:lnR>
+                          <a:noFill/>
+                        </a:lnR>
+                        <a:lnT w="12700">
+                          <a:solidFill>
+                            <a:schemeClr val="tx1"/>
+                          </a:solidFill>
+                          <a:prstDash val="solid"/>
+                        </a:lnT>
+                        <a:lnB w="12700" cmpd="sng">
+                          <a:solidFill>
+                            <a:schemeClr val="tx1"/>
+                          </a:solidFill>
+                          <a:prstDash val="solid"/>
+                        </a:lnB>
+                        <a:solidFill>
+                          <a:schemeClr val="bg1"/>
+                        </a:solidFill>
+                      </a:tcPr>
+                    </a:tc>
+                  </a:tr>
+                </a:tbl>
+              </a:graphicData>
+            </a:graphic>
+          </p:graphicFrame>
+        </mc:Choice>
+        <mc:Fallback xmlns="">
+          <p:graphicFrame>
+            <p:nvGraphicFramePr>
+              <p:cNvPr id="4" name="表格 3"/>
+              <p:cNvGraphicFramePr/>
+              <p:nvPr>
+                <p:custDataLst>
+                  <p:tags r:id="rId2"/>
+                </p:custDataLst>
+              </p:nvPr>
+            </p:nvGraphicFramePr>
+            <p:xfrm>
+              <a:off x="1822450" y="76200"/>
+              <a:ext cx="8530590" cy="3295650"/>
+            </p:xfrm>
+            <a:graphic>
+              <a:graphicData uri="http://schemas.openxmlformats.org/drawingml/2006/table">
+                <a:tbl>
+                  <a:tblPr>
+                    <a:tableStyleId>{D7AC3CCA-C797-4891-BE02-D94E43425B78}</a:tableStyleId>
+                  </a:tblPr>
+                  <a:tblGrid>
+                    <a:gridCol w="8530590"/>
+                  </a:tblGrid>
+                  <a:tr h="396000">
+                    <a:tc>
+                      <a:txBody>
+                        <a:bodyPr/>
+                        <a:p>
+                          <a:pPr algn="l">
+                            <a:buNone/>
+                          </a:pPr>
+                          <a:r>
+                            <a:rPr lang="en-US" altLang="zh-CN">
+                              <a:latin typeface="Times New Roman" panose="02020603050405020304" charset="0"/>
+                              <a:cs typeface="Times New Roman" panose="02020603050405020304" charset="0"/>
+                            </a:rPr>
+                            <a:t>Algorithm 5</a:t>
+                          </a:r>
+                          <a:r>
+                            <a:rPr lang="zh-CN" altLang="en-US">
+                              <a:latin typeface="Times New Roman" panose="02020603050405020304" charset="0"/>
+                              <a:cs typeface="Times New Roman" panose="02020603050405020304" charset="0"/>
+                            </a:rPr>
+                            <a:t>：</a:t>
+                          </a:r>
+                          <a:r>
+                            <a:rPr lang="en-US" altLang="zh-CN">
+                              <a:latin typeface="Times New Roman" panose="02020603050405020304" charset="0"/>
+                              <a:cs typeface="Times New Roman" panose="02020603050405020304" charset="0"/>
+                            </a:rPr>
+                            <a:t>AMD</a:t>
+                          </a:r>
+                          <a:endParaRPr lang="en-US" altLang="zh-CN">
+                            <a:latin typeface="Times New Roman" panose="02020603050405020304" charset="0"/>
+                            <a:cs typeface="Times New Roman" panose="02020603050405020304" charset="0"/>
+                          </a:endParaRPr>
+                        </a:p>
+                      </a:txBody>
+                      <a:tcPr>
+                        <a:lnL>
+                          <a:noFill/>
+                        </a:lnL>
+                        <a:lnR>
+                          <a:noFill/>
+                        </a:lnR>
+                        <a:lnT w="12700">
+                          <a:solidFill>
+                            <a:schemeClr val="tx1"/>
+                          </a:solidFill>
+                          <a:prstDash val="solid"/>
+                        </a:lnT>
+                        <a:lnB w="12700">
+                          <a:solidFill>
+                            <a:schemeClr val="tx1"/>
+                          </a:solidFill>
+                          <a:prstDash val="solid"/>
+                        </a:lnB>
+                        <a:lnTlToBr>
+                          <a:noFill/>
+                        </a:lnTlToBr>
+                        <a:lnBlToTr>
+                          <a:noFill/>
+                        </a:lnBlToTr>
+                        <a:solidFill>
+                          <a:schemeClr val="bg1"/>
+                        </a:solidFill>
+                      </a:tcPr>
+                    </a:tc>
+                  </a:tr>
+                  <a:tr h="2956560">
+                    <a:tc>
+                      <a:txBody>
+                        <a:bodyPr/>
+                        <a:lstStyle/>
+                        <a:p>
+                          <a:endParaRPr lang="zh-CN"/>
+                        </a:p>
+                      </a:txBody>
+                      <a:tcPr>
+                        <a:lnL>
+                          <a:noFill/>
+                        </a:lnL>
+                        <a:lnR>
+                          <a:noFill/>
+                        </a:lnR>
+                        <a:lnT w="12700">
+                          <a:solidFill>
+                            <a:schemeClr val="tx1"/>
+                          </a:solidFill>
+                          <a:prstDash val="solid"/>
+                        </a:lnT>
+                        <a:lnB w="12700" cmpd="sng">
+                          <a:solidFill>
+                            <a:schemeClr val="tx1"/>
+                          </a:solidFill>
+                          <a:prstDash val="solid"/>
+                        </a:lnB>
+                        <a:blipFill>
+                          <a:blip r:embed="rId3"/>
+                        </a:blipFill>
+                      </a:tcPr>
+                    </a:tc>
+                  </a:tr>
+                </a:tbl>
+              </a:graphicData>
+            </a:graphic>
+          </p:graphicFrame>
+        </mc:Fallback>
+      </mc:AlternateContent>
+      <p:graphicFrame>
+        <p:nvGraphicFramePr>
+          <p:cNvPr id="5" name="对象 4">
+            <a:hlinkClick r:id="" action="ppaction://ole?verb="/>
+          </p:cNvPr>
+          <p:cNvGraphicFramePr>
+            <a:graphicFrameLocks noChangeAspect="1"/>
+          </p:cNvGraphicFramePr>
+          <p:nvPr/>
+        </p:nvGraphicFramePr>
+        <p:xfrm>
+          <a:off x="6032500" y="2311400"/>
+          <a:ext cx="114300" cy="215900"/>
+        </p:xfrm>
+        <a:graphic>
+          <a:graphicData uri="http://schemas.openxmlformats.org/presentationml/2006/ole">
+            <mc:AlternateContent xmlns:mc="http://schemas.openxmlformats.org/markup-compatibility/2006">
+              <mc:Choice xmlns:v="urn:schemas-microsoft-com:vml" Requires="v">
+                <p:oleObj spid="_x0000_s1025" name="" r:id="rId4" imgW="114300" imgH="215900" progId="Equation.KSEE3">
+                  <p:embed/>
+                </p:oleObj>
+              </mc:Choice>
+              <mc:Fallback>
+                <p:oleObj name="" r:id="rId4" imgW="114300" imgH="215900" progId="Equation.KSEE3">
+                  <p:embed/>
+                  <p:pic>
+                    <p:nvPicPr>
+                      <p:cNvPr id="0" name="图片 1024"/>
+                      <p:cNvPicPr/>
+                      <p:nvPr/>
+                    </p:nvPicPr>
+                    <p:blipFill>
+                      <a:blip r:embed="rId5"/>
+                      <a:stretch>
+                        <a:fillRect/>
+                      </a:stretch>
+                    </p:blipFill>
+                    <p:spPr>
+                      <a:xfrm>
+                        <a:off x="6032500" y="2311400"/>
+                        <a:ext cx="114300" cy="215900"/>
+                      </a:xfrm>
+                      <a:prstGeom prst="rect">
+                        <a:avLst/>
+                      </a:prstGeom>
+                    </p:spPr>
+                  </p:pic>
+                </p:oleObj>
+              </mc:Fallback>
+            </mc:AlternateContent>
+          </a:graphicData>
+        </a:graphic>
+      </p:graphicFrame>
+    </p:spTree>
+    <p:custDataLst>
+      <p:tags r:id="rId6"/>
+    </p:custDataLst>
+  </p:cSld>
+  <p:clrMapOvr>
+    <a:masterClrMapping/>
+  </p:clrMapOvr>
+</p:sld>
+</file>
+
+<file path=ppt/slides/slide8.xml><?xml version="1.0" encoding="utf-8"?>
+<p:sld xmlns:a="http://schemas.openxmlformats.org/drawingml/2006/main" xmlns:r="http://schemas.openxmlformats.org/officeDocument/2006/relationships" xmlns:p="http://schemas.openxmlformats.org/presentationml/2006/main">
+  <p:cSld>
+    <p:spTree>
+      <p:nvGrpSpPr>
+        <p:cNvPr id="1" name=""/>
+        <p:cNvGrpSpPr/>
+        <p:nvPr/>
+      </p:nvGrpSpPr>
+      <p:grpSpPr/>
       <p:graphicFrame>
         <p:nvGraphicFramePr>
           <p:cNvPr id="4" name="表格 3"/>
@@ -15276,7 +16771,7 @@
 </p:sld>
 </file>
 
-<file path=ppt/slides/slide8.xml><?xml version="1.0" encoding="utf-8"?>
+<file path=ppt/slides/slide9.xml><?xml version="1.0" encoding="utf-8"?>
 <p:sld xmlns:a="http://schemas.openxmlformats.org/drawingml/2006/main" xmlns:r="http://schemas.openxmlformats.org/officeDocument/2006/relationships" xmlns:p="http://schemas.openxmlformats.org/presentationml/2006/main">
   <p:cSld>
     <p:spTree>
@@ -16623,759 +18118,6 @@
     </p:spTree>
     <p:custDataLst>
       <p:tags r:id="rId5"/>
-    </p:custDataLst>
-  </p:cSld>
-  <p:clrMapOvr>
-    <a:masterClrMapping/>
-  </p:clrMapOvr>
-</p:sld>
-</file>
-
-<file path=ppt/slides/slide9.xml><?xml version="1.0" encoding="utf-8"?>
-<p:sld xmlns:a="http://schemas.openxmlformats.org/drawingml/2006/main" xmlns:r="http://schemas.openxmlformats.org/officeDocument/2006/relationships" xmlns:p="http://schemas.openxmlformats.org/presentationml/2006/main">
-  <p:cSld>
-    <p:spTree>
-      <p:nvGrpSpPr>
-        <p:cNvPr id="1" name=""/>
-        <p:cNvGrpSpPr/>
-        <p:nvPr/>
-      </p:nvGrpSpPr>
-      <p:grpSpPr/>
-      <p:sp>
-        <p:nvSpPr>
-          <p:cNvPr id="7" name="Rectangle 5"/>
-          <p:cNvSpPr/>
-          <p:nvPr/>
-        </p:nvSpPr>
-        <p:spPr>
-          <a:xfrm>
-            <a:off x="594360" y="2121408"/>
-            <a:ext cx="1691640" cy="1243584"/>
-          </a:xfrm>
-          <a:prstGeom prst="rect">
-            <a:avLst/>
-          </a:prstGeom>
-          <a:solidFill>
-            <a:srgbClr val="EAF3FF"/>
-          </a:solidFill>
-          <a:ln w="12700">
-            <a:solidFill>
-              <a:srgbClr val="7A9AB8"/>
-            </a:solidFill>
-          </a:ln>
-        </p:spPr>
-        <p:txBody>
-          <a:bodyPr wrap="square" anchor="ctr">
-            <a:spAutoFit/>
-          </a:bodyPr>
-          <a:lstStyle/>
-          <a:p>
-            <a:pPr algn="ctr">
-              <a:buNone/>
-            </a:pPr>
-            <a:r>
-              <a:rPr lang="zh-CN" sz="1300" b="1">
-                <a:solidFill>
-                  <a:srgbClr val="1F2937"/>
-                </a:solidFill>
-                <a:latin typeface="Arial" panose="020B0604020202020204"/>
-                <a:ea typeface="微软雅黑" panose="020B0503020204020204" charset="-122"/>
-              </a:rPr>
-              <a:t>Assembly</a:t>
-            </a:r>
-            <a:endParaRPr lang="zh-CN"/>
-          </a:p>
-          <a:p>
-            <a:pPr algn="ctr">
-              <a:buNone/>
-            </a:pPr>
-            <a:r>
-              <a:rPr lang="zh-CN" sz="1100">
-                <a:solidFill>
-                  <a:srgbClr val="1F2937"/>
-                </a:solidFill>
-                <a:latin typeface="Arial" panose="020B0604020202020204"/>
-                <a:ea typeface="微软雅黑" panose="020B0503020204020204" charset="-122"/>
-              </a:rPr>
-              <a:t>装配 A_local 与</a:t>
-            </a:r>
-            <a:endParaRPr lang="zh-CN"/>
-          </a:p>
-          <a:p>
-            <a:pPr algn="ctr">
-              <a:buNone/>
-            </a:pPr>
-            <a:r>
-              <a:rPr lang="zh-CN" sz="1100">
-                <a:solidFill>
-                  <a:srgbClr val="1F2937"/>
-                </a:solidFill>
-                <a:latin typeface="Arial" panose="020B0604020202020204"/>
-                <a:ea typeface="微软雅黑" panose="020B0503020204020204" charset="-122"/>
-              </a:rPr>
-              <a:t>child updates</a:t>
-            </a:r>
-            <a:endParaRPr lang="zh-CN"/>
-          </a:p>
-        </p:txBody>
-      </p:sp>
-      <p:sp>
-        <p:nvSpPr>
-          <p:cNvPr id="8" name="Rectangle 6"/>
-          <p:cNvSpPr/>
-          <p:nvPr/>
-        </p:nvSpPr>
-        <p:spPr>
-          <a:xfrm>
-            <a:off x="2788920" y="2121408"/>
-            <a:ext cx="1691640" cy="1243584"/>
-          </a:xfrm>
-          <a:prstGeom prst="rect">
-            <a:avLst/>
-          </a:prstGeom>
-          <a:solidFill>
-            <a:srgbClr val="EAF3FF"/>
-          </a:solidFill>
-          <a:ln w="12700">
-            <a:solidFill>
-              <a:srgbClr val="7A9AB8"/>
-            </a:solidFill>
-          </a:ln>
-        </p:spPr>
-        <p:txBody>
-          <a:bodyPr wrap="square" anchor="ctr">
-            <a:spAutoFit/>
-          </a:bodyPr>
-          <a:lstStyle/>
-          <a:p>
-            <a:pPr algn="ctr">
-              <a:buNone/>
-            </a:pPr>
-            <a:r>
-              <a:rPr lang="zh-CN" sz="1300" b="1">
-                <a:solidFill>
-                  <a:srgbClr val="1F2937"/>
-                </a:solidFill>
-                <a:latin typeface="Arial" panose="020B0604020202020204"/>
-                <a:ea typeface="微软雅黑" panose="020B0503020204020204" charset="-122"/>
-              </a:rPr>
-              <a:t>Pivot / Block LU</a:t>
-            </a:r>
-            <a:endParaRPr lang="zh-CN"/>
-          </a:p>
-          <a:p>
-            <a:pPr algn="ctr">
-              <a:buNone/>
-            </a:pPr>
-            <a:r>
-              <a:rPr lang="zh-CN" sz="1100">
-                <a:solidFill>
-                  <a:srgbClr val="1F2937"/>
-                </a:solidFill>
-                <a:latin typeface="Arial" panose="020B0604020202020204"/>
-                <a:ea typeface="微软雅黑" panose="020B0503020204020204" charset="-122"/>
-              </a:rPr>
-              <a:t>主元选择与</a:t>
-            </a:r>
-            <a:endParaRPr lang="zh-CN"/>
-          </a:p>
-          <a:p>
-            <a:pPr algn="ctr">
-              <a:buNone/>
-            </a:pPr>
-            <a:r>
-              <a:rPr lang="zh-CN" sz="1100">
-                <a:solidFill>
-                  <a:srgbClr val="1F2937"/>
-                </a:solidFill>
-                <a:latin typeface="Arial" panose="020B0604020202020204"/>
-                <a:ea typeface="微软雅黑" panose="020B0503020204020204" charset="-122"/>
-              </a:rPr>
-              <a:t>主元块分解</a:t>
-            </a:r>
-            <a:endParaRPr lang="zh-CN"/>
-          </a:p>
-        </p:txBody>
-      </p:sp>
-      <p:sp>
-        <p:nvSpPr>
-          <p:cNvPr id="9" name="Rectangle 7"/>
-          <p:cNvSpPr/>
-          <p:nvPr/>
-        </p:nvSpPr>
-        <p:spPr>
-          <a:xfrm>
-            <a:off x="4983480" y="2121408"/>
-            <a:ext cx="1691640" cy="1243584"/>
-          </a:xfrm>
-          <a:prstGeom prst="rect">
-            <a:avLst/>
-          </a:prstGeom>
-          <a:solidFill>
-            <a:srgbClr val="EAF3FF"/>
-          </a:solidFill>
-          <a:ln w="12700">
-            <a:solidFill>
-              <a:srgbClr val="7A9AB8"/>
-            </a:solidFill>
-          </a:ln>
-        </p:spPr>
-        <p:txBody>
-          <a:bodyPr wrap="square" anchor="ctr">
-            <a:spAutoFit/>
-          </a:bodyPr>
-          <a:lstStyle/>
-          <a:p>
-            <a:pPr algn="ctr">
-              <a:buNone/>
-            </a:pPr>
-            <a:r>
-              <a:rPr lang="zh-CN" sz="1300" b="1">
-                <a:solidFill>
-                  <a:srgbClr val="1F2937"/>
-                </a:solidFill>
-                <a:latin typeface="Arial" panose="020B0604020202020204"/>
-                <a:ea typeface="微软雅黑" panose="020B0503020204020204" charset="-122"/>
-              </a:rPr>
-              <a:t>TRSM</a:t>
-            </a:r>
-            <a:endParaRPr lang="zh-CN"/>
-          </a:p>
-          <a:p>
-            <a:pPr algn="ctr">
-              <a:buNone/>
-            </a:pPr>
-            <a:r>
-              <a:rPr lang="zh-CN" sz="1100">
-                <a:solidFill>
-                  <a:srgbClr val="1F2937"/>
-                </a:solidFill>
-                <a:latin typeface="Arial" panose="020B0604020202020204"/>
-                <a:ea typeface="微软雅黑" panose="020B0503020204020204" charset="-122"/>
-              </a:rPr>
-              <a:t>求解 F21U11^{-1}</a:t>
-            </a:r>
-            <a:endParaRPr lang="zh-CN"/>
-          </a:p>
-          <a:p>
-            <a:pPr algn="ctr">
-              <a:buNone/>
-            </a:pPr>
-            <a:r>
-              <a:rPr lang="zh-CN" sz="1100">
-                <a:solidFill>
-                  <a:srgbClr val="1F2937"/>
-                </a:solidFill>
-                <a:latin typeface="Arial" panose="020B0604020202020204"/>
-                <a:ea typeface="微软雅黑" panose="020B0503020204020204" charset="-122"/>
-              </a:rPr>
-              <a:t>与 L11^{-1}F12</a:t>
-            </a:r>
-            <a:endParaRPr lang="zh-CN"/>
-          </a:p>
-        </p:txBody>
-      </p:sp>
-      <p:sp>
-        <p:nvSpPr>
-          <p:cNvPr id="10" name="Rectangle 8"/>
-          <p:cNvSpPr/>
-          <p:nvPr/>
-        </p:nvSpPr>
-        <p:spPr>
-          <a:xfrm>
-            <a:off x="7178040" y="2121408"/>
-            <a:ext cx="1691640" cy="1243584"/>
-          </a:xfrm>
-          <a:prstGeom prst="rect">
-            <a:avLst/>
-          </a:prstGeom>
-          <a:solidFill>
-            <a:srgbClr val="F3F6F9"/>
-          </a:solidFill>
-          <a:ln w="12700">
-            <a:solidFill>
-              <a:srgbClr val="7A9AB8"/>
-            </a:solidFill>
-          </a:ln>
-        </p:spPr>
-        <p:txBody>
-          <a:bodyPr wrap="square" anchor="ctr">
-            <a:spAutoFit/>
-          </a:bodyPr>
-          <a:lstStyle/>
-          <a:p>
-            <a:pPr algn="ctr">
-              <a:buNone/>
-            </a:pPr>
-            <a:r>
-              <a:rPr lang="zh-CN" sz="1300" b="1">
-                <a:solidFill>
-                  <a:srgbClr val="1F2937"/>
-                </a:solidFill>
-                <a:latin typeface="Arial" panose="020B0604020202020204"/>
-                <a:ea typeface="微软雅黑" panose="020B0503020204020204" charset="-122"/>
-              </a:rPr>
-              <a:t>Schur Update</a:t>
-            </a:r>
-            <a:endParaRPr lang="zh-CN"/>
-          </a:p>
-          <a:p>
-            <a:pPr algn="ctr">
-              <a:buNone/>
-            </a:pPr>
-            <a:r>
-              <a:rPr lang="zh-CN" sz="1100">
-                <a:solidFill>
-                  <a:srgbClr val="1F2937"/>
-                </a:solidFill>
-                <a:latin typeface="Arial" panose="020B0604020202020204"/>
-                <a:ea typeface="微软雅黑" panose="020B0503020204020204" charset="-122"/>
-              </a:rPr>
-              <a:t>(GEMM)</a:t>
-            </a:r>
-            <a:endParaRPr lang="zh-CN"/>
-          </a:p>
-          <a:p>
-            <a:pPr algn="ctr">
-              <a:buNone/>
-            </a:pPr>
-            <a:r>
-              <a:rPr lang="zh-CN" sz="1100">
-                <a:solidFill>
-                  <a:srgbClr val="1F2937"/>
-                </a:solidFill>
-                <a:latin typeface="Arial" panose="020B0604020202020204"/>
-                <a:ea typeface="微软雅黑" panose="020B0503020204020204" charset="-122"/>
-              </a:rPr>
-              <a:t>F22 ← F22 - F21F12</a:t>
-            </a:r>
-            <a:endParaRPr lang="zh-CN"/>
-          </a:p>
-        </p:txBody>
-      </p:sp>
-      <p:sp>
-        <p:nvSpPr>
-          <p:cNvPr id="11" name="Rectangle 9"/>
-          <p:cNvSpPr/>
-          <p:nvPr/>
-        </p:nvSpPr>
-        <p:spPr>
-          <a:xfrm>
-            <a:off x="9372600" y="2121408"/>
-            <a:ext cx="1691640" cy="1243584"/>
-          </a:xfrm>
-          <a:prstGeom prst="rect">
-            <a:avLst/>
-          </a:prstGeom>
-          <a:solidFill>
-            <a:srgbClr val="F8FBFF"/>
-          </a:solidFill>
-          <a:ln w="12700">
-            <a:solidFill>
-              <a:srgbClr val="2E5E8C"/>
-            </a:solidFill>
-          </a:ln>
-        </p:spPr>
-        <p:txBody>
-          <a:bodyPr wrap="square" anchor="ctr">
-            <a:spAutoFit/>
-          </a:bodyPr>
-          <a:lstStyle/>
-          <a:p>
-            <a:pPr algn="ctr">
-              <a:buNone/>
-            </a:pPr>
-            <a:r>
-              <a:rPr lang="zh-CN" sz="1700" b="1">
-                <a:solidFill>
-                  <a:srgbClr val="1F2937"/>
-                </a:solidFill>
-                <a:latin typeface="Arial" panose="020B0604020202020204"/>
-                <a:ea typeface="微软雅黑" panose="020B0503020204020204" charset="-122"/>
-              </a:rPr>
-              <a:t>Output</a:t>
-            </a:r>
-            <a:endParaRPr lang="zh-CN"/>
-          </a:p>
-        </p:txBody>
-      </p:sp>
-      <p:sp>
-        <p:nvSpPr>
-          <p:cNvPr id="12" name="Rectangle 10"/>
-          <p:cNvSpPr/>
-          <p:nvPr/>
-        </p:nvSpPr>
-        <p:spPr>
-          <a:xfrm>
-            <a:off x="9482328" y="2560320"/>
-            <a:ext cx="1472184" cy="320040"/>
-          </a:xfrm>
-          <a:prstGeom prst="rect">
-            <a:avLst/>
-          </a:prstGeom>
-          <a:solidFill>
-            <a:srgbClr val="E7F1FB"/>
-          </a:solidFill>
-          <a:ln w="12700">
-            <a:solidFill>
-              <a:srgbClr val="A7B3C0"/>
-            </a:solidFill>
-          </a:ln>
-        </p:spPr>
-        <p:txBody>
-          <a:bodyPr wrap="square" anchor="ctr">
-            <a:spAutoFit/>
-          </a:bodyPr>
-          <a:lstStyle/>
-          <a:p>
-            <a:pPr algn="ctr">
-              <a:buNone/>
-            </a:pPr>
-            <a:r>
-              <a:rPr lang="zh-CN" sz="800">
-                <a:solidFill>
-                  <a:srgbClr val="1F2937"/>
-                </a:solidFill>
-                <a:latin typeface="Arial" panose="020B0604020202020204"/>
-                <a:ea typeface="微软雅黑" panose="020B0503020204020204" charset="-122"/>
-              </a:rPr>
-              <a:t>factor writeback: L/U</a:t>
-            </a:r>
-            <a:endParaRPr lang="zh-CN"/>
-          </a:p>
-        </p:txBody>
-      </p:sp>
-      <p:sp>
-        <p:nvSpPr>
-          <p:cNvPr id="13" name="Rectangle 11"/>
-          <p:cNvSpPr/>
-          <p:nvPr/>
-        </p:nvSpPr>
-        <p:spPr>
-          <a:xfrm>
-            <a:off x="9482328" y="2926080"/>
-            <a:ext cx="1472184" cy="320040"/>
-          </a:xfrm>
-          <a:prstGeom prst="rect">
-            <a:avLst/>
-          </a:prstGeom>
-          <a:solidFill>
-            <a:srgbClr val="F1F4F7"/>
-          </a:solidFill>
-          <a:ln w="12700">
-            <a:solidFill>
-              <a:srgbClr val="A7B3C0"/>
-            </a:solidFill>
-          </a:ln>
-        </p:spPr>
-        <p:txBody>
-          <a:bodyPr wrap="square" anchor="ctr">
-            <a:spAutoFit/>
-          </a:bodyPr>
-          <a:lstStyle/>
-          <a:p>
-            <a:pPr algn="ctr">
-              <a:buNone/>
-            </a:pPr>
-            <a:r>
-              <a:rPr lang="zh-CN" sz="800">
-                <a:solidFill>
-                  <a:srgbClr val="1F2937"/>
-                </a:solidFill>
-                <a:latin typeface="Arial" panose="020B0604020202020204"/>
-                <a:ea typeface="微软雅黑" panose="020B0503020204020204" charset="-122"/>
-              </a:rPr>
-              <a:t>update writeback</a:t>
-            </a:r>
-            <a:endParaRPr lang="zh-CN"/>
-          </a:p>
-          <a:p>
-            <a:pPr algn="ctr">
-              <a:buNone/>
-            </a:pPr>
-            <a:r>
-              <a:rPr lang="zh-CN" sz="800">
-                <a:solidFill>
-                  <a:srgbClr val="1F2937"/>
-                </a:solidFill>
-                <a:latin typeface="Arial" panose="020B0604020202020204"/>
-                <a:ea typeface="微软雅黑" panose="020B0503020204020204" charset="-122"/>
-              </a:rPr>
-              <a:t>to parent</a:t>
-            </a:r>
-            <a:endParaRPr lang="zh-CN"/>
-          </a:p>
-        </p:txBody>
-      </p:sp>
-      <p:cxnSp>
-        <p:nvCxnSpPr>
-          <p:cNvPr id="14" name="Connector 12"/>
-          <p:cNvCxnSpPr/>
-          <p:nvPr/>
-        </p:nvCxnSpPr>
-        <p:spPr>
-          <a:xfrm>
-            <a:off x="2286000" y="2743200"/>
-            <a:ext cx="384048" cy="1"/>
-          </a:xfrm>
-          <a:prstGeom prst="line">
-            <a:avLst/>
-          </a:prstGeom>
-          <a:ln w="25400">
-            <a:solidFill>
-              <a:srgbClr val="111827"/>
-            </a:solidFill>
-            <a:tailEnd type="triangle"/>
-          </a:ln>
-        </p:spPr>
-      </p:cxnSp>
-      <p:cxnSp>
-        <p:nvCxnSpPr>
-          <p:cNvPr id="15" name="Connector 13"/>
-          <p:cNvCxnSpPr/>
-          <p:nvPr/>
-        </p:nvCxnSpPr>
-        <p:spPr>
-          <a:xfrm>
-            <a:off x="4480560" y="2743200"/>
-            <a:ext cx="384048" cy="1"/>
-          </a:xfrm>
-          <a:prstGeom prst="line">
-            <a:avLst/>
-          </a:prstGeom>
-          <a:ln w="25400">
-            <a:solidFill>
-              <a:srgbClr val="111827"/>
-            </a:solidFill>
-            <a:tailEnd type="triangle"/>
-          </a:ln>
-        </p:spPr>
-      </p:cxnSp>
-      <p:cxnSp>
-        <p:nvCxnSpPr>
-          <p:cNvPr id="16" name="Connector 14"/>
-          <p:cNvCxnSpPr/>
-          <p:nvPr/>
-        </p:nvCxnSpPr>
-        <p:spPr>
-          <a:xfrm>
-            <a:off x="6675120" y="2743200"/>
-            <a:ext cx="384048" cy="1"/>
-          </a:xfrm>
-          <a:prstGeom prst="line">
-            <a:avLst/>
-          </a:prstGeom>
-          <a:ln w="25400">
-            <a:solidFill>
-              <a:srgbClr val="111827"/>
-            </a:solidFill>
-            <a:tailEnd type="triangle"/>
-          </a:ln>
-        </p:spPr>
-      </p:cxnSp>
-      <p:cxnSp>
-        <p:nvCxnSpPr>
-          <p:cNvPr id="17" name="Connector 15"/>
-          <p:cNvCxnSpPr/>
-          <p:nvPr/>
-        </p:nvCxnSpPr>
-        <p:spPr>
-          <a:xfrm>
-            <a:off x="8869680" y="2743200"/>
-            <a:ext cx="384048" cy="1"/>
-          </a:xfrm>
-          <a:prstGeom prst="line">
-            <a:avLst/>
-          </a:prstGeom>
-          <a:ln w="25400">
-            <a:solidFill>
-              <a:srgbClr val="111827"/>
-            </a:solidFill>
-            <a:tailEnd type="triangle"/>
-          </a:ln>
-        </p:spPr>
-      </p:cxnSp>
-      <p:sp>
-        <p:nvSpPr>
-          <p:cNvPr id="18" name="Rectangle 16"/>
-          <p:cNvSpPr/>
-          <p:nvPr/>
-        </p:nvSpPr>
-        <p:spPr>
-          <a:xfrm>
-            <a:off x="822960" y="3977640"/>
-            <a:ext cx="2103120" cy="438912"/>
-          </a:xfrm>
-          <a:prstGeom prst="rect">
-            <a:avLst/>
-          </a:prstGeom>
-          <a:solidFill>
-            <a:srgbClr val="FFFFFF"/>
-          </a:solidFill>
-          <a:ln w="12700">
-            <a:solidFill>
-              <a:srgbClr val="C2CEDA"/>
-            </a:solidFill>
-          </a:ln>
-        </p:spPr>
-        <p:txBody>
-          <a:bodyPr wrap="square" anchor="ctr">
-            <a:spAutoFit/>
-          </a:bodyPr>
-          <a:lstStyle/>
-          <a:p>
-            <a:pPr algn="ctr">
-              <a:buNone/>
-            </a:pPr>
-            <a:r>
-              <a:rPr lang="zh-CN" sz="1000">
-                <a:solidFill>
-                  <a:srgbClr val="1F2937"/>
-                </a:solidFill>
-                <a:latin typeface="Arial" panose="020B0604020202020204"/>
-                <a:ea typeface="微软雅黑" panose="020B0503020204020204" charset="-122"/>
-              </a:rPr>
-              <a:t>装配完成后确定 node-scale</a:t>
-            </a:r>
-            <a:endParaRPr lang="zh-CN"/>
-          </a:p>
-        </p:txBody>
-      </p:sp>
-      <p:cxnSp>
-        <p:nvCxnSpPr>
-          <p:cNvPr id="19" name="Connector 17"/>
-          <p:cNvCxnSpPr/>
-          <p:nvPr/>
-        </p:nvCxnSpPr>
-        <p:spPr>
-          <a:xfrm flipH="1" flipV="1">
-            <a:off x="1508760" y="3419856"/>
-            <a:ext cx="274320" cy="548640"/>
-          </a:xfrm>
-          <a:prstGeom prst="line">
-            <a:avLst/>
-          </a:prstGeom>
-          <a:ln w="12700">
-            <a:solidFill>
-              <a:srgbClr val="4B5563"/>
-            </a:solidFill>
-            <a:tailEnd type="triangle"/>
-          </a:ln>
-        </p:spPr>
-      </p:cxnSp>
-      <p:sp>
-        <p:nvSpPr>
-          <p:cNvPr id="20" name="Rectangle 18"/>
-          <p:cNvSpPr/>
-          <p:nvPr/>
-        </p:nvSpPr>
-        <p:spPr>
-          <a:xfrm>
-            <a:off x="7269480" y="3977640"/>
-            <a:ext cx="2084832" cy="438912"/>
-          </a:xfrm>
-          <a:prstGeom prst="rect">
-            <a:avLst/>
-          </a:prstGeom>
-          <a:solidFill>
-            <a:srgbClr val="FFFFFF"/>
-          </a:solidFill>
-          <a:ln w="12700">
-            <a:solidFill>
-              <a:srgbClr val="C2CEDA"/>
-            </a:solidFill>
-          </a:ln>
-        </p:spPr>
-        <p:txBody>
-          <a:bodyPr wrap="square" anchor="ctr">
-            <a:spAutoFit/>
-          </a:bodyPr>
-          <a:lstStyle/>
-          <a:p>
-            <a:pPr algn="ctr">
-              <a:buNone/>
-            </a:pPr>
-            <a:r>
-              <a:rPr lang="zh-CN" sz="1000">
-                <a:solidFill>
-                  <a:srgbClr val="1F2937"/>
-                </a:solidFill>
-                <a:latin typeface="Arial" panose="020B0604020202020204"/>
-                <a:ea typeface="微软雅黑" panose="020B0503020204020204" charset="-122"/>
-              </a:rPr>
-              <a:t>高吞吐矩阵乘更新</a:t>
-            </a:r>
-            <a:endParaRPr lang="zh-CN"/>
-          </a:p>
-        </p:txBody>
-      </p:sp>
-      <p:cxnSp>
-        <p:nvCxnSpPr>
-          <p:cNvPr id="21" name="Connector 19"/>
-          <p:cNvCxnSpPr/>
-          <p:nvPr/>
-        </p:nvCxnSpPr>
-        <p:spPr>
-          <a:xfrm flipH="1" flipV="1">
-            <a:off x="8028432" y="3429000"/>
-            <a:ext cx="228600" cy="539496"/>
-          </a:xfrm>
-          <a:prstGeom prst="line">
-            <a:avLst/>
-          </a:prstGeom>
-          <a:ln w="12700">
-            <a:solidFill>
-              <a:srgbClr val="4B5563"/>
-            </a:solidFill>
-            <a:tailEnd type="triangle"/>
-          </a:ln>
-        </p:spPr>
-      </p:cxnSp>
-      <p:sp>
-        <p:nvSpPr>
-          <p:cNvPr id="22" name="TextBox 20"/>
-          <p:cNvSpPr txBox="1"/>
-          <p:nvPr/>
-        </p:nvSpPr>
-        <p:spPr>
-          <a:xfrm>
-            <a:off x="685800" y="5230368"/>
-            <a:ext cx="10789920" cy="411480"/>
-          </a:xfrm>
-          <a:prstGeom prst="rect">
-            <a:avLst/>
-          </a:prstGeom>
-          <a:noFill/>
-          <a:ln>
-            <a:noFill/>
-          </a:ln>
-        </p:spPr>
-        <p:txBody>
-          <a:bodyPr wrap="square" anchor="ctr">
-            <a:spAutoFit/>
-          </a:bodyPr>
-          <a:lstStyle/>
-          <a:p>
-            <a:pPr algn="ctr">
-              <a:buNone/>
-            </a:pPr>
-            <a:r>
-              <a:rPr lang="zh-CN" sz="1300">
-                <a:solidFill>
-                  <a:srgbClr val="4B5563"/>
-                </a:solidFill>
-                <a:latin typeface="Arial" panose="020B0604020202020204"/>
-                <a:ea typeface="微软雅黑" panose="020B0503020204020204" charset="-122"/>
-              </a:rPr>
-              <a:t>每个 front 在本节点完成装配、块分解、TRSM 与 Schur 更新；因子写回本节点，贡献块继续上传父节点。</a:t>
-            </a:r>
-            <a:endParaRPr lang="zh-CN"/>
-          </a:p>
-        </p:txBody>
-      </p:sp>
-    </p:spTree>
-    <p:custDataLst>
-      <p:tags r:id="rId1"/>
     </p:custDataLst>
   </p:cSld>
   <p:clrMapOvr>
@@ -18379,16 +19121,15 @@
 
 <file path=ppt/tags/tag84.xml><?xml version="1.0" encoding="utf-8"?>
 <p:tagLst xmlns:p="http://schemas.openxmlformats.org/presentationml/2006/main">
-  <p:tag name="KSO_DOCER_RESOURCE_TRACE_INFO" val="{&quot;id&quot;:&quot;50059176&quot;,&quot;origin&quot;:0,&quot;type&quot;:&quot;icons&quot;,&quot;user&quot;:&quot;1040096332&quot;}"/>
+  <p:tag name="TABLE_ENDDRAG_ORIGIN_RECT" val="671*259"/>
+  <p:tag name="TABLE_ENDDRAG_RECT" val="144*85*671*259"/>
 </p:tagLst>
 </file>
 
 <file path=ppt/tags/tag85.xml><?xml version="1.0" encoding="utf-8"?>
 <p:tagLst xmlns:p="http://schemas.openxmlformats.org/presentationml/2006/main">
-  <p:tag name="KSO_WM_BEAUTIFY_FLAG" val="#wm#"/>
-  <p:tag name="KSO_WM_TEMPLATE_CATEGORY" val="custom"/>
-  <p:tag name="KSO_WM_TEMPLATE_INDEX" val="20205081"/>
-  <p:tag name="resource_record_key" val="{&quot;10&quot;:[50062469,50062354,50059176],&quot;65&quot;:[20205081]}"/>
+  <p:tag name="TABLE_ENDDRAG_ORIGIN_RECT" val="671*259"/>
+  <p:tag name="TABLE_ENDDRAG_RECT" val="144*85*671*259"/>
 </p:tagLst>
 </file>
 
@@ -18402,15 +19143,24 @@
 
 <file path=ppt/tags/tag87.xml><?xml version="1.0" encoding="utf-8"?>
 <p:tagLst xmlns:p="http://schemas.openxmlformats.org/presentationml/2006/main">
-  <p:tag name="KSO_WM_BEAUTIFY_FLAG" val="#wm#"/>
-  <p:tag name="KSO_WM_TEMPLATE_CATEGORY" val="custom"/>
-  <p:tag name="KSO_WM_TEMPLATE_INDEX" val="20205081"/>
+  <p:tag name="KSO_DOCER_RESOURCE_TRACE_INFO" val="{&quot;id&quot;:&quot;50059176&quot;,&quot;origin&quot;:0,&quot;type&quot;:&quot;icons&quot;,&quot;user&quot;:&quot;1040096332&quot;}"/>
 </p:tagLst>
 </file>
 
 <file path=ppt/tags/tag88.xml><?xml version="1.0" encoding="utf-8"?>
 <p:tagLst xmlns:p="http://schemas.openxmlformats.org/presentationml/2006/main">
-  <p:tag name="resource_record_key" val="{&quot;10&quot;:[50059496,50059429,50062469,50062354,50059176],&quot;65&quot;:[20205081]}"/>
+  <p:tag name="KSO_WM_BEAUTIFY_FLAG" val="#wm#"/>
+  <p:tag name="KSO_WM_TEMPLATE_CATEGORY" val="custom"/>
+  <p:tag name="KSO_WM_TEMPLATE_INDEX" val="20205081"/>
+  <p:tag name="resource_record_key" val="{&quot;10&quot;:[50062469,50062354,50059176],&quot;65&quot;:[20205081]}"/>
+</p:tagLst>
+</file>
+
+<file path=ppt/tags/tag89.xml><?xml version="1.0" encoding="utf-8"?>
+<p:tagLst xmlns:p="http://schemas.openxmlformats.org/presentationml/2006/main">
+  <p:tag name="KSO_WM_BEAUTIFY_FLAG" val="#wm#"/>
+  <p:tag name="KSO_WM_TEMPLATE_CATEGORY" val="custom"/>
+  <p:tag name="KSO_WM_TEMPLATE_INDEX" val="20205081"/>
 </p:tagLst>
 </file>
 
@@ -18424,6 +19174,20 @@
   <p:tag name="KSO_WM_UNIT_LAYERLEVEL" val="1"/>
   <p:tag name="KSO_WM_TAG_VERSION" val="1.0"/>
   <p:tag name="KSO_WM_BEAUTIFY_FLAG" val="#wm#"/>
+</p:tagLst>
+</file>
+
+<file path=ppt/tags/tag90.xml><?xml version="1.0" encoding="utf-8"?>
+<p:tagLst xmlns:p="http://schemas.openxmlformats.org/presentationml/2006/main">
+  <p:tag name="KSO_WM_BEAUTIFY_FLAG" val="#wm#"/>
+  <p:tag name="KSO_WM_TEMPLATE_CATEGORY" val="custom"/>
+  <p:tag name="KSO_WM_TEMPLATE_INDEX" val="20205081"/>
+</p:tagLst>
+</file>
+
+<file path=ppt/tags/tag91.xml><?xml version="1.0" encoding="utf-8"?>
+<p:tagLst xmlns:p="http://schemas.openxmlformats.org/presentationml/2006/main">
+  <p:tag name="resource_record_key" val="{&quot;10&quot;:[50059496,50059429,50062469,50062354,50059176],&quot;65&quot;:[20205081]}"/>
 </p:tagLst>
 </file>
 

--- a/graduation-project/绘图.pptx
+++ b/graduation-project/绘图.pptx
@@ -119,12 +119,12 @@
   <p:extLst>
     <p:ext uri="{EFAFB233-063F-42B5-8137-9DF3F51BA10A}">
       <p15:sldGuideLst xmlns:p15="http://schemas.microsoft.com/office/powerpoint/2012/main">
-        <p15:guide id="1" orient="horz" pos="2177" userDrawn="1">
+        <p15:guide id="1" orient="horz" pos="2160" userDrawn="1">
           <p15:clr>
             <a:srgbClr val="A4A3A4"/>
           </p15:clr>
         </p15:guide>
-        <p15:guide id="2" pos="3838" userDrawn="1">
+        <p15:guide id="2" pos="3836" userDrawn="1">
           <p15:clr>
             <a:srgbClr val="A4A3A4"/>
           </p15:clr>
@@ -10974,7 +10974,7 @@
                               <a:latin typeface="Times New Roman" panose="02020603050405020304" charset="0"/>
                               <a:cs typeface="Times New Roman" panose="02020603050405020304" charset="0"/>
                             </a:rPr>
-                            <a:t>Output: a permutation vector p</a:t>
+                            <a:t>Output: a permutation vector perm</a:t>
                           </a:r>
                           <a:endParaRPr lang="en-US" altLang="zh-CN" sz="1400" b="0">
                             <a:latin typeface="Times New Roman" panose="02020603050405020304" charset="0"/>
@@ -10993,7 +10993,7 @@
                               <a:latin typeface="Times New Roman" panose="02020603050405020304" charset="0"/>
                               <a:cs typeface="Times New Roman" panose="02020603050405020304" charset="0"/>
                             </a:rPr>
-                            <a:t>1:  </a:t>
+                            <a:t>1:</a:t>
                           </a:r>
                           <a14:m>
                             <m:oMath xmlns:m="http://schemas.openxmlformats.org/officeDocument/2006/math">
@@ -11136,6 +11136,51 @@
                               </m:r>
                             </m:oMath>
                           </a14:m>
+                          <a:r>
+                            <a:rPr lang="en-US" altLang="zh-CN" sz="1400" b="0">
+                              <a:latin typeface="Times New Roman" panose="02020603050405020304" charset="0"/>
+                              <a:cs typeface="Times New Roman" panose="02020603050405020304" charset="0"/>
+                            </a:rPr>
+                            <a:t>;</a:t>
+                          </a:r>
+                          <a14:m>
+                            <m:oMath xmlns:m="http://schemas.openxmlformats.org/officeDocument/2006/math">
+                              <m:bar>
+                                <m:barPr>
+                                  <m:pos m:val="top"/>
+                                  <m:ctrlPr>
+                                    <a:rPr lang="en-US" altLang="zh-CN" sz="1400" b="0" i="1">
+                                      <a:latin typeface="Cambria Math" panose="02040503050406030204" charset="0"/>
+                                      <a:cs typeface="Cambria Math" panose="02040503050406030204" charset="0"/>
+                                    </a:rPr>
+                                  </m:ctrlPr>
+                                </m:barPr>
+                                <m:e>
+                                  <m:r>
+                                    <a:rPr lang="en-US" altLang="zh-CN" sz="1400" b="0" i="1">
+                                      <a:latin typeface="Cambria Math" panose="02040503050406030204" charset="0"/>
+                                      <a:cs typeface="Cambria Math" panose="02040503050406030204" charset="0"/>
+                                    </a:rPr>
+                                    <m:t>𝑉</m:t>
+                                  </m:r>
+                                </m:e>
+                              </m:bar>
+                              <m:r>
+                                <a:rPr lang="en-US" altLang="zh-CN" sz="1400" b="0" i="1">
+                                  <a:latin typeface="Cambria Math" panose="02040503050406030204" charset="0"/>
+                                  <a:cs typeface="Cambria Math" panose="02040503050406030204" charset="0"/>
+                                </a:rPr>
+                                <m:t>=</m:t>
+                              </m:r>
+                              <m:r>
+                                <a:rPr lang="en-US" altLang="zh-CN" sz="1400" i="1">
+                                  <a:latin typeface="Cambria Math" panose="02040503050406030204" charset="0"/>
+                                  <a:cs typeface="Cambria Math" panose="02040503050406030204" charset="0"/>
+                                </a:rPr>
+                                <m:t>∅</m:t>
+                              </m:r>
+                            </m:oMath>
+                          </a14:m>
                           <a:endParaRPr lang="en-US" altLang="zh-CN" sz="1400" b="0">
                             <a:latin typeface="Times New Roman" panose="02020603050405020304" charset="0"/>
                             <a:cs typeface="Times New Roman" panose="02020603050405020304" charset="0"/>
@@ -11153,7 +11198,7 @@
                               <a:latin typeface="Times New Roman" panose="02020603050405020304" charset="0"/>
                               <a:cs typeface="Times New Roman" panose="02020603050405020304" charset="0"/>
                             </a:rPr>
-                            <a:t>2: </a:t>
+                            <a:t>2:</a:t>
                           </a:r>
                           <a:r>
                             <a:rPr lang="en-US" altLang="zh-CN" sz="1400" b="1">
@@ -11200,8 +11245,201 @@
                               <a:latin typeface="Times New Roman" panose="02020603050405020304" charset="0"/>
                               <a:cs typeface="Times New Roman" panose="02020603050405020304" charset="0"/>
                             </a:rPr>
-                            <a:t>3: Adj[i] </a:t>
-                          </a:r>
+                            <a:t>3:</a:t>
+                          </a:r>
+                          <a14:m>
+                            <m:oMath xmlns:m="http://schemas.openxmlformats.org/officeDocument/2006/math">
+                              <m:r>
+                                <a:rPr lang="en-US" altLang="zh-CN" sz="1400" b="0" i="1">
+                                  <a:latin typeface="Cambria Math" panose="02040503050406030204" charset="0"/>
+                                  <a:cs typeface="Cambria Math" panose="02040503050406030204" charset="0"/>
+                                </a:rPr>
+                                <m:t>    </m:t>
+                              </m:r>
+                              <m:sSub>
+                                <m:sSubPr>
+                                  <m:ctrlPr>
+                                    <a:rPr lang="en-US" altLang="zh-CN" sz="1400" b="0" i="1">
+                                      <a:latin typeface="Cambria Math" panose="02040503050406030204" charset="0"/>
+                                      <a:cs typeface="Cambria Math" panose="02040503050406030204" charset="0"/>
+                                    </a:rPr>
+                                  </m:ctrlPr>
+                                </m:sSubPr>
+                                <m:e>
+                                  <m:r>
+                                    <a:rPr lang="en-US" altLang="zh-CN" sz="1400" b="0" i="1">
+                                      <a:latin typeface="Cambria Math" panose="02040503050406030204" charset="0"/>
+                                      <a:cs typeface="Cambria Math" panose="02040503050406030204" charset="0"/>
+                                    </a:rPr>
+                                    <m:t>𝐴</m:t>
+                                  </m:r>
+                                </m:e>
+                                <m:sub>
+                                  <m:r>
+                                    <a:rPr lang="en-US" altLang="zh-CN" sz="1400" b="0" i="1">
+                                      <a:latin typeface="Cambria Math" panose="02040503050406030204" charset="0"/>
+                                      <a:cs typeface="Cambria Math" panose="02040503050406030204" charset="0"/>
+                                    </a:rPr>
+                                    <m:t>𝑖</m:t>
+                                  </m:r>
+                                </m:sub>
+                              </m:sSub>
+                              <m:r>
+                                <a:rPr lang="en-US" altLang="zh-CN" sz="1400" i="1">
+                                  <a:latin typeface="Cambria Math" panose="02040503050406030204" charset="0"/>
+                                  <a:cs typeface="Cambria Math" panose="02040503050406030204" charset="0"/>
+                                </a:rPr>
+                                <m:t>←{</m:t>
+                              </m:r>
+                              <m:r>
+                                <a:rPr lang="en-US" altLang="zh-CN" sz="1400" i="1">
+                                  <a:latin typeface="Cambria Math" panose="02040503050406030204" charset="0"/>
+                                  <a:cs typeface="Cambria Math" panose="02040503050406030204" charset="0"/>
+                                </a:rPr>
+                                <m:t>𝑗</m:t>
+                              </m:r>
+                              <m:r>
+                                <a:rPr lang="en-US" altLang="zh-CN" sz="1400" i="1">
+                                  <a:latin typeface="Cambria Math" panose="02040503050406030204" charset="0"/>
+                                  <a:cs typeface="Cambria Math" panose="02040503050406030204" charset="0"/>
+                                </a:rPr>
+                                <m:t>|</m:t>
+                              </m:r>
+                              <m:r>
+                                <a:rPr lang="en-US" altLang="zh-CN" sz="1400" i="1">
+                                  <a:latin typeface="Cambria Math" panose="02040503050406030204" charset="0"/>
+                                  <a:cs typeface="Cambria Math" panose="02040503050406030204" charset="0"/>
+                                </a:rPr>
+                                <m:t>𝑆</m:t>
+                              </m:r>
+                              <m:r>
+                                <a:rPr lang="en-US" altLang="zh-CN" sz="1400" i="1">
+                                  <a:latin typeface="Cambria Math" panose="02040503050406030204" charset="0"/>
+                                  <a:cs typeface="Cambria Math" panose="02040503050406030204" charset="0"/>
+                                </a:rPr>
+                                <m:t>[</m:t>
+                              </m:r>
+                              <m:r>
+                                <a:rPr lang="en-US" altLang="zh-CN" sz="1400" i="1">
+                                  <a:latin typeface="Cambria Math" panose="02040503050406030204" charset="0"/>
+                                  <a:cs typeface="Cambria Math" panose="02040503050406030204" charset="0"/>
+                                </a:rPr>
+                                <m:t>𝑖</m:t>
+                              </m:r>
+                              <m:r>
+                                <a:rPr lang="en-US" altLang="zh-CN" sz="1400" i="1">
+                                  <a:latin typeface="Cambria Math" panose="02040503050406030204" charset="0"/>
+                                  <a:cs typeface="Cambria Math" panose="02040503050406030204" charset="0"/>
+                                </a:rPr>
+                                <m:t>,</m:t>
+                              </m:r>
+                              <m:r>
+                                <a:rPr lang="en-US" altLang="zh-CN" sz="1400" i="1">
+                                  <a:latin typeface="Cambria Math" panose="02040503050406030204" charset="0"/>
+                                  <a:cs typeface="Cambria Math" panose="02040503050406030204" charset="0"/>
+                                </a:rPr>
+                                <m:t>𝑗</m:t>
+                              </m:r>
+                              <m:r>
+                                <a:rPr lang="en-US" altLang="zh-CN" sz="1400" i="1">
+                                  <a:latin typeface="Cambria Math" panose="02040503050406030204" charset="0"/>
+                                  <a:cs typeface="Cambria Math" panose="02040503050406030204" charset="0"/>
+                                </a:rPr>
+                                <m:t>]≠</m:t>
+                              </m:r>
+                              <m:r>
+                                <a:rPr lang="en-US" altLang="zh-CN" sz="1400" i="1">
+                                  <a:latin typeface="Cambria Math" panose="02040503050406030204" charset="0"/>
+                                  <a:cs typeface="Cambria Math" panose="02040503050406030204" charset="0"/>
+                                </a:rPr>
+                                <m:t>0</m:t>
+                              </m:r>
+                              <m:r>
+                                <a:rPr lang="en-US" altLang="zh-CN" sz="1400" i="1">
+                                  <a:latin typeface="Cambria Math" panose="02040503050406030204" charset="0"/>
+                                  <a:cs typeface="Cambria Math" panose="02040503050406030204" charset="0"/>
+                                </a:rPr>
+                                <m:t> </m:t>
+                              </m:r>
+                              <m:r>
+                                <a:rPr lang="en-US" altLang="zh-CN" sz="1400" i="1">
+                                  <a:latin typeface="Cambria Math" panose="02040503050406030204" charset="0"/>
+                                  <a:cs typeface="Cambria Math" panose="02040503050406030204" charset="0"/>
+                                </a:rPr>
+                                <m:t>𝑎𝑛𝑑</m:t>
+                              </m:r>
+                              <m:r>
+                                <a:rPr lang="en-US" altLang="zh-CN" sz="1400" i="1">
+                                  <a:latin typeface="Cambria Math" panose="02040503050406030204" charset="0"/>
+                                  <a:cs typeface="Cambria Math" panose="02040503050406030204" charset="0"/>
+                                </a:rPr>
+                                <m:t> </m:t>
+                              </m:r>
+                              <m:r>
+                                <a:rPr lang="en-US" altLang="zh-CN" sz="1400" i="1">
+                                  <a:latin typeface="Cambria Math" panose="02040503050406030204" charset="0"/>
+                                  <a:cs typeface="Cambria Math" panose="02040503050406030204" charset="0"/>
+                                </a:rPr>
+                                <m:t>𝑖</m:t>
+                              </m:r>
+                              <m:r>
+                                <a:rPr lang="en-US" altLang="zh-CN" sz="1400" i="1">
+                                  <a:latin typeface="Cambria Math" panose="02040503050406030204" charset="0"/>
+                                  <a:cs typeface="Cambria Math" panose="02040503050406030204" charset="0"/>
+                                </a:rPr>
+                                <m:t>≠</m:t>
+                              </m:r>
+                              <m:r>
+                                <a:rPr lang="en-US" altLang="zh-CN" sz="1400" i="1">
+                                  <a:latin typeface="Cambria Math" panose="02040503050406030204" charset="0"/>
+                                  <a:cs typeface="Cambria Math" panose="02040503050406030204" charset="0"/>
+                                </a:rPr>
+                                <m:t>𝑗</m:t>
+                              </m:r>
+                              <m:r>
+                                <a:rPr lang="en-US" altLang="zh-CN" sz="1400" i="1">
+                                  <a:latin typeface="Cambria Math" panose="02040503050406030204" charset="0"/>
+                                  <a:cs typeface="Cambria Math" panose="02040503050406030204" charset="0"/>
+                                </a:rPr>
+                                <m:t>} </m:t>
+                              </m:r>
+                              <m:sSub>
+                                <m:sSubPr>
+                                  <m:ctrlPr>
+                                    <a:rPr lang="en-US" altLang="zh-CN" sz="1400" i="1">
+                                      <a:latin typeface="Cambria Math" panose="02040503050406030204" charset="0"/>
+                                      <a:cs typeface="Cambria Math" panose="02040503050406030204" charset="0"/>
+                                    </a:rPr>
+                                  </m:ctrlPr>
+                                </m:sSubPr>
+                                <m:e>
+                                  <m:r>
+                                    <a:rPr lang="en-US" altLang="zh-CN" sz="1400" i="1">
+                                      <a:latin typeface="Cambria Math" panose="02040503050406030204" charset="0"/>
+                                      <a:cs typeface="Cambria Math" panose="02040503050406030204" charset="0"/>
+                                    </a:rPr>
+                                    <m:t>𝜀</m:t>
+                                  </m:r>
+                                </m:e>
+                                <m:sub>
+                                  <m:r>
+                                    <a:rPr lang="en-US" altLang="zh-CN" sz="1400" i="1">
+                                      <a:latin typeface="Cambria Math" panose="02040503050406030204" charset="0"/>
+                                      <a:cs typeface="Cambria Math" panose="02040503050406030204" charset="0"/>
+                                    </a:rPr>
+                                    <m:t>𝑖</m:t>
+                                  </m:r>
+                                </m:sub>
+                              </m:sSub>
+                              <m:r>
+                                <a:rPr lang="en-US" altLang="zh-CN" sz="1400" i="1">
+                                  <a:latin typeface="Cambria Math" panose="02040503050406030204" charset="0"/>
+                                  <a:cs typeface="Cambria Math" panose="02040503050406030204" charset="0"/>
+                                </a:rPr>
+                                <m:t>←∅</m:t>
+                              </m:r>
+                            </m:oMath>
+                          </a14:m>
                           <a:endParaRPr lang="en-US" altLang="zh-CN" sz="1400" b="1">
                             <a:latin typeface="Times New Roman" panose="02020603050405020304" charset="0"/>
                             <a:cs typeface="Times New Roman" panose="02020603050405020304" charset="0"/>
@@ -11219,8 +11457,117 @@
                               <a:latin typeface="Times New Roman" panose="02020603050405020304" charset="0"/>
                               <a:cs typeface="Times New Roman" panose="02020603050405020304" charset="0"/>
                             </a:rPr>
-                            <a:t>4: </a:t>
-                          </a:r>
+                            <a:t>4:    </a:t>
+                          </a:r>
+                          <a14:m>
+                            <m:oMath xmlns:m="http://schemas.openxmlformats.org/officeDocument/2006/math">
+                              <m:r>
+                                <a:rPr lang="en-US" altLang="zh-CN" sz="1400" b="1" i="1">
+                                  <a:latin typeface="Cambria Math" panose="02040503050406030204" charset="0"/>
+                                  <a:cs typeface="Cambria Math" panose="02040503050406030204" charset="0"/>
+                                </a:rPr>
+                                <m:t>𝒊</m:t>
+                              </m:r>
+                              <m:r>
+                                <a:rPr lang="en-US" altLang="zh-CN" sz="1400" i="1">
+                                  <a:latin typeface="Cambria Math" panose="02040503050406030204" charset="0"/>
+                                  <a:cs typeface="Cambria Math" panose="02040503050406030204" charset="0"/>
+                                </a:rPr>
+                                <m:t>←{</m:t>
+                              </m:r>
+                              <m:r>
+                                <a:rPr lang="en-US" altLang="zh-CN" sz="1400" i="1">
+                                  <a:latin typeface="Cambria Math" panose="02040503050406030204" charset="0"/>
+                                  <a:cs typeface="Cambria Math" panose="02040503050406030204" charset="0"/>
+                                </a:rPr>
+                                <m:t>𝑖</m:t>
+                              </m:r>
+                              <m:r>
+                                <a:rPr lang="en-US" altLang="zh-CN" sz="1400" i="1">
+                                  <a:latin typeface="Cambria Math" panose="02040503050406030204" charset="0"/>
+                                  <a:cs typeface="Cambria Math" panose="02040503050406030204" charset="0"/>
+                                </a:rPr>
+                                <m:t>} </m:t>
+                              </m:r>
+                              <m:sSub>
+                                <m:sSubPr>
+                                  <m:ctrlPr>
+                                    <a:rPr lang="en-US" altLang="zh-CN" sz="1400" i="1">
+                                      <a:latin typeface="Cambria Math" panose="02040503050406030204" charset="0"/>
+                                      <a:cs typeface="Cambria Math" panose="02040503050406030204" charset="0"/>
+                                    </a:rPr>
+                                  </m:ctrlPr>
+                                </m:sSubPr>
+                                <m:e>
+                                  <m:r>
+                                    <a:rPr lang="en-US" altLang="zh-CN" sz="1400" i="1">
+                                      <a:latin typeface="Cambria Math" panose="02040503050406030204" charset="0"/>
+                                      <a:cs typeface="Cambria Math" panose="02040503050406030204" charset="0"/>
+                                    </a:rPr>
+                                    <m:t>𝑑</m:t>
+                                  </m:r>
+                                </m:e>
+                                <m:sub>
+                                  <m:r>
+                                    <a:rPr lang="en-US" altLang="zh-CN" sz="1400" i="1">
+                                      <a:latin typeface="Cambria Math" panose="02040503050406030204" charset="0"/>
+                                      <a:cs typeface="Cambria Math" panose="02040503050406030204" charset="0"/>
+                                    </a:rPr>
+                                    <m:t>𝑖</m:t>
+                                  </m:r>
+                                </m:sub>
+                              </m:sSub>
+                              <m:r>
+                                <a:rPr lang="en-US" altLang="zh-CN" sz="1400" i="1">
+                                  <a:latin typeface="Cambria Math" panose="02040503050406030204" charset="0"/>
+                                  <a:cs typeface="Cambria Math" panose="02040503050406030204" charset="0"/>
+                                </a:rPr>
+                                <m:t>←</m:t>
+                              </m:r>
+                              <m:d>
+                                <m:dPr>
+                                  <m:begChr m:val="|"/>
+                                  <m:endChr m:val="|"/>
+                                  <m:ctrlPr>
+                                    <a:rPr lang="en-US" altLang="zh-CN" sz="1400" i="1">
+                                      <a:latin typeface="Cambria Math" panose="02040503050406030204" charset="0"/>
+                                      <a:cs typeface="Cambria Math" panose="02040503050406030204" charset="0"/>
+                                    </a:rPr>
+                                  </m:ctrlPr>
+                                </m:dPr>
+                                <m:e>
+                                  <m:sSub>
+                                    <m:sSubPr>
+                                      <m:ctrlPr>
+                                        <a:rPr lang="en-US" altLang="zh-CN" sz="1400" i="1">
+                                          <a:latin typeface="Cambria Math" panose="02040503050406030204" charset="0"/>
+                                          <a:cs typeface="Cambria Math" panose="02040503050406030204" charset="0"/>
+                                        </a:rPr>
+                                      </m:ctrlPr>
+                                    </m:sSubPr>
+                                    <m:e>
+                                      <m:r>
+                                        <a:rPr lang="en-US" altLang="zh-CN" sz="1400" i="1">
+                                          <a:latin typeface="Cambria Math" panose="02040503050406030204" charset="0"/>
+                                          <a:cs typeface="Cambria Math" panose="02040503050406030204" charset="0"/>
+                                        </a:rPr>
+                                        <m:t>𝐴</m:t>
+                                      </m:r>
+                                    </m:e>
+                                    <m:sub>
+                                      <m:r>
+                                        <a:rPr lang="en-US" altLang="zh-CN" sz="1400" i="1">
+                                          <a:latin typeface="Cambria Math" panose="02040503050406030204" charset="0"/>
+                                          <a:cs typeface="Cambria Math" panose="02040503050406030204" charset="0"/>
+                                        </a:rPr>
+                                        <m:t>𝑖</m:t>
+                                      </m:r>
+                                    </m:sub>
+                                  </m:sSub>
+                                </m:e>
+                              </m:d>
+                            </m:oMath>
+                          </a14:m>
                           <a:endParaRPr lang="en-US" altLang="zh-CN" sz="1400" i="1">
                             <a:latin typeface="Cambria Math" panose="02040503050406030204" charset="0"/>
                             <a:cs typeface="Cambria Math" panose="02040503050406030204" charset="0"/>
@@ -11238,7 +11585,21 @@
                               <a:latin typeface="Times New Roman" panose="02020603050405020304" charset="0"/>
                               <a:cs typeface="Times New Roman" panose="02020603050405020304" charset="0"/>
                             </a:rPr>
-                            <a:t>5: </a:t>
+                            <a:t>5:</a:t>
+                          </a:r>
+                          <a:r>
+                            <a:rPr lang="en-US" altLang="zh-CN" sz="1400" b="1">
+                              <a:latin typeface="Times New Roman" panose="02020603050405020304" charset="0"/>
+                              <a:cs typeface="Times New Roman" panose="02020603050405020304" charset="0"/>
+                            </a:rPr>
+                            <a:t>end for</a:t>
+                          </a:r>
+                          <a:r>
+                            <a:rPr lang="en-US" altLang="zh-CN" sz="1400" b="0">
+                              <a:latin typeface="Times New Roman" panose="02020603050405020304" charset="0"/>
+                              <a:cs typeface="Times New Roman" panose="02020603050405020304" charset="0"/>
+                            </a:rPr>
+                            <a:t>   </a:t>
                           </a:r>
                           <a:endParaRPr lang="en-US" altLang="zh-CN" sz="1400" b="1">
                             <a:latin typeface="Times New Roman" panose="02020603050405020304" charset="0"/>
@@ -11257,8 +11618,47 @@
                               <a:latin typeface="Times New Roman" panose="02020603050405020304" charset="0"/>
                               <a:cs typeface="Times New Roman" panose="02020603050405020304" charset="0"/>
                             </a:rPr>
-                            <a:t>6: </a:t>
-                          </a:r>
+                            <a:t>6:</a:t>
+                          </a:r>
+                          <a14:m>
+                            <m:oMath xmlns:m="http://schemas.openxmlformats.org/officeDocument/2006/math">
+                              <m:r>
+                                <a:rPr lang="en-US" altLang="zh-CN" sz="1400" b="0" i="1">
+                                  <a:latin typeface="Cambria Math" panose="02040503050406030204" charset="0"/>
+                                  <a:cs typeface="Cambria Math" panose="02040503050406030204" charset="0"/>
+                                </a:rPr>
+                                <m:t>𝑝𝑒𝑟𝑚</m:t>
+                              </m:r>
+                              <m:r>
+                                <a:rPr lang="en-US" altLang="zh-CN" sz="1400" i="1">
+                                  <a:latin typeface="Cambria Math" panose="02040503050406030204" charset="0"/>
+                                  <a:cs typeface="Cambria Math" panose="02040503050406030204" charset="0"/>
+                                </a:rPr>
+                                <m:t>←[] </m:t>
+                              </m:r>
+                              <m:r>
+                                <a:rPr lang="en-US" altLang="zh-CN" sz="1400" i="1">
+                                  <a:latin typeface="Cambria Math" panose="02040503050406030204" charset="0"/>
+                                  <a:cs typeface="Cambria Math" panose="02040503050406030204" charset="0"/>
+                                </a:rPr>
+                                <m:t>𝑘</m:t>
+                              </m:r>
+                              <m:r>
+                                <a:rPr lang="en-US" altLang="zh-CN" sz="1400" i="1">
+                                  <a:latin typeface="Cambria Math" panose="02040503050406030204" charset="0"/>
+                                  <a:cs typeface="Cambria Math" panose="02040503050406030204" charset="0"/>
+                                </a:rPr>
+                                <m:t>=</m:t>
+                              </m:r>
+                              <m:r>
+                                <a:rPr lang="en-US" altLang="zh-CN" sz="1400" i="1">
+                                  <a:latin typeface="Cambria Math" panose="02040503050406030204" charset="0"/>
+                                  <a:cs typeface="Cambria Math" panose="02040503050406030204" charset="0"/>
+                                </a:rPr>
+                                <m:t>1</m:t>
+                              </m:r>
+                            </m:oMath>
+                          </a14:m>
                           <a:endParaRPr lang="en-US" altLang="zh-CN" sz="1400" b="0">
                             <a:latin typeface="Times New Roman" panose="02020603050405020304" charset="0"/>
                             <a:cs typeface="Times New Roman" panose="02020603050405020304" charset="0"/>
@@ -11276,7 +11676,60 @@
                               <a:latin typeface="Times New Roman" panose="02020603050405020304" charset="0"/>
                               <a:cs typeface="Times New Roman" panose="02020603050405020304" charset="0"/>
                             </a:rPr>
-                            <a:t>7: </a:t>
+                            <a:t>7:</a:t>
+                          </a:r>
+                          <a:r>
+                            <a:rPr lang="en-US" altLang="zh-CN" sz="1400" b="1">
+                              <a:latin typeface="Times New Roman" panose="02020603050405020304" charset="0"/>
+                              <a:cs typeface="Times New Roman" panose="02020603050405020304" charset="0"/>
+                            </a:rPr>
+                            <a:t>while</a:t>
+                          </a:r>
+                          <a:r>
+                            <a:rPr lang="en-US" altLang="zh-CN" sz="1400" b="0">
+                              <a:latin typeface="Times New Roman" panose="02020603050405020304" charset="0"/>
+                              <a:cs typeface="Times New Roman" panose="02020603050405020304" charset="0"/>
+                            </a:rPr>
+                            <a:t> </a:t>
+                          </a:r>
+                          <a14:m>
+                            <m:oMath xmlns:m="http://schemas.openxmlformats.org/officeDocument/2006/math">
+                              <m:r>
+                                <a:rPr lang="en-US" altLang="zh-CN" sz="1400" b="0" i="1">
+                                  <a:latin typeface="Cambria Math" panose="02040503050406030204" charset="0"/>
+                                  <a:cs typeface="Cambria Math" panose="02040503050406030204" charset="0"/>
+                                </a:rPr>
+                                <m:t>𝑘</m:t>
+                              </m:r>
+                              <m:r>
+                                <a:rPr lang="en-US" altLang="zh-CN" sz="1400" i="1">
+                                  <a:latin typeface="Cambria Math" panose="02040503050406030204" charset="0"/>
+                                  <a:cs typeface="Cambria Math" panose="02040503050406030204" charset="0"/>
+                                </a:rPr>
+                                <m:t>≤</m:t>
+                              </m:r>
+                              <m:r>
+                                <a:rPr lang="en-US" altLang="zh-CN" sz="1400" i="1">
+                                  <a:latin typeface="Cambria Math" panose="02040503050406030204" charset="0"/>
+                                  <a:cs typeface="Cambria Math" panose="02040503050406030204" charset="0"/>
+                                </a:rPr>
+                                <m:t>𝑛</m:t>
+                              </m:r>
+                            </m:oMath>
+                          </a14:m>
+                          <a:r>
+                            <a:rPr lang="en-US" altLang="zh-CN" sz="1400" b="0">
+                              <a:latin typeface="Times New Roman" panose="02020603050405020304" charset="0"/>
+                              <a:cs typeface="Times New Roman" panose="02020603050405020304" charset="0"/>
+                            </a:rPr>
+                            <a:t> </a:t>
+                          </a:r>
+                          <a:r>
+                            <a:rPr lang="en-US" altLang="zh-CN" sz="1400" b="1">
+                              <a:latin typeface="Times New Roman" panose="02020603050405020304" charset="0"/>
+                              <a:cs typeface="Times New Roman" panose="02020603050405020304" charset="0"/>
+                            </a:rPr>
+                            <a:t>do</a:t>
                           </a:r>
                           <a:endParaRPr lang="en-US" altLang="zh-CN" sz="1400" b="0">
                             <a:latin typeface="Times New Roman" panose="02020603050405020304" charset="0"/>
@@ -11295,8 +11748,40 @@
                               <a:latin typeface="Times New Roman" panose="02020603050405020304" charset="0"/>
                               <a:cs typeface="Times New Roman" panose="02020603050405020304" charset="0"/>
                             </a:rPr>
-                            <a:t>8: </a:t>
-                          </a:r>
+                            <a:t>8:    select variable p in V with minimize </a:t>
+                          </a:r>
+                          <a14:m>
+                            <m:oMath xmlns:m="http://schemas.openxmlformats.org/officeDocument/2006/math">
+                              <m:sSub>
+                                <m:sSubPr>
+                                  <m:ctrlPr>
+                                    <a:rPr lang="en-US" altLang="zh-CN" sz="1400" b="0" i="1">
+                                      <a:latin typeface="Cambria Math" panose="02040503050406030204" charset="0"/>
+                                      <a:cs typeface="Cambria Math" panose="02040503050406030204" charset="0"/>
+                                    </a:rPr>
+                                  </m:ctrlPr>
+                                </m:sSubPr>
+                                <m:e>
+                                  <m:r>
+                                    <a:rPr lang="en-US" altLang="zh-CN" sz="1400" b="0" i="1">
+                                      <a:latin typeface="Cambria Math" panose="02040503050406030204" charset="0"/>
+                                      <a:cs typeface="Cambria Math" panose="02040503050406030204" charset="0"/>
+                                    </a:rPr>
+                                    <m:t>𝑑</m:t>
+                                  </m:r>
+                                </m:e>
+                                <m:sub>
+                                  <m:r>
+                                    <a:rPr lang="en-US" altLang="zh-CN" sz="1400" b="0" i="1">
+                                      <a:latin typeface="Cambria Math" panose="02040503050406030204" charset="0"/>
+                                      <a:cs typeface="Cambria Math" panose="02040503050406030204" charset="0"/>
+                                    </a:rPr>
+                                    <m:t>𝑝</m:t>
+                                  </m:r>
+                                </m:sub>
+                              </m:sSub>
+                            </m:oMath>
+                          </a14:m>
                           <a:endParaRPr lang="en-US" altLang="zh-CN" sz="1400" b="0">
                             <a:latin typeface="Times New Roman" panose="02020603050405020304" charset="0"/>
                             <a:cs typeface="Times New Roman" panose="02020603050405020304" charset="0"/>
@@ -11314,7 +11799,7 @@
                               <a:latin typeface="Times New Roman" panose="02020603050405020304" charset="0"/>
                               <a:cs typeface="Times New Roman" panose="02020603050405020304" charset="0"/>
                             </a:rPr>
-                            <a:t>9: </a:t>
+                            <a:t>9:     perm.append(p)</a:t>
                           </a:r>
                           <a:endParaRPr lang="en-US" altLang="zh-CN" sz="1400" b="0">
                             <a:latin typeface="Times New Roman" panose="02020603050405020304" charset="0"/>
@@ -11333,7 +11818,1816 @@
                               <a:latin typeface="Times New Roman" panose="02020603050405020304" charset="0"/>
                               <a:cs typeface="Times New Roman" panose="02020603050405020304" charset="0"/>
                             </a:rPr>
-                            <a:t>10:</a:t>
+                            <a:t>10:   </a:t>
+                          </a:r>
+                          <a14:m>
+                            <m:oMath xmlns:m="http://schemas.openxmlformats.org/officeDocument/2006/math">
+                              <m:sSub>
+                                <m:sSubPr>
+                                  <m:ctrlPr>
+                                    <a:rPr lang="en-US" altLang="zh-CN" sz="1400" b="0" i="1">
+                                      <a:latin typeface="Cambria Math" panose="02040503050406030204" charset="0"/>
+                                      <a:cs typeface="Cambria Math" panose="02040503050406030204" charset="0"/>
+                                    </a:rPr>
+                                  </m:ctrlPr>
+                                </m:sSubPr>
+                                <m:e>
+                                  <m:r>
+                                    <a:rPr lang="en-US" altLang="zh-CN" sz="1400" b="0" i="1">
+                                      <a:latin typeface="Cambria Math" panose="02040503050406030204" charset="0"/>
+                                      <a:cs typeface="Cambria Math" panose="02040503050406030204" charset="0"/>
+                                    </a:rPr>
+                                    <m:t>𝐿</m:t>
+                                  </m:r>
+                                </m:e>
+                                <m:sub>
+                                  <m:r>
+                                    <a:rPr lang="en-US" altLang="zh-CN" sz="1400" b="0" i="1">
+                                      <a:latin typeface="Cambria Math" panose="02040503050406030204" charset="0"/>
+                                      <a:cs typeface="Cambria Math" panose="02040503050406030204" charset="0"/>
+                                    </a:rPr>
+                                    <m:t>𝑝</m:t>
+                                  </m:r>
+                                </m:sub>
+                              </m:sSub>
+                              <m:r>
+                                <a:rPr lang="en-US" altLang="zh-CN" sz="1400" b="0" i="1">
+                                  <a:latin typeface="Cambria Math" panose="02040503050406030204" charset="0"/>
+                                  <a:cs typeface="Cambria Math" panose="02040503050406030204" charset="0"/>
+                                </a:rPr>
+                                <m:t>=(</m:t>
+                              </m:r>
+                              <m:sSub>
+                                <m:sSubPr>
+                                  <m:ctrlPr>
+                                    <a:rPr lang="en-US" altLang="zh-CN" sz="1400" b="0" i="1">
+                                      <a:latin typeface="Cambria Math" panose="02040503050406030204" charset="0"/>
+                                      <a:cs typeface="Cambria Math" panose="02040503050406030204" charset="0"/>
+                                    </a:rPr>
+                                  </m:ctrlPr>
+                                </m:sSubPr>
+                                <m:e>
+                                  <m:r>
+                                    <a:rPr lang="en-US" altLang="zh-CN" sz="1400" b="0" i="1">
+                                      <a:latin typeface="Cambria Math" panose="02040503050406030204" charset="0"/>
+                                      <a:cs typeface="Cambria Math" panose="02040503050406030204" charset="0"/>
+                                    </a:rPr>
+                                    <m:t>𝐴</m:t>
+                                  </m:r>
+                                </m:e>
+                                <m:sub>
+                                  <m:r>
+                                    <a:rPr lang="en-US" altLang="zh-CN" sz="1400" b="0" i="1">
+                                      <a:latin typeface="Cambria Math" panose="02040503050406030204" charset="0"/>
+                                      <a:cs typeface="Cambria Math" panose="02040503050406030204" charset="0"/>
+                                    </a:rPr>
+                                    <m:t>𝑝</m:t>
+                                  </m:r>
+                                </m:sub>
+                              </m:sSub>
+                              <m:r>
+                                <a:rPr lang="en-US" altLang="zh-CN" sz="1400" i="1">
+                                  <a:latin typeface="Cambria Math" panose="02040503050406030204" charset="0"/>
+                                  <a:cs typeface="Cambria Math" panose="02040503050406030204" charset="0"/>
+                                </a:rPr>
+                                <m:t>∪</m:t>
+                              </m:r>
+                              <m:nary>
+                                <m:naryPr>
+                                  <m:chr m:val="⋃"/>
+                                  <m:limLoc m:val="undOvr"/>
+                                  <m:supHide m:val="on"/>
+                                  <m:ctrlPr>
+                                    <a:rPr lang="en-US" altLang="zh-CN" sz="1400" i="1">
+                                      <a:latin typeface="Cambria Math" panose="02040503050406030204" charset="0"/>
+                                      <a:cs typeface="Cambria Math" panose="02040503050406030204" charset="0"/>
+                                    </a:rPr>
+                                  </m:ctrlPr>
+                                </m:naryPr>
+                                <m:sub>
+                                  <m:r>
+                                    <a:rPr lang="en-US" altLang="zh-CN" sz="1400" i="1">
+                                      <a:latin typeface="Cambria Math" panose="02040503050406030204" charset="0"/>
+                                      <a:cs typeface="Cambria Math" panose="02040503050406030204" charset="0"/>
+                                    </a:rPr>
+                                    <m:t>𝑒</m:t>
+                                  </m:r>
+                                  <m:r>
+                                    <a:rPr lang="en-US" altLang="zh-CN" sz="1400" i="1">
+                                      <a:latin typeface="Cambria Math" panose="02040503050406030204" charset="0"/>
+                                      <a:cs typeface="Cambria Math" panose="02040503050406030204" charset="0"/>
+                                    </a:rPr>
+                                    <m:t>∈</m:t>
+                                  </m:r>
+                                  <m:sSub>
+                                    <m:sSubPr>
+                                      <m:ctrlPr>
+                                        <a:rPr lang="en-US" altLang="zh-CN" sz="1400" i="1">
+                                          <a:latin typeface="Cambria Math" panose="02040503050406030204" charset="0"/>
+                                          <a:cs typeface="Cambria Math" panose="02040503050406030204" charset="0"/>
+                                        </a:rPr>
+                                      </m:ctrlPr>
+                                    </m:sSubPr>
+                                    <m:e>
+                                      <m:r>
+                                        <a:rPr lang="en-US" altLang="zh-CN" sz="1400" i="1">
+                                          <a:latin typeface="Cambria Math" panose="02040503050406030204" charset="0"/>
+                                          <a:cs typeface="Cambria Math" panose="02040503050406030204" charset="0"/>
+                                        </a:rPr>
+                                        <m:t>𝜀</m:t>
+                                      </m:r>
+                                    </m:e>
+                                    <m:sub>
+                                      <m:r>
+                                        <a:rPr lang="en-US" altLang="zh-CN" sz="1400" i="1">
+                                          <a:latin typeface="Cambria Math" panose="02040503050406030204" charset="0"/>
+                                          <a:cs typeface="Cambria Math" panose="02040503050406030204" charset="0"/>
+                                        </a:rPr>
+                                        <m:t>𝑒</m:t>
+                                      </m:r>
+                                    </m:sub>
+                                  </m:sSub>
+                                </m:sub>
+                                <m:sup/>
+                                <m:e>
+                                  <m:sSub>
+                                    <m:sSubPr>
+                                      <m:ctrlPr>
+                                        <a:rPr lang="en-US" altLang="zh-CN" sz="1400" i="1">
+                                          <a:latin typeface="Cambria Math" panose="02040503050406030204" charset="0"/>
+                                          <a:cs typeface="Cambria Math" panose="02040503050406030204" charset="0"/>
+                                        </a:rPr>
+                                      </m:ctrlPr>
+                                    </m:sSubPr>
+                                    <m:e>
+                                      <m:r>
+                                        <a:rPr lang="en-US" altLang="zh-CN" sz="1400" i="1">
+                                          <a:latin typeface="Cambria Math" panose="02040503050406030204" charset="0"/>
+                                          <a:cs typeface="Cambria Math" panose="02040503050406030204" charset="0"/>
+                                        </a:rPr>
+                                        <m:t>𝐿</m:t>
+                                      </m:r>
+                                    </m:e>
+                                    <m:sub>
+                                      <m:r>
+                                        <a:rPr lang="en-US" altLang="zh-CN" sz="1400" i="1">
+                                          <a:latin typeface="Cambria Math" panose="02040503050406030204" charset="0"/>
+                                          <a:cs typeface="Cambria Math" panose="02040503050406030204" charset="0"/>
+                                        </a:rPr>
+                                        <m:t>𝑒</m:t>
+                                      </m:r>
+                                    </m:sub>
+                                  </m:sSub>
+                                </m:e>
+                              </m:nary>
+                              <m:r>
+                                <a:rPr lang="en-US" altLang="zh-CN" sz="1400" b="0" i="1">
+                                  <a:latin typeface="Cambria Math" panose="02040503050406030204" charset="0"/>
+                                  <a:cs typeface="Cambria Math" panose="02040503050406030204" charset="0"/>
+                                </a:rPr>
+                                <m:t>)\{</m:t>
+                              </m:r>
+                              <m:r>
+                                <a:rPr lang="en-US" altLang="zh-CN" sz="1400" b="0" i="1">
+                                  <a:latin typeface="Cambria Math" panose="02040503050406030204" charset="0"/>
+                                  <a:cs typeface="Cambria Math" panose="02040503050406030204" charset="0"/>
+                                </a:rPr>
+                                <m:t>𝑝</m:t>
+                              </m:r>
+                              <m:r>
+                                <a:rPr lang="en-US" altLang="zh-CN" sz="1400" b="0" i="1">
+                                  <a:latin typeface="Cambria Math" panose="02040503050406030204" charset="0"/>
+                                  <a:cs typeface="Cambria Math" panose="02040503050406030204" charset="0"/>
+                                </a:rPr>
+                                <m:t>}</m:t>
+                              </m:r>
+                            </m:oMath>
+                          </a14:m>
+                          <a:endParaRPr lang="en-US" altLang="zh-CN" sz="1400" b="0">
+                            <a:latin typeface="Times New Roman" panose="02020603050405020304" charset="0"/>
+                            <a:cs typeface="Times New Roman" panose="02020603050405020304" charset="0"/>
+                          </a:endParaRPr>
+                        </a:p>
+                        <a:p>
+                          <a:pPr indent="0" fontAlgn="auto">
+                            <a:lnSpc>
+                              <a:spcPts val="1880"/>
+                            </a:lnSpc>
+                            <a:buNone/>
+                          </a:pPr>
+                          <a:r>
+                            <a:rPr lang="en-US" altLang="zh-CN" sz="1400" b="0">
+                              <a:latin typeface="Times New Roman" panose="02020603050405020304" charset="0"/>
+                              <a:cs typeface="Times New Roman" panose="02020603050405020304" charset="0"/>
+                            </a:rPr>
+                            <a:t>11:   </a:t>
+                          </a:r>
+                          <a:r>
+                            <a:rPr lang="en-US" altLang="zh-CN" sz="1400" b="1">
+                              <a:latin typeface="Times New Roman" panose="02020603050405020304" charset="0"/>
+                              <a:cs typeface="Times New Roman" panose="02020603050405020304" charset="0"/>
+                            </a:rPr>
+                            <a:t>for</a:t>
+                          </a:r>
+                          <a:r>
+                            <a:rPr lang="en-US" altLang="zh-CN" sz="1400" b="0">
+                              <a:latin typeface="Times New Roman" panose="02020603050405020304" charset="0"/>
+                              <a:cs typeface="Times New Roman" panose="02020603050405020304" charset="0"/>
+                            </a:rPr>
+                            <a:t> each </a:t>
+                          </a:r>
+                          <a14:m>
+                            <m:oMath xmlns:m="http://schemas.openxmlformats.org/officeDocument/2006/math">
+                              <m:r>
+                                <a:rPr lang="en-US" altLang="zh-CN" sz="1400" b="1" i="1">
+                                  <a:latin typeface="Cambria Math" panose="02040503050406030204" charset="0"/>
+                                  <a:cs typeface="Cambria Math" panose="02040503050406030204" charset="0"/>
+                                </a:rPr>
+                                <m:t>𝒊</m:t>
+                              </m:r>
+                              <m:r>
+                                <a:rPr lang="en-US" altLang="zh-CN" sz="1400" i="1">
+                                  <a:latin typeface="Cambria Math" panose="02040503050406030204" charset="0"/>
+                                  <a:cs typeface="Cambria Math" panose="02040503050406030204" charset="0"/>
+                                </a:rPr>
+                                <m:t>∈</m:t>
+                              </m:r>
+                              <m:sSub>
+                                <m:sSubPr>
+                                  <m:ctrlPr>
+                                    <a:rPr lang="en-US" altLang="zh-CN" sz="1400" i="1">
+                                      <a:latin typeface="Cambria Math" panose="02040503050406030204" charset="0"/>
+                                      <a:cs typeface="Cambria Math" panose="02040503050406030204" charset="0"/>
+                                    </a:rPr>
+                                  </m:ctrlPr>
+                                </m:sSubPr>
+                                <m:e>
+                                  <m:r>
+                                    <a:rPr lang="en-US" altLang="zh-CN" sz="1400" i="1">
+                                      <a:latin typeface="Cambria Math" panose="02040503050406030204" charset="0"/>
+                                      <a:cs typeface="Cambria Math" panose="02040503050406030204" charset="0"/>
+                                    </a:rPr>
+                                    <m:t>𝐿</m:t>
+                                  </m:r>
+                                </m:e>
+                                <m:sub>
+                                  <m:r>
+                                    <a:rPr lang="en-US" altLang="zh-CN" sz="1400" i="1">
+                                      <a:latin typeface="Cambria Math" panose="02040503050406030204" charset="0"/>
+                                      <a:cs typeface="Cambria Math" panose="02040503050406030204" charset="0"/>
+                                    </a:rPr>
+                                    <m:t>𝑝</m:t>
+                                  </m:r>
+                                </m:sub>
+                              </m:sSub>
+                            </m:oMath>
+                          </a14:m>
+                          <a:r>
+                            <a:rPr lang="en-US" altLang="zh-CN" sz="1400" b="1">
+                              <a:latin typeface="Times New Roman" panose="02020603050405020304" charset="0"/>
+                              <a:cs typeface="Times New Roman" panose="02020603050405020304" charset="0"/>
+                            </a:rPr>
+                            <a:t> do</a:t>
+                          </a:r>
+                          <a:endParaRPr lang="en-US" altLang="zh-CN" sz="1400" b="1">
+                            <a:latin typeface="Times New Roman" panose="02020603050405020304" charset="0"/>
+                            <a:cs typeface="Times New Roman" panose="02020603050405020304" charset="0"/>
+                          </a:endParaRPr>
+                        </a:p>
+                        <a:p>
+                          <a:pPr indent="0" fontAlgn="auto">
+                            <a:lnSpc>
+                              <a:spcPts val="1880"/>
+                            </a:lnSpc>
+                            <a:buNone/>
+                          </a:pPr>
+                          <a:r>
+                            <a:rPr lang="en-US" altLang="zh-CN" sz="1400" b="0">
+                              <a:latin typeface="Times New Roman" panose="02020603050405020304" charset="0"/>
+                              <a:cs typeface="Times New Roman" panose="02020603050405020304" charset="0"/>
+                            </a:rPr>
+                            <a:t>12:       </a:t>
+                          </a:r>
+                          <a14:m>
+                            <m:oMath xmlns:m="http://schemas.openxmlformats.org/officeDocument/2006/math">
+                              <m:r>
+                                <a:rPr lang="en-US" altLang="zh-CN" sz="1400" b="0" i="1">
+                                  <a:latin typeface="Cambria Math" panose="02040503050406030204" charset="0"/>
+                                  <a:cs typeface="Cambria Math" panose="02040503050406030204" charset="0"/>
+                                </a:rPr>
+                                <m:t>(</m:t>
+                              </m:r>
+                              <m:sSub>
+                                <m:sSubPr>
+                                  <m:ctrlPr>
+                                    <a:rPr lang="en-US" altLang="zh-CN" sz="1400" b="0" i="1">
+                                      <a:latin typeface="Cambria Math" panose="02040503050406030204" charset="0"/>
+                                      <a:cs typeface="Cambria Math" panose="02040503050406030204" charset="0"/>
+                                    </a:rPr>
+                                  </m:ctrlPr>
+                                </m:sSubPr>
+                                <m:e>
+                                  <m:r>
+                                    <a:rPr lang="en-US" altLang="zh-CN" sz="1400" b="0" i="1">
+                                      <a:latin typeface="Cambria Math" panose="02040503050406030204" charset="0"/>
+                                      <a:cs typeface="Cambria Math" panose="02040503050406030204" charset="0"/>
+                                    </a:rPr>
+                                    <m:t>𝐴</m:t>
+                                  </m:r>
+                                </m:e>
+                                <m:sub>
+                                  <m:r>
+                                    <a:rPr lang="en-US" altLang="zh-CN" sz="1400" b="0" i="1">
+                                      <a:latin typeface="Cambria Math" panose="02040503050406030204" charset="0"/>
+                                      <a:cs typeface="Cambria Math" panose="02040503050406030204" charset="0"/>
+                                    </a:rPr>
+                                    <m:t>𝑖</m:t>
+                                  </m:r>
+                                </m:sub>
+                              </m:sSub>
+                              <m:r>
+                                <a:rPr lang="en-US" altLang="zh-CN" sz="1400" b="0" i="1">
+                                  <a:latin typeface="Cambria Math" panose="02040503050406030204" charset="0"/>
+                                  <a:cs typeface="Cambria Math" panose="02040503050406030204" charset="0"/>
+                                </a:rPr>
+                                <m:t>\</m:t>
+                              </m:r>
+                              <m:sSub>
+                                <m:sSubPr>
+                                  <m:ctrlPr>
+                                    <a:rPr lang="en-US" altLang="zh-CN" sz="1400" b="0" i="1">
+                                      <a:latin typeface="Cambria Math" panose="02040503050406030204" charset="0"/>
+                                      <a:cs typeface="Cambria Math" panose="02040503050406030204" charset="0"/>
+                                    </a:rPr>
+                                  </m:ctrlPr>
+                                </m:sSubPr>
+                                <m:e>
+                                  <m:r>
+                                    <a:rPr lang="en-US" altLang="zh-CN" sz="1400" b="0" i="1">
+                                      <a:latin typeface="Cambria Math" panose="02040503050406030204" charset="0"/>
+                                      <a:cs typeface="Cambria Math" panose="02040503050406030204" charset="0"/>
+                                    </a:rPr>
+                                    <m:t>𝐿</m:t>
+                                  </m:r>
+                                </m:e>
+                                <m:sub>
+                                  <m:r>
+                                    <a:rPr lang="en-US" altLang="zh-CN" sz="1400" b="0" i="1">
+                                      <a:latin typeface="Cambria Math" panose="02040503050406030204" charset="0"/>
+                                      <a:cs typeface="Cambria Math" panose="02040503050406030204" charset="0"/>
+                                    </a:rPr>
+                                    <m:t>𝑝</m:t>
+                                  </m:r>
+                                </m:sub>
+                              </m:sSub>
+                              <m:r>
+                                <a:rPr lang="en-US" altLang="zh-CN" sz="1400" b="0" i="1">
+                                  <a:latin typeface="Cambria Math" panose="02040503050406030204" charset="0"/>
+                                  <a:cs typeface="Cambria Math" panose="02040503050406030204" charset="0"/>
+                                </a:rPr>
+                                <m:t>)\{</m:t>
+                              </m:r>
+                              <m:r>
+                                <a:rPr lang="en-US" altLang="zh-CN" sz="1400" b="0" i="1">
+                                  <a:latin typeface="Cambria Math" panose="02040503050406030204" charset="0"/>
+                                  <a:cs typeface="Cambria Math" panose="02040503050406030204" charset="0"/>
+                                </a:rPr>
+                                <m:t>𝑝</m:t>
+                              </m:r>
+                              <m:r>
+                                <a:rPr lang="en-US" altLang="zh-CN" sz="1400" b="0" i="1">
+                                  <a:latin typeface="Cambria Math" panose="02040503050406030204" charset="0"/>
+                                  <a:cs typeface="Cambria Math" panose="02040503050406030204" charset="0"/>
+                                </a:rPr>
+                                <m:t>}</m:t>
+                              </m:r>
+                            </m:oMath>
+                          </a14:m>
+                          <a:endParaRPr lang="en-US" altLang="zh-CN" sz="1400" b="0">
+                            <a:latin typeface="Times New Roman" panose="02020603050405020304" charset="0"/>
+                            <a:cs typeface="Times New Roman" panose="02020603050405020304" charset="0"/>
+                          </a:endParaRPr>
+                        </a:p>
+                        <a:p>
+                          <a:pPr indent="0" fontAlgn="auto">
+                            <a:lnSpc>
+                              <a:spcPts val="1880"/>
+                            </a:lnSpc>
+                            <a:buNone/>
+                          </a:pPr>
+                          <a:r>
+                            <a:rPr lang="en-US" altLang="zh-CN" sz="1400" b="0">
+                              <a:latin typeface="Times New Roman" panose="02020603050405020304" charset="0"/>
+                              <a:cs typeface="Times New Roman" panose="02020603050405020304" charset="0"/>
+                            </a:rPr>
+                            <a:t>13:       </a:t>
+                          </a:r>
+                          <a14:m>
+                            <m:oMath xmlns:m="http://schemas.openxmlformats.org/officeDocument/2006/math">
+                              <m:r>
+                                <a:rPr lang="en-US" altLang="zh-CN" sz="1400" b="0" i="1">
+                                  <a:latin typeface="Cambria Math" panose="02040503050406030204" charset="0"/>
+                                  <a:cs typeface="Cambria Math" panose="02040503050406030204" charset="0"/>
+                                </a:rPr>
+                                <m:t>(</m:t>
+                              </m:r>
+                              <m:sSub>
+                                <m:sSubPr>
+                                  <m:ctrlPr>
+                                    <a:rPr lang="en-US" altLang="zh-CN" sz="1400" b="0" i="1">
+                                      <a:latin typeface="Cambria Math" panose="02040503050406030204" charset="0"/>
+                                      <a:cs typeface="Cambria Math" panose="02040503050406030204" charset="0"/>
+                                    </a:rPr>
+                                  </m:ctrlPr>
+                                </m:sSubPr>
+                                <m:e>
+                                  <m:r>
+                                    <a:rPr lang="en-US" altLang="zh-CN" sz="1400" i="1">
+                                      <a:latin typeface="Cambria Math" panose="02040503050406030204" charset="0"/>
+                                      <a:cs typeface="Cambria Math" panose="02040503050406030204" charset="0"/>
+                                    </a:rPr>
+                                    <m:t>𝜀</m:t>
+                                  </m:r>
+                                </m:e>
+                                <m:sub>
+                                  <m:r>
+                                    <a:rPr lang="en-US" altLang="zh-CN" sz="1400" b="0" i="1">
+                                      <a:latin typeface="Cambria Math" panose="02040503050406030204" charset="0"/>
+                                      <a:cs typeface="Cambria Math" panose="02040503050406030204" charset="0"/>
+                                    </a:rPr>
+                                    <m:t>𝑖</m:t>
+                                  </m:r>
+                                </m:sub>
+                              </m:sSub>
+                              <m:r>
+                                <a:rPr lang="en-US" altLang="zh-CN" sz="1400" b="0" i="1">
+                                  <a:latin typeface="Cambria Math" panose="02040503050406030204" charset="0"/>
+                                  <a:cs typeface="Cambria Math" panose="02040503050406030204" charset="0"/>
+                                </a:rPr>
+                                <m:t>\</m:t>
+                              </m:r>
+                              <m:sSub>
+                                <m:sSubPr>
+                                  <m:ctrlPr>
+                                    <a:rPr lang="en-US" altLang="zh-CN" sz="1400" b="0" i="1">
+                                      <a:latin typeface="Cambria Math" panose="02040503050406030204" charset="0"/>
+                                      <a:cs typeface="Cambria Math" panose="02040503050406030204" charset="0"/>
+                                    </a:rPr>
+                                  </m:ctrlPr>
+                                </m:sSubPr>
+                                <m:e>
+                                  <m:r>
+                                    <a:rPr lang="en-US" altLang="zh-CN" sz="1400" i="1">
+                                      <a:latin typeface="Cambria Math" panose="02040503050406030204" charset="0"/>
+                                      <a:cs typeface="Cambria Math" panose="02040503050406030204" charset="0"/>
+                                    </a:rPr>
+                                    <m:t>𝜀</m:t>
+                                  </m:r>
+                                </m:e>
+                                <m:sub>
+                                  <m:r>
+                                    <a:rPr lang="en-US" altLang="zh-CN" sz="1400" b="0" i="1">
+                                      <a:latin typeface="Cambria Math" panose="02040503050406030204" charset="0"/>
+                                      <a:cs typeface="Cambria Math" panose="02040503050406030204" charset="0"/>
+                                    </a:rPr>
+                                    <m:t>𝑝</m:t>
+                                  </m:r>
+                                </m:sub>
+                              </m:sSub>
+                              <m:r>
+                                <a:rPr lang="en-US" altLang="zh-CN" sz="1400" b="0" i="1">
+                                  <a:latin typeface="Cambria Math" panose="02040503050406030204" charset="0"/>
+                                  <a:cs typeface="Cambria Math" panose="02040503050406030204" charset="0"/>
+                                </a:rPr>
+                                <m:t>)</m:t>
+                              </m:r>
+                              <m:r>
+                                <a:rPr lang="en-US" altLang="zh-CN" sz="1400" i="1">
+                                  <a:latin typeface="Cambria Math" panose="02040503050406030204" charset="0"/>
+                                  <a:cs typeface="Cambria Math" panose="02040503050406030204" charset="0"/>
+                                </a:rPr>
+                                <m:t>⋃{</m:t>
+                              </m:r>
+                              <m:r>
+                                <a:rPr lang="en-US" altLang="zh-CN" sz="1400" i="1">
+                                  <a:latin typeface="Cambria Math" panose="02040503050406030204" charset="0"/>
+                                  <a:cs typeface="Cambria Math" panose="02040503050406030204" charset="0"/>
+                                </a:rPr>
+                                <m:t>𝑝</m:t>
+                              </m:r>
+                              <m:r>
+                                <a:rPr lang="en-US" altLang="zh-CN" sz="1400" i="1">
+                                  <a:latin typeface="Cambria Math" panose="02040503050406030204" charset="0"/>
+                                  <a:cs typeface="Cambria Math" panose="02040503050406030204" charset="0"/>
+                                </a:rPr>
+                                <m:t>}</m:t>
+                              </m:r>
+                            </m:oMath>
+                          </a14:m>
+                          <a:endParaRPr lang="en-US" altLang="zh-CN" sz="1400" b="1">
+                            <a:latin typeface="Times New Roman" panose="02020603050405020304" charset="0"/>
+                            <a:cs typeface="Times New Roman" panose="02020603050405020304" charset="0"/>
+                          </a:endParaRPr>
+                        </a:p>
+                        <a:p>
+                          <a:pPr indent="0" fontAlgn="auto">
+                            <a:lnSpc>
+                              <a:spcPts val="1880"/>
+                            </a:lnSpc>
+                            <a:buNone/>
+                          </a:pPr>
+                          <a:r>
+                            <a:rPr lang="en-US" altLang="zh-CN" sz="1400" b="0">
+                              <a:latin typeface="Times New Roman" panose="02020603050405020304" charset="0"/>
+                              <a:cs typeface="Times New Roman" panose="02020603050405020304" charset="0"/>
+                            </a:rPr>
+                            <a:t>14:       </a:t>
+                          </a:r>
+                          <a14:m>
+                            <m:oMath xmlns:m="http://schemas.openxmlformats.org/officeDocument/2006/math">
+                              <m:sSub>
+                                <m:sSubPr>
+                                  <m:ctrlPr>
+                                    <a:rPr lang="en-US" altLang="zh-CN" sz="1400" b="0" i="1">
+                                      <a:latin typeface="Cambria Math" panose="02040503050406030204" charset="0"/>
+                                      <a:cs typeface="Cambria Math" panose="02040503050406030204" charset="0"/>
+                                    </a:rPr>
+                                  </m:ctrlPr>
+                                </m:sSubPr>
+                                <m:e>
+                                  <m:r>
+                                    <a:rPr lang="en-US" altLang="zh-CN" sz="1400" b="0" i="1">
+                                      <a:latin typeface="Cambria Math" panose="02040503050406030204" charset="0"/>
+                                      <a:cs typeface="Cambria Math" panose="02040503050406030204" charset="0"/>
+                                    </a:rPr>
+                                    <m:t>𝑑</m:t>
+                                  </m:r>
+                                </m:e>
+                                <m:sub>
+                                  <m:r>
+                                    <a:rPr lang="en-US" altLang="zh-CN" sz="1400" b="0" i="1">
+                                      <a:latin typeface="Cambria Math" panose="02040503050406030204" charset="0"/>
+                                      <a:cs typeface="Cambria Math" panose="02040503050406030204" charset="0"/>
+                                    </a:rPr>
+                                    <m:t>𝑖</m:t>
+                                  </m:r>
+                                </m:sub>
+                              </m:sSub>
+                              <m:r>
+                                <a:rPr lang="en-US" altLang="zh-CN" sz="1400" b="0" i="1">
+                                  <a:latin typeface="Cambria Math" panose="02040503050406030204" charset="0"/>
+                                  <a:cs typeface="Cambria Math" panose="02040503050406030204" charset="0"/>
+                                </a:rPr>
+                                <m:t>=</m:t>
+                              </m:r>
+                              <m:d>
+                                <m:dPr>
+                                  <m:begChr m:val="|"/>
+                                  <m:endChr m:val="|"/>
+                                  <m:ctrlPr>
+                                    <a:rPr lang="en-US" altLang="zh-CN" sz="1400" b="0" i="1">
+                                      <a:latin typeface="Cambria Math" panose="02040503050406030204" charset="0"/>
+                                      <a:cs typeface="Cambria Math" panose="02040503050406030204" charset="0"/>
+                                    </a:rPr>
+                                  </m:ctrlPr>
+                                </m:dPr>
+                                <m:e>
+                                  <m:sSub>
+                                    <m:sSubPr>
+                                      <m:ctrlPr>
+                                        <a:rPr lang="en-US" altLang="zh-CN" sz="1400" b="0" i="1">
+                                          <a:latin typeface="Cambria Math" panose="02040503050406030204" charset="0"/>
+                                          <a:cs typeface="Cambria Math" panose="02040503050406030204" charset="0"/>
+                                        </a:rPr>
+                                      </m:ctrlPr>
+                                    </m:sSubPr>
+                                    <m:e>
+                                      <m:r>
+                                        <a:rPr lang="en-US" altLang="zh-CN" sz="1400" b="0" i="1">
+                                          <a:latin typeface="Cambria Math" panose="02040503050406030204" charset="0"/>
+                                          <a:cs typeface="Cambria Math" panose="02040503050406030204" charset="0"/>
+                                        </a:rPr>
+                                        <m:t>𝐴</m:t>
+                                      </m:r>
+                                    </m:e>
+                                    <m:sub>
+                                      <m:r>
+                                        <a:rPr lang="en-US" altLang="zh-CN" sz="1400" b="0" i="1">
+                                          <a:latin typeface="Cambria Math" panose="02040503050406030204" charset="0"/>
+                                          <a:cs typeface="Cambria Math" panose="02040503050406030204" charset="0"/>
+                                        </a:rPr>
+                                        <m:t>𝑖</m:t>
+                                      </m:r>
+                                    </m:sub>
+                                  </m:sSub>
+                                  <m:r>
+                                    <a:rPr lang="en-US" altLang="zh-CN" sz="1400" b="0" i="1">
+                                      <a:latin typeface="Cambria Math" panose="02040503050406030204" charset="0"/>
+                                      <a:cs typeface="Cambria Math" panose="02040503050406030204" charset="0"/>
+                                    </a:rPr>
+                                    <m:t>\</m:t>
+                                  </m:r>
+                                  <m:r>
+                                    <a:rPr lang="en-US" altLang="zh-CN" sz="1400" b="1" i="1">
+                                      <a:latin typeface="Cambria Math" panose="02040503050406030204" charset="0"/>
+                                      <a:cs typeface="Cambria Math" panose="02040503050406030204" charset="0"/>
+                                    </a:rPr>
+                                    <m:t>𝒊</m:t>
+                                  </m:r>
+                                </m:e>
+                              </m:d>
+                              <m:r>
+                                <a:rPr lang="en-US" altLang="zh-CN" sz="1400" b="0" i="1">
+                                  <a:latin typeface="Cambria Math" panose="02040503050406030204" charset="0"/>
+                                  <a:cs typeface="Cambria Math" panose="02040503050406030204" charset="0"/>
+                                </a:rPr>
+                                <m:t>+</m:t>
+                              </m:r>
+                              <m:d>
+                                <m:dPr>
+                                  <m:begChr m:val="|"/>
+                                  <m:endChr m:val="|"/>
+                                  <m:ctrlPr>
+                                    <a:rPr lang="en-US" altLang="zh-CN" sz="1400" b="0" i="1">
+                                      <a:latin typeface="Cambria Math" panose="02040503050406030204" charset="0"/>
+                                      <a:cs typeface="Cambria Math" panose="02040503050406030204" charset="0"/>
+                                    </a:rPr>
+                                  </m:ctrlPr>
+                                </m:dPr>
+                                <m:e>
+                                  <m:r>
+                                    <a:rPr lang="en-US" altLang="zh-CN" sz="1400" b="0" i="1">
+                                      <a:latin typeface="Cambria Math" panose="02040503050406030204" charset="0"/>
+                                      <a:cs typeface="Cambria Math" panose="02040503050406030204" charset="0"/>
+                                    </a:rPr>
+                                    <m:t>(</m:t>
+                                  </m:r>
+                                  <m:nary>
+                                    <m:naryPr>
+                                      <m:chr m:val="⋃"/>
+                                      <m:limLoc m:val="undOvr"/>
+                                      <m:supHide m:val="on"/>
+                                      <m:ctrlPr>
+                                        <a:rPr lang="en-US" altLang="zh-CN" sz="1400" b="0" i="1">
+                                          <a:latin typeface="Cambria Math" panose="02040503050406030204" charset="0"/>
+                                          <a:cs typeface="Cambria Math" panose="02040503050406030204" charset="0"/>
+                                        </a:rPr>
+                                      </m:ctrlPr>
+                                    </m:naryPr>
+                                    <m:sub>
+                                      <m:r>
+                                        <a:rPr lang="en-US" altLang="zh-CN" sz="1400" b="0" i="1">
+                                          <a:latin typeface="Cambria Math" panose="02040503050406030204" charset="0"/>
+                                          <a:cs typeface="Cambria Math" panose="02040503050406030204" charset="0"/>
+                                        </a:rPr>
+                                        <m:t>𝑒</m:t>
+                                      </m:r>
+                                      <m:r>
+                                        <a:rPr lang="en-US" altLang="zh-CN" sz="1400" i="1">
+                                          <a:latin typeface="Cambria Math" panose="02040503050406030204" charset="0"/>
+                                          <a:cs typeface="Cambria Math" panose="02040503050406030204" charset="0"/>
+                                        </a:rPr>
+                                        <m:t>∈</m:t>
+                                      </m:r>
+                                      <m:sSub>
+                                        <m:sSubPr>
+                                          <m:ctrlPr>
+                                            <a:rPr lang="en-US" altLang="zh-CN" sz="1400" i="1">
+                                              <a:latin typeface="Cambria Math" panose="02040503050406030204" charset="0"/>
+                                              <a:cs typeface="Cambria Math" panose="02040503050406030204" charset="0"/>
+                                            </a:rPr>
+                                          </m:ctrlPr>
+                                        </m:sSubPr>
+                                        <m:e>
+                                          <m:r>
+                                            <a:rPr lang="en-US" altLang="zh-CN" sz="1400" i="1">
+                                              <a:latin typeface="Cambria Math" panose="02040503050406030204" charset="0"/>
+                                              <a:cs typeface="Cambria Math" panose="02040503050406030204" charset="0"/>
+                                            </a:rPr>
+                                            <m:t>𝜀</m:t>
+                                          </m:r>
+                                        </m:e>
+                                        <m:sub>
+                                          <m:r>
+                                            <a:rPr lang="en-US" altLang="zh-CN" sz="1400" i="1">
+                                              <a:latin typeface="Cambria Math" panose="02040503050406030204" charset="0"/>
+                                              <a:cs typeface="Cambria Math" panose="02040503050406030204" charset="0"/>
+                                            </a:rPr>
+                                            <m:t>𝑖</m:t>
+                                          </m:r>
+                                        </m:sub>
+                                      </m:sSub>
+                                    </m:sub>
+                                    <m:sup/>
+                                    <m:e>
+                                      <m:sSub>
+                                        <m:sSubPr>
+                                          <m:ctrlPr>
+                                            <a:rPr lang="en-US" altLang="zh-CN" sz="1400" b="0" i="1">
+                                              <a:latin typeface="Cambria Math" panose="02040503050406030204" charset="0"/>
+                                              <a:cs typeface="Cambria Math" panose="02040503050406030204" charset="0"/>
+                                            </a:rPr>
+                                          </m:ctrlPr>
+                                        </m:sSubPr>
+                                        <m:e>
+                                          <m:r>
+                                            <a:rPr lang="en-US" altLang="zh-CN" sz="1400" b="0" i="1">
+                                              <a:latin typeface="Cambria Math" panose="02040503050406030204" charset="0"/>
+                                              <a:cs typeface="Cambria Math" panose="02040503050406030204" charset="0"/>
+                                            </a:rPr>
+                                            <m:t>𝐿</m:t>
+                                          </m:r>
+                                        </m:e>
+                                        <m:sub>
+                                          <m:r>
+                                            <a:rPr lang="en-US" altLang="zh-CN" sz="1400" b="0" i="1">
+                                              <a:latin typeface="Cambria Math" panose="02040503050406030204" charset="0"/>
+                                              <a:cs typeface="Cambria Math" panose="02040503050406030204" charset="0"/>
+                                            </a:rPr>
+                                            <m:t>𝑒</m:t>
+                                          </m:r>
+                                        </m:sub>
+                                      </m:sSub>
+                                    </m:e>
+                                  </m:nary>
+                                  <m:r>
+                                    <a:rPr lang="en-US" altLang="zh-CN" sz="1400" b="0" i="1">
+                                      <a:latin typeface="Cambria Math" panose="02040503050406030204" charset="0"/>
+                                      <a:cs typeface="Cambria Math" panose="02040503050406030204" charset="0"/>
+                                    </a:rPr>
+                                    <m:t>)\</m:t>
+                                  </m:r>
+                                  <m:r>
+                                    <a:rPr lang="en-US" altLang="zh-CN" sz="1400" b="1" i="1">
+                                      <a:latin typeface="Cambria Math" panose="02040503050406030204" charset="0"/>
+                                      <a:cs typeface="Cambria Math" panose="02040503050406030204" charset="0"/>
+                                    </a:rPr>
+                                    <m:t>𝒊</m:t>
+                                  </m:r>
+                                </m:e>
+                              </m:d>
+                            </m:oMath>
+                          </a14:m>
+                          <a:endParaRPr lang="en-US" altLang="zh-CN" sz="1400" b="0">
+                            <a:latin typeface="Times New Roman" panose="02020603050405020304" charset="0"/>
+                            <a:cs typeface="Times New Roman" panose="02020603050405020304" charset="0"/>
+                          </a:endParaRPr>
+                        </a:p>
+                        <a:p>
+                          <a:pPr indent="0" fontAlgn="auto">
+                            <a:lnSpc>
+                              <a:spcPts val="1880"/>
+                            </a:lnSpc>
+                            <a:buNone/>
+                          </a:pPr>
+                          <a:r>
+                            <a:rPr lang="en-US" altLang="zh-CN" sz="1400" b="0">
+                              <a:latin typeface="Times New Roman" panose="02020603050405020304" charset="0"/>
+                              <a:cs typeface="Times New Roman" panose="02020603050405020304" charset="0"/>
+                            </a:rPr>
+                            <a:t>15:   </a:t>
+                          </a:r>
+                          <a:r>
+                            <a:rPr lang="en-US" altLang="zh-CN" sz="1400" b="1">
+                              <a:latin typeface="Times New Roman" panose="02020603050405020304" charset="0"/>
+                              <a:cs typeface="Times New Roman" panose="02020603050405020304" charset="0"/>
+                            </a:rPr>
+                            <a:t>end for</a:t>
+                          </a:r>
+                          <a:r>
+                            <a:rPr lang="en-US" altLang="zh-CN" sz="1400" b="0">
+                              <a:latin typeface="Times New Roman" panose="02020603050405020304" charset="0"/>
+                              <a:cs typeface="Times New Roman" panose="02020603050405020304" charset="0"/>
+                            </a:rPr>
+                            <a:t>   </a:t>
+                          </a:r>
+                          <a:endParaRPr lang="en-US" altLang="zh-CN" sz="1400" b="1">
+                            <a:latin typeface="Times New Roman" panose="02020603050405020304" charset="0"/>
+                            <a:cs typeface="Times New Roman" panose="02020603050405020304" charset="0"/>
+                          </a:endParaRPr>
+                        </a:p>
+                        <a:p>
+                          <a:pPr indent="0" fontAlgn="auto">
+                            <a:lnSpc>
+                              <a:spcPts val="1880"/>
+                            </a:lnSpc>
+                            <a:buNone/>
+                          </a:pPr>
+                          <a:r>
+                            <a:rPr lang="en-US" altLang="zh-CN" sz="1400" b="0">
+                              <a:latin typeface="Times New Roman" panose="02020603050405020304" charset="0"/>
+                              <a:cs typeface="Times New Roman" panose="02020603050405020304" charset="0"/>
+                            </a:rPr>
+                            <a:t>16:   </a:t>
+                          </a:r>
+                          <a:r>
+                            <a:rPr lang="en-US" altLang="zh-CN" sz="1400" b="1">
+                              <a:latin typeface="Times New Roman" panose="02020603050405020304" charset="0"/>
+                              <a:cs typeface="Times New Roman" panose="02020603050405020304" charset="0"/>
+                            </a:rPr>
+                            <a:t>for </a:t>
+                          </a:r>
+                          <a:r>
+                            <a:rPr lang="en-US" altLang="zh-CN" sz="1400" b="0">
+                              <a:latin typeface="Times New Roman" panose="02020603050405020304" charset="0"/>
+                              <a:cs typeface="Times New Roman" panose="02020603050405020304" charset="0"/>
+                            </a:rPr>
+                            <a:t>each pair </a:t>
+                          </a:r>
+                          <a14:m>
+                            <m:oMath xmlns:m="http://schemas.openxmlformats.org/officeDocument/2006/math">
+                              <m:r>
+                                <a:rPr lang="en-US" altLang="zh-CN" sz="1400" b="1" i="1">
+                                  <a:latin typeface="Cambria Math" panose="02040503050406030204" charset="0"/>
+                                  <a:cs typeface="Cambria Math" panose="02040503050406030204" charset="0"/>
+                                </a:rPr>
+                                <m:t>𝒊</m:t>
+                              </m:r>
+                            </m:oMath>
+                          </a14:m>
+                          <a:r>
+                            <a:rPr lang="en-US" altLang="zh-CN" sz="1400" b="0">
+                              <a:latin typeface="Times New Roman" panose="02020603050405020304" charset="0"/>
+                              <a:cs typeface="Times New Roman" panose="02020603050405020304" charset="0"/>
+                            </a:rPr>
+                            <a:t> and </a:t>
+                          </a:r>
+                          <a14:m>
+                            <m:oMath xmlns:m="http://schemas.openxmlformats.org/officeDocument/2006/math">
+                              <m:r>
+                                <a:rPr lang="en-US" altLang="zh-CN" sz="1400" b="1" i="1">
+                                  <a:latin typeface="Cambria Math" panose="02040503050406030204" charset="0"/>
+                                  <a:cs typeface="Cambria Math" panose="02040503050406030204" charset="0"/>
+                                </a:rPr>
+                                <m:t>𝒋</m:t>
+                              </m:r>
+                            </m:oMath>
+                          </a14:m>
+                          <a:r>
+                            <a:rPr lang="en-US" altLang="zh-CN" sz="1400" b="0">
+                              <a:latin typeface="Times New Roman" panose="02020603050405020304" charset="0"/>
+                              <a:cs typeface="Times New Roman" panose="02020603050405020304" charset="0"/>
+                            </a:rPr>
+                            <a:t> </a:t>
+                          </a:r>
+                          <a14:m>
+                            <m:oMath xmlns:m="http://schemas.openxmlformats.org/officeDocument/2006/math">
+                              <m:r>
+                                <a:rPr lang="en-US" altLang="zh-CN" sz="1400" i="1">
+                                  <a:latin typeface="Cambria Math" panose="02040503050406030204" charset="0"/>
+                                  <a:cs typeface="Cambria Math" panose="02040503050406030204" charset="0"/>
+                                </a:rPr>
+                                <m:t>∈</m:t>
+                              </m:r>
+                            </m:oMath>
+                          </a14:m>
+                          <a:r>
+                            <a:rPr lang="en-US" altLang="zh-CN" sz="1400" b="0">
+                              <a:latin typeface="Times New Roman" panose="02020603050405020304" charset="0"/>
+                              <a:cs typeface="Times New Roman" panose="02020603050405020304" charset="0"/>
+                            </a:rPr>
+                            <a:t> </a:t>
+                          </a:r>
+                          <a14:m>
+                            <m:oMath xmlns:m="http://schemas.openxmlformats.org/officeDocument/2006/math">
+                              <m:sSub>
+                                <m:sSubPr>
+                                  <m:ctrlPr>
+                                    <a:rPr lang="en-US" altLang="zh-CN" sz="1400" b="0" i="1">
+                                      <a:latin typeface="Cambria Math" panose="02040503050406030204" charset="0"/>
+                                      <a:cs typeface="Cambria Math" panose="02040503050406030204" charset="0"/>
+                                    </a:rPr>
+                                  </m:ctrlPr>
+                                </m:sSubPr>
+                                <m:e>
+                                  <m:r>
+                                    <a:rPr lang="en-US" altLang="zh-CN" sz="1400" b="0" i="1">
+                                      <a:latin typeface="Cambria Math" panose="02040503050406030204" charset="0"/>
+                                      <a:cs typeface="Cambria Math" panose="02040503050406030204" charset="0"/>
+                                    </a:rPr>
+                                    <m:t>𝐿</m:t>
+                                  </m:r>
+                                </m:e>
+                                <m:sub>
+                                  <m:r>
+                                    <a:rPr lang="en-US" altLang="zh-CN" sz="1400" b="0" i="1">
+                                      <a:latin typeface="Cambria Math" panose="02040503050406030204" charset="0"/>
+                                      <a:cs typeface="Cambria Math" panose="02040503050406030204" charset="0"/>
+                                    </a:rPr>
+                                    <m:t>𝑝</m:t>
+                                  </m:r>
+                                </m:sub>
+                              </m:sSub>
+                            </m:oMath>
+                          </a14:m>
+                          <a:r>
+                            <a:rPr lang="en-US" altLang="zh-CN" sz="1400" b="0">
+                              <a:latin typeface="Times New Roman" panose="02020603050405020304" charset="0"/>
+                              <a:cs typeface="Times New Roman" panose="02020603050405020304" charset="0"/>
+                            </a:rPr>
+                            <a:t> </a:t>
+                          </a:r>
+                          <a:r>
+                            <a:rPr lang="en-US" altLang="zh-CN" sz="1400" b="1">
+                              <a:latin typeface="Times New Roman" panose="02020603050405020304" charset="0"/>
+                              <a:cs typeface="Times New Roman" panose="02020603050405020304" charset="0"/>
+                            </a:rPr>
+                            <a:t>do</a:t>
+                          </a:r>
+                          <a:endParaRPr lang="en-US" altLang="zh-CN" sz="1400" b="0">
+                            <a:latin typeface="Times New Roman" panose="02020603050405020304" charset="0"/>
+                            <a:cs typeface="Times New Roman" panose="02020603050405020304" charset="0"/>
+                          </a:endParaRPr>
+                        </a:p>
+                        <a:p>
+                          <a:pPr indent="0" fontAlgn="auto">
+                            <a:lnSpc>
+                              <a:spcPts val="1880"/>
+                            </a:lnSpc>
+                            <a:buNone/>
+                          </a:pPr>
+                          <a:r>
+                            <a:rPr lang="en-US" altLang="zh-CN" sz="1400" b="0">
+                              <a:latin typeface="Times New Roman" panose="02020603050405020304" charset="0"/>
+                              <a:cs typeface="Times New Roman" panose="02020603050405020304" charset="0"/>
+                            </a:rPr>
+                            <a:t>17:       </a:t>
+                          </a:r>
+                          <a:r>
+                            <a:rPr lang="en-US" altLang="zh-CN" sz="1400" b="1">
+                              <a:latin typeface="Times New Roman" panose="02020603050405020304" charset="0"/>
+                              <a:cs typeface="Times New Roman" panose="02020603050405020304" charset="0"/>
+                            </a:rPr>
+                            <a:t>if</a:t>
+                          </a:r>
+                          <a:r>
+                            <a:rPr lang="en-US" altLang="zh-CN" sz="1400" b="0">
+                              <a:latin typeface="Times New Roman" panose="02020603050405020304" charset="0"/>
+                              <a:cs typeface="Times New Roman" panose="02020603050405020304" charset="0"/>
+                            </a:rPr>
+                            <a:t> </a:t>
+                          </a:r>
+                          <a14:m>
+                            <m:oMath xmlns:m="http://schemas.openxmlformats.org/officeDocument/2006/math">
+                              <m:r>
+                                <a:rPr lang="en-US" altLang="zh-CN" sz="1400" b="1" i="1">
+                                  <a:latin typeface="Cambria Math" panose="02040503050406030204" charset="0"/>
+                                  <a:cs typeface="Cambria Math" panose="02040503050406030204" charset="0"/>
+                                </a:rPr>
+                                <m:t>𝒊</m:t>
+                              </m:r>
+                            </m:oMath>
+                          </a14:m>
+                          <a:r>
+                            <a:rPr lang="en-US" altLang="zh-CN" sz="1400" b="0">
+                              <a:latin typeface="Times New Roman" panose="02020603050405020304" charset="0"/>
+                              <a:cs typeface="Times New Roman" panose="02020603050405020304" charset="0"/>
+                            </a:rPr>
+                            <a:t> and </a:t>
+                          </a:r>
+                          <a14:m>
+                            <m:oMath xmlns:m="http://schemas.openxmlformats.org/officeDocument/2006/math">
+                              <m:r>
+                                <a:rPr lang="en-US" altLang="zh-CN" sz="1400" b="1" i="1">
+                                  <a:latin typeface="Cambria Math" panose="02040503050406030204" charset="0"/>
+                                  <a:cs typeface="Cambria Math" panose="02040503050406030204" charset="0"/>
+                                </a:rPr>
+                                <m:t>𝒋</m:t>
+                              </m:r>
+                            </m:oMath>
+                          </a14:m>
+                          <a:r>
+                            <a:rPr lang="en-US" altLang="zh-CN" sz="1400" b="0">
+                              <a:latin typeface="Times New Roman" panose="02020603050405020304" charset="0"/>
+                              <a:cs typeface="Times New Roman" panose="02020603050405020304" charset="0"/>
+                            </a:rPr>
+                            <a:t> is indistinguishable </a:t>
+                          </a:r>
+                          <a:r>
+                            <a:rPr lang="en-US" altLang="zh-CN" sz="1400" b="1">
+                              <a:latin typeface="Times New Roman" panose="02020603050405020304" charset="0"/>
+                              <a:cs typeface="Times New Roman" panose="02020603050405020304" charset="0"/>
+                            </a:rPr>
+                            <a:t>then</a:t>
+                          </a:r>
+                          <a:endParaRPr lang="en-US" altLang="zh-CN" sz="1400" b="0">
+                            <a:latin typeface="Times New Roman" panose="02020603050405020304" charset="0"/>
+                            <a:cs typeface="Times New Roman" panose="02020603050405020304" charset="0"/>
+                          </a:endParaRPr>
+                        </a:p>
+                        <a:p>
+                          <a:pPr indent="0" fontAlgn="auto">
+                            <a:lnSpc>
+                              <a:spcPts val="1880"/>
+                            </a:lnSpc>
+                            <a:buNone/>
+                          </a:pPr>
+                          <a:r>
+                            <a:rPr lang="en-US" altLang="zh-CN" sz="1400" b="0">
+                              <a:latin typeface="Times New Roman" panose="02020603050405020304" charset="0"/>
+                              <a:cs typeface="Times New Roman" panose="02020603050405020304" charset="0"/>
+                            </a:rPr>
+                            <a:t>18:           </a:t>
+                          </a:r>
+                          <a14:m>
+                            <m:oMath xmlns:m="http://schemas.openxmlformats.org/officeDocument/2006/math">
+                              <m:r>
+                                <a:rPr lang="en-US" altLang="zh-CN" sz="1400" b="1" i="1">
+                                  <a:latin typeface="Cambria Math" panose="02040503050406030204" charset="0"/>
+                                  <a:cs typeface="Cambria Math" panose="02040503050406030204" charset="0"/>
+                                </a:rPr>
+                                <m:t>𝒊</m:t>
+                              </m:r>
+                              <m:r>
+                                <a:rPr lang="en-US" altLang="zh-CN" sz="1400" b="0" i="1">
+                                  <a:latin typeface="Cambria Math" panose="02040503050406030204" charset="0"/>
+                                  <a:cs typeface="Cambria Math" panose="02040503050406030204" charset="0"/>
+                                </a:rPr>
+                                <m:t>=</m:t>
+                              </m:r>
+                              <m:r>
+                                <a:rPr lang="en-US" altLang="zh-CN" sz="1400" b="1" i="1">
+                                  <a:latin typeface="Cambria Math" panose="02040503050406030204" charset="0"/>
+                                  <a:cs typeface="Cambria Math" panose="02040503050406030204" charset="0"/>
+                                </a:rPr>
+                                <m:t>𝒊</m:t>
+                              </m:r>
+                              <m:r>
+                                <a:rPr lang="en-US" altLang="zh-CN" sz="1400" i="1">
+                                  <a:latin typeface="Cambria Math" panose="02040503050406030204" charset="0"/>
+                                  <a:cs typeface="Cambria Math" panose="02040503050406030204" charset="0"/>
+                                </a:rPr>
+                                <m:t>∪</m:t>
+                              </m:r>
+                              <m:r>
+                                <a:rPr lang="en-US" altLang="zh-CN" sz="1400" b="1" i="1">
+                                  <a:latin typeface="Cambria Math" panose="02040503050406030204" charset="0"/>
+                                  <a:cs typeface="Cambria Math" panose="02040503050406030204" charset="0"/>
+                                </a:rPr>
+                                <m:t>𝒋</m:t>
+                              </m:r>
+                            </m:oMath>
+                          </a14:m>
+                          <a:endParaRPr lang="en-US" altLang="zh-CN" sz="1400" b="1">
+                            <a:latin typeface="Times New Roman" panose="02020603050405020304" charset="0"/>
+                            <a:cs typeface="Times New Roman" panose="02020603050405020304" charset="0"/>
+                          </a:endParaRPr>
+                        </a:p>
+                        <a:p>
+                          <a:pPr indent="0" fontAlgn="auto">
+                            <a:lnSpc>
+                              <a:spcPts val="1880"/>
+                            </a:lnSpc>
+                            <a:buNone/>
+                          </a:pPr>
+                          <a:r>
+                            <a:rPr lang="en-US" altLang="zh-CN" sz="1400" b="0">
+                              <a:latin typeface="Times New Roman" panose="02020603050405020304" charset="0"/>
+                              <a:cs typeface="Times New Roman" panose="02020603050405020304" charset="0"/>
+                            </a:rPr>
+                            <a:t>19:          </a:t>
+                          </a:r>
+                          <a14:m>
+                            <m:oMath xmlns:m="http://schemas.openxmlformats.org/officeDocument/2006/math">
+                              <m:sSub>
+                                <m:sSubPr>
+                                  <m:ctrlPr>
+                                    <a:rPr lang="en-US" altLang="zh-CN" sz="1400" b="0" i="1">
+                                      <a:latin typeface="Cambria Math" panose="02040503050406030204" charset="0"/>
+                                      <a:cs typeface="Cambria Math" panose="02040503050406030204" charset="0"/>
+                                    </a:rPr>
+                                  </m:ctrlPr>
+                                </m:sSubPr>
+                                <m:e>
+                                  <m:r>
+                                    <a:rPr lang="en-US" altLang="zh-CN" sz="1400" b="0" i="1">
+                                      <a:latin typeface="Cambria Math" panose="02040503050406030204" charset="0"/>
+                                      <a:cs typeface="Cambria Math" panose="02040503050406030204" charset="0"/>
+                                    </a:rPr>
+                                    <m:t>𝑑</m:t>
+                                  </m:r>
+                                </m:e>
+                                <m:sub>
+                                  <m:r>
+                                    <a:rPr lang="en-US" altLang="zh-CN" sz="1400" b="0" i="1">
+                                      <a:latin typeface="Cambria Math" panose="02040503050406030204" charset="0"/>
+                                      <a:cs typeface="Cambria Math" panose="02040503050406030204" charset="0"/>
+                                    </a:rPr>
+                                    <m:t>𝑖</m:t>
+                                  </m:r>
+                                </m:sub>
+                              </m:sSub>
+                              <m:r>
+                                <a:rPr lang="en-US" altLang="zh-CN" sz="1400" b="0" i="1">
+                                  <a:latin typeface="Cambria Math" panose="02040503050406030204" charset="0"/>
+                                  <a:cs typeface="Cambria Math" panose="02040503050406030204" charset="0"/>
+                                </a:rPr>
+                                <m:t>=</m:t>
+                              </m:r>
+                              <m:sSub>
+                                <m:sSubPr>
+                                  <m:ctrlPr>
+                                    <a:rPr lang="en-US" altLang="zh-CN" sz="1400" b="0" i="1">
+                                      <a:latin typeface="Cambria Math" panose="02040503050406030204" charset="0"/>
+                                      <a:cs typeface="Cambria Math" panose="02040503050406030204" charset="0"/>
+                                    </a:rPr>
+                                  </m:ctrlPr>
+                                </m:sSubPr>
+                                <m:e>
+                                  <m:r>
+                                    <a:rPr lang="en-US" altLang="zh-CN" sz="1400" b="0" i="1">
+                                      <a:latin typeface="Cambria Math" panose="02040503050406030204" charset="0"/>
+                                      <a:cs typeface="Cambria Math" panose="02040503050406030204" charset="0"/>
+                                    </a:rPr>
+                                    <m:t>𝑑</m:t>
+                                  </m:r>
+                                </m:e>
+                                <m:sub>
+                                  <m:r>
+                                    <a:rPr lang="en-US" altLang="zh-CN" sz="1400" b="0" i="1">
+                                      <a:latin typeface="Cambria Math" panose="02040503050406030204" charset="0"/>
+                                      <a:cs typeface="Cambria Math" panose="02040503050406030204" charset="0"/>
+                                    </a:rPr>
+                                    <m:t>𝑖</m:t>
+                                  </m:r>
+                                </m:sub>
+                              </m:sSub>
+                              <m:r>
+                                <a:rPr lang="en-US" altLang="zh-CN" sz="1400" b="0" i="1">
+                                  <a:latin typeface="Cambria Math" panose="02040503050406030204" charset="0"/>
+                                  <a:cs typeface="Cambria Math" panose="02040503050406030204" charset="0"/>
+                                </a:rPr>
+                                <m:t>−</m:t>
+                              </m:r>
+                              <m:d>
+                                <m:dPr>
+                                  <m:begChr m:val="|"/>
+                                  <m:endChr m:val="|"/>
+                                  <m:ctrlPr>
+                                    <a:rPr lang="en-US" altLang="zh-CN" sz="1400" b="0" i="1">
+                                      <a:latin typeface="Cambria Math" panose="02040503050406030204" charset="0"/>
+                                      <a:cs typeface="Cambria Math" panose="02040503050406030204" charset="0"/>
+                                    </a:rPr>
+                                  </m:ctrlPr>
+                                </m:dPr>
+                                <m:e>
+                                  <m:r>
+                                    <a:rPr lang="en-US" altLang="zh-CN" sz="1400" b="1" i="1">
+                                      <a:latin typeface="Cambria Math" panose="02040503050406030204" charset="0"/>
+                                      <a:cs typeface="Cambria Math" panose="02040503050406030204" charset="0"/>
+                                    </a:rPr>
+                                    <m:t>𝒋</m:t>
+                                  </m:r>
+                                </m:e>
+                              </m:d>
+                            </m:oMath>
+                          </a14:m>
+                          <a:r>
+                            <a:rPr lang="en-US" altLang="zh-CN" sz="1400" b="1">
+                              <a:latin typeface="Times New Roman" panose="02020603050405020304" charset="0"/>
+                              <a:cs typeface="Times New Roman" panose="02020603050405020304" charset="0"/>
+                            </a:rPr>
+                            <a:t>   </a:t>
+                          </a:r>
+                          <a14:m>
+                            <m:oMath xmlns:m="http://schemas.openxmlformats.org/officeDocument/2006/math">
+                              <m:r>
+                                <a:rPr lang="en-US" altLang="zh-CN" sz="1400" b="0" i="1">
+                                  <a:latin typeface="Cambria Math" panose="02040503050406030204" charset="0"/>
+                                  <a:cs typeface="Cambria Math" panose="02040503050406030204" charset="0"/>
+                                </a:rPr>
+                                <m:t>𝑉</m:t>
+                              </m:r>
+                              <m:r>
+                                <a:rPr lang="en-US" altLang="zh-CN" sz="1400" b="0" i="1">
+                                  <a:latin typeface="Cambria Math" panose="02040503050406030204" charset="0"/>
+                                  <a:cs typeface="Cambria Math" panose="02040503050406030204" charset="0"/>
+                                </a:rPr>
+                                <m:t> = </m:t>
+                              </m:r>
+                              <m:r>
+                                <a:rPr lang="en-US" altLang="zh-CN" sz="1400" b="0" i="1">
+                                  <a:latin typeface="Cambria Math" panose="02040503050406030204" charset="0"/>
+                                  <a:cs typeface="Cambria Math" panose="02040503050406030204" charset="0"/>
+                                </a:rPr>
+                                <m:t>𝑉</m:t>
+                              </m:r>
+                              <m:r>
+                                <a:rPr lang="en-US" altLang="zh-CN" sz="1400" b="0" i="1">
+                                  <a:latin typeface="Cambria Math" panose="02040503050406030204" charset="0"/>
+                                  <a:cs typeface="Cambria Math" panose="02040503050406030204" charset="0"/>
+                                </a:rPr>
+                                <m:t>\{</m:t>
+                              </m:r>
+                              <m:r>
+                                <a:rPr lang="en-US" altLang="zh-CN" sz="1400" b="0" i="1">
+                                  <a:latin typeface="Cambria Math" panose="02040503050406030204" charset="0"/>
+                                  <a:cs typeface="Cambria Math" panose="02040503050406030204" charset="0"/>
+                                </a:rPr>
+                                <m:t>𝑗</m:t>
+                              </m:r>
+                              <m:r>
+                                <a:rPr lang="en-US" altLang="zh-CN" sz="1400" b="0" i="1">
+                                  <a:latin typeface="Cambria Math" panose="02040503050406030204" charset="0"/>
+                                  <a:cs typeface="Cambria Math" panose="02040503050406030204" charset="0"/>
+                                </a:rPr>
+                                <m:t>}</m:t>
+                              </m:r>
+                            </m:oMath>
+                          </a14:m>
+                          <a:endParaRPr lang="en-US" altLang="zh-CN" sz="1400" b="1">
+                            <a:latin typeface="Times New Roman" panose="02020603050405020304" charset="0"/>
+                            <a:cs typeface="Times New Roman" panose="02020603050405020304" charset="0"/>
+                          </a:endParaRPr>
+                        </a:p>
+                        <a:p>
+                          <a:pPr indent="0" fontAlgn="auto">
+                            <a:lnSpc>
+                              <a:spcPts val="1880"/>
+                            </a:lnSpc>
+                            <a:buNone/>
+                          </a:pPr>
+                          <a:r>
+                            <a:rPr lang="en-US" altLang="zh-CN" sz="1400" b="0">
+                              <a:latin typeface="Times New Roman" panose="02020603050405020304" charset="0"/>
+                              <a:cs typeface="Times New Roman" panose="02020603050405020304" charset="0"/>
+                            </a:rPr>
+                            <a:t>20:          </a:t>
+                          </a:r>
+                          <a14:m>
+                            <m:oMath xmlns:m="http://schemas.openxmlformats.org/officeDocument/2006/math">
+                              <m:sSub>
+                                <m:sSubPr>
+                                  <m:ctrlPr>
+                                    <a:rPr lang="en-US" altLang="zh-CN" sz="1400" b="0" i="1">
+                                      <a:latin typeface="Cambria Math" panose="02040503050406030204" charset="0"/>
+                                      <a:cs typeface="Cambria Math" panose="02040503050406030204" charset="0"/>
+                                    </a:rPr>
+                                  </m:ctrlPr>
+                                </m:sSubPr>
+                                <m:e>
+                                  <m:r>
+                                    <a:rPr lang="en-US" altLang="zh-CN" sz="1400" b="0" i="1">
+                                      <a:latin typeface="Cambria Math" panose="02040503050406030204" charset="0"/>
+                                      <a:cs typeface="Cambria Math" panose="02040503050406030204" charset="0"/>
+                                    </a:rPr>
+                                    <m:t>𝐴</m:t>
+                                  </m:r>
+                                </m:e>
+                                <m:sub>
+                                  <m:r>
+                                    <a:rPr lang="en-US" altLang="zh-CN" sz="1400" b="0" i="1">
+                                      <a:latin typeface="Cambria Math" panose="02040503050406030204" charset="0"/>
+                                      <a:cs typeface="Cambria Math" panose="02040503050406030204" charset="0"/>
+                                    </a:rPr>
+                                    <m:t>𝑗</m:t>
+                                  </m:r>
+                                </m:sub>
+                              </m:sSub>
+                              <m:r>
+                                <a:rPr lang="en-US" altLang="zh-CN" sz="1400" b="0" i="1">
+                                  <a:latin typeface="Cambria Math" panose="02040503050406030204" charset="0"/>
+                                  <a:cs typeface="Cambria Math" panose="02040503050406030204" charset="0"/>
+                                </a:rPr>
+                                <m:t>=</m:t>
+                              </m:r>
+                              <m:r>
+                                <a:rPr lang="en-US" altLang="zh-CN" sz="1400" i="1">
+                                  <a:latin typeface="Cambria Math" panose="02040503050406030204" charset="0"/>
+                                  <a:cs typeface="Cambria Math" panose="02040503050406030204" charset="0"/>
+                                </a:rPr>
+                                <m:t>∅  </m:t>
+                              </m:r>
+                              <m:sSub>
+                                <m:sSubPr>
+                                  <m:ctrlPr>
+                                    <a:rPr lang="en-US" altLang="zh-CN" sz="1400" i="1">
+                                      <a:latin typeface="Cambria Math" panose="02040503050406030204" charset="0"/>
+                                      <a:cs typeface="Cambria Math" panose="02040503050406030204" charset="0"/>
+                                    </a:rPr>
+                                  </m:ctrlPr>
+                                </m:sSubPr>
+                                <m:e>
+                                  <m:r>
+                                    <a:rPr lang="en-US" altLang="zh-CN" sz="1400" i="1">
+                                      <a:latin typeface="Cambria Math" panose="02040503050406030204" charset="0"/>
+                                      <a:cs typeface="Cambria Math" panose="02040503050406030204" charset="0"/>
+                                    </a:rPr>
+                                    <m:t>𝜀</m:t>
+                                  </m:r>
+                                </m:e>
+                                <m:sub>
+                                  <m:r>
+                                    <a:rPr lang="en-US" altLang="zh-CN" sz="1400" i="1">
+                                      <a:latin typeface="Cambria Math" panose="02040503050406030204" charset="0"/>
+                                      <a:cs typeface="Cambria Math" panose="02040503050406030204" charset="0"/>
+                                    </a:rPr>
+                                    <m:t>𝑗</m:t>
+                                  </m:r>
+                                </m:sub>
+                              </m:sSub>
+                              <m:r>
+                                <a:rPr lang="en-US" altLang="zh-CN" sz="1400" i="1">
+                                  <a:latin typeface="Cambria Math" panose="02040503050406030204" charset="0"/>
+                                  <a:cs typeface="Cambria Math" panose="02040503050406030204" charset="0"/>
+                                </a:rPr>
+                                <m:t>=</m:t>
+                              </m:r>
+                              <m:r>
+                                <a:rPr lang="en-US" altLang="zh-CN" sz="1400" i="1">
+                                  <a:latin typeface="Cambria Math" panose="02040503050406030204" charset="0"/>
+                                  <a:cs typeface="Cambria Math" panose="02040503050406030204" charset="0"/>
+                                </a:rPr>
+                                <m:t>∅</m:t>
+                              </m:r>
+                            </m:oMath>
+                          </a14:m>
+                          <a:endParaRPr lang="en-US" altLang="zh-CN" sz="1400" b="0" i="1">
+                            <a:latin typeface="Cambria Math" panose="02040503050406030204" charset="0"/>
+                            <a:cs typeface="Cambria Math" panose="02040503050406030204" charset="0"/>
+                          </a:endParaRPr>
+                        </a:p>
+                        <a:p>
+                          <a:pPr indent="0" fontAlgn="auto">
+                            <a:lnSpc>
+                              <a:spcPts val="1880"/>
+                            </a:lnSpc>
+                            <a:buNone/>
+                          </a:pPr>
+                          <a:r>
+                            <a:rPr lang="en-US" altLang="zh-CN" sz="1400" b="0">
+                              <a:latin typeface="Times New Roman" panose="02020603050405020304" charset="0"/>
+                              <a:cs typeface="Times New Roman" panose="02020603050405020304" charset="0"/>
+                            </a:rPr>
+                            <a:t>21:      </a:t>
+                          </a:r>
+                          <a:r>
+                            <a:rPr lang="en-US" altLang="zh-CN" sz="1400" b="1">
+                              <a:latin typeface="Times New Roman" panose="02020603050405020304" charset="0"/>
+                              <a:cs typeface="Times New Roman" panose="02020603050405020304" charset="0"/>
+                            </a:rPr>
+                            <a:t>end if</a:t>
+                          </a:r>
+                          <a:endParaRPr lang="en-US" altLang="zh-CN" sz="1400" i="1">
+                            <a:latin typeface="Cambria Math" panose="02040503050406030204" charset="0"/>
+                            <a:cs typeface="Cambria Math" panose="02040503050406030204" charset="0"/>
+                          </a:endParaRPr>
+                        </a:p>
+                        <a:p>
+                          <a:pPr indent="0" fontAlgn="auto">
+                            <a:lnSpc>
+                              <a:spcPts val="1880"/>
+                            </a:lnSpc>
+                            <a:buNone/>
+                          </a:pPr>
+                          <a:r>
+                            <a:rPr lang="en-US" altLang="zh-CN" sz="1400" b="0">
+                              <a:latin typeface="Times New Roman" panose="02020603050405020304" charset="0"/>
+                              <a:cs typeface="Times New Roman" panose="02020603050405020304" charset="0"/>
+                            </a:rPr>
+                            <a:t>22:   </a:t>
+                          </a:r>
+                          <a:r>
+                            <a:rPr lang="en-US" altLang="zh-CN" sz="1400" b="1">
+                              <a:latin typeface="Times New Roman" panose="02020603050405020304" charset="0"/>
+                              <a:cs typeface="Times New Roman" panose="02020603050405020304" charset="0"/>
+                            </a:rPr>
+                            <a:t>end for</a:t>
+                          </a:r>
+                          <a:endParaRPr lang="en-US" altLang="zh-CN" sz="1400" b="1">
+                            <a:latin typeface="Times New Roman" panose="02020603050405020304" charset="0"/>
+                            <a:cs typeface="Times New Roman" panose="02020603050405020304" charset="0"/>
+                          </a:endParaRPr>
+                        </a:p>
+                        <a:p>
+                          <a:pPr indent="0" fontAlgn="auto">
+                            <a:lnSpc>
+                              <a:spcPts val="1880"/>
+                            </a:lnSpc>
+                            <a:buNone/>
+                          </a:pPr>
+                          <a:r>
+                            <a:rPr lang="en-US" altLang="zh-CN" sz="1400">
+                              <a:latin typeface="Times New Roman" panose="02020603050405020304" charset="0"/>
+                              <a:cs typeface="Times New Roman" panose="02020603050405020304" charset="0"/>
+                              <a:sym typeface="+mn-ea"/>
+                            </a:rPr>
+                            <a:t>23:   </a:t>
+                          </a:r>
+                          <a14:m>
+                            <m:oMath xmlns:m="http://schemas.openxmlformats.org/officeDocument/2006/math">
+                              <m:bar>
+                                <m:barPr>
+                                  <m:pos m:val="top"/>
+                                  <m:ctrlPr>
+                                    <a:rPr lang="en-US" altLang="zh-CN" sz="1400" b="0" i="1">
+                                      <a:latin typeface="Cambria Math" panose="02040503050406030204" charset="0"/>
+                                      <a:cs typeface="Cambria Math" panose="02040503050406030204" charset="0"/>
+                                    </a:rPr>
+                                  </m:ctrlPr>
+                                </m:barPr>
+                                <m:e>
+                                  <m:r>
+                                    <a:rPr lang="en-US" altLang="zh-CN" sz="1400" b="0" i="1">
+                                      <a:latin typeface="Cambria Math" panose="02040503050406030204" charset="0"/>
+                                      <a:cs typeface="Cambria Math" panose="02040503050406030204" charset="0"/>
+                                    </a:rPr>
+                                    <m:t>𝑉</m:t>
+                                  </m:r>
+                                </m:e>
+                              </m:bar>
+                              <m:r>
+                                <a:rPr lang="en-US" altLang="zh-CN" sz="1400" b="0" i="1">
+                                  <a:latin typeface="Cambria Math" panose="02040503050406030204" charset="0"/>
+                                  <a:cs typeface="Cambria Math" panose="02040503050406030204" charset="0"/>
+                                </a:rPr>
+                                <m:t>=(</m:t>
+                              </m:r>
+                              <m:bar>
+                                <m:barPr>
+                                  <m:pos m:val="top"/>
+                                  <m:ctrlPr>
+                                    <a:rPr lang="en-US" altLang="zh-CN" sz="1400" b="0" i="1">
+                                      <a:latin typeface="Cambria Math" panose="02040503050406030204" charset="0"/>
+                                      <a:cs typeface="Cambria Math" panose="02040503050406030204" charset="0"/>
+                                    </a:rPr>
+                                  </m:ctrlPr>
+                                </m:barPr>
+                                <m:e>
+                                  <m:r>
+                                    <a:rPr lang="en-US" altLang="zh-CN" sz="1400" b="0" i="1">
+                                      <a:latin typeface="Cambria Math" panose="02040503050406030204" charset="0"/>
+                                      <a:cs typeface="Cambria Math" panose="02040503050406030204" charset="0"/>
+                                    </a:rPr>
+                                    <m:t>𝑉</m:t>
+                                  </m:r>
+                                </m:e>
+                              </m:bar>
+                              <m:r>
+                                <a:rPr lang="en-US" altLang="zh-CN" sz="1400" i="1">
+                                  <a:latin typeface="Cambria Math" panose="02040503050406030204" charset="0"/>
+                                  <a:cs typeface="Cambria Math" panose="02040503050406030204" charset="0"/>
+                                </a:rPr>
+                                <m:t>∪{</m:t>
+                              </m:r>
+                              <m:r>
+                                <a:rPr lang="en-US" altLang="zh-CN" sz="1400" i="1">
+                                  <a:latin typeface="Cambria Math" panose="02040503050406030204" charset="0"/>
+                                  <a:cs typeface="Cambria Math" panose="02040503050406030204" charset="0"/>
+                                </a:rPr>
+                                <m:t>𝑝</m:t>
+                              </m:r>
+                              <m:r>
+                                <a:rPr lang="en-US" altLang="zh-CN" sz="1400" i="1">
+                                  <a:latin typeface="Cambria Math" panose="02040503050406030204" charset="0"/>
+                                  <a:cs typeface="Cambria Math" panose="02040503050406030204" charset="0"/>
+                                </a:rPr>
+                                <m:t>}</m:t>
+                              </m:r>
+                              <m:r>
+                                <a:rPr lang="en-US" altLang="zh-CN" sz="1400" b="0" i="1">
+                                  <a:latin typeface="Cambria Math" panose="02040503050406030204" charset="0"/>
+                                  <a:cs typeface="Cambria Math" panose="02040503050406030204" charset="0"/>
+                                </a:rPr>
+                                <m:t>)\</m:t>
+                              </m:r>
+                              <m:sSub>
+                                <m:sSubPr>
+                                  <m:ctrlPr>
+                                    <a:rPr lang="en-US" altLang="zh-CN" sz="1400" b="0" i="1">
+                                      <a:latin typeface="Cambria Math" panose="02040503050406030204" charset="0"/>
+                                      <a:cs typeface="Cambria Math" panose="02040503050406030204" charset="0"/>
+                                    </a:rPr>
+                                  </m:ctrlPr>
+                                </m:sSubPr>
+                                <m:e>
+                                  <m:r>
+                                    <a:rPr lang="en-US" altLang="zh-CN" sz="1400" i="1">
+                                      <a:latin typeface="Cambria Math" panose="02040503050406030204" charset="0"/>
+                                      <a:cs typeface="Cambria Math" panose="02040503050406030204" charset="0"/>
+                                    </a:rPr>
+                                    <m:t>𝜀</m:t>
+                                  </m:r>
+                                </m:e>
+                                <m:sub>
+                                  <m:r>
+                                    <a:rPr lang="en-US" altLang="zh-CN" sz="1400" b="0" i="1">
+                                      <a:latin typeface="Cambria Math" panose="02040503050406030204" charset="0"/>
+                                      <a:cs typeface="Cambria Math" panose="02040503050406030204" charset="0"/>
+                                    </a:rPr>
+                                    <m:t>𝑝</m:t>
+                                  </m:r>
+                                </m:sub>
+                              </m:sSub>
+                            </m:oMath>
+                          </a14:m>
+                          <a:endParaRPr lang="en-US" altLang="zh-CN" sz="1400" b="1">
+                            <a:latin typeface="Times New Roman" panose="02020603050405020304" charset="0"/>
+                            <a:cs typeface="Times New Roman" panose="02020603050405020304" charset="0"/>
+                          </a:endParaRPr>
+                        </a:p>
+                        <a:p>
+                          <a:pPr indent="0" fontAlgn="auto">
+                            <a:lnSpc>
+                              <a:spcPts val="1880"/>
+                            </a:lnSpc>
+                            <a:buNone/>
+                          </a:pPr>
+                          <a:r>
+                            <a:rPr lang="en-US" altLang="zh-CN" sz="1400">
+                              <a:latin typeface="Times New Roman" panose="02020603050405020304" charset="0"/>
+                              <a:cs typeface="Times New Roman" panose="02020603050405020304" charset="0"/>
+                              <a:sym typeface="+mn-ea"/>
+                            </a:rPr>
+                            <a:t>24:   </a:t>
+                          </a:r>
+                          <a14:m>
+                            <m:oMath xmlns:m="http://schemas.openxmlformats.org/officeDocument/2006/math">
+                              <m:r>
+                                <a:rPr lang="en-US" altLang="zh-CN" sz="1400" b="0" i="1">
+                                  <a:latin typeface="Cambria Math" panose="02040503050406030204" charset="0"/>
+                                  <a:cs typeface="Cambria Math" panose="02040503050406030204" charset="0"/>
+                                </a:rPr>
+                                <m:t>𝑉</m:t>
+                              </m:r>
+                              <m:r>
+                                <a:rPr lang="en-US" altLang="zh-CN" sz="1400" b="0" i="1">
+                                  <a:latin typeface="Cambria Math" panose="02040503050406030204" charset="0"/>
+                                  <a:cs typeface="Cambria Math" panose="02040503050406030204" charset="0"/>
+                                </a:rPr>
+                                <m:t>=</m:t>
+                              </m:r>
+                              <m:r>
+                                <a:rPr lang="en-US" altLang="zh-CN" sz="1400" b="0" i="1">
+                                  <a:latin typeface="Cambria Math" panose="02040503050406030204" charset="0"/>
+                                  <a:cs typeface="Cambria Math" panose="02040503050406030204" charset="0"/>
+                                </a:rPr>
+                                <m:t>𝑉</m:t>
+                              </m:r>
+                              <m:r>
+                                <a:rPr lang="en-US" altLang="zh-CN" sz="1400" b="0" i="1">
+                                  <a:latin typeface="Cambria Math" panose="02040503050406030204" charset="0"/>
+                                  <a:cs typeface="Cambria Math" panose="02040503050406030204" charset="0"/>
+                                </a:rPr>
+                                <m:t>\{</m:t>
+                              </m:r>
+                              <m:r>
+                                <a:rPr lang="en-US" altLang="zh-CN" sz="1400" b="0" i="1">
+                                  <a:latin typeface="Cambria Math" panose="02040503050406030204" charset="0"/>
+                                  <a:cs typeface="Cambria Math" panose="02040503050406030204" charset="0"/>
+                                </a:rPr>
+                                <m:t>𝑝</m:t>
+                              </m:r>
+                              <m:r>
+                                <a:rPr lang="en-US" altLang="zh-CN" sz="1400" b="0" i="1">
+                                  <a:latin typeface="Cambria Math" panose="02040503050406030204" charset="0"/>
+                                  <a:cs typeface="Cambria Math" panose="02040503050406030204" charset="0"/>
+                                </a:rPr>
+                                <m:t>}</m:t>
+                              </m:r>
+                            </m:oMath>
+                          </a14:m>
+                          <a:endParaRPr lang="en-US" altLang="zh-CN" sz="1400" i="1">
+                            <a:latin typeface="Cambria Math" panose="02040503050406030204" charset="0"/>
+                            <a:cs typeface="Cambria Math" panose="02040503050406030204" charset="0"/>
+                          </a:endParaRPr>
+                        </a:p>
+                        <a:p>
+                          <a:pPr indent="0" fontAlgn="auto">
+                            <a:lnSpc>
+                              <a:spcPts val="1880"/>
+                            </a:lnSpc>
+                            <a:buNone/>
+                          </a:pPr>
+                          <a:r>
+                            <a:rPr lang="en-US" altLang="zh-CN" sz="1400">
+                              <a:latin typeface="Times New Roman" panose="02020603050405020304" charset="0"/>
+                              <a:cs typeface="Times New Roman" panose="02020603050405020304" charset="0"/>
+                              <a:sym typeface="+mn-ea"/>
+                            </a:rPr>
+                            <a:t>25:   </a:t>
+                          </a:r>
+                          <a14:m>
+                            <m:oMath xmlns:m="http://schemas.openxmlformats.org/officeDocument/2006/math">
+                              <m:sSub>
+                                <m:sSubPr>
+                                  <m:ctrlPr>
+                                    <a:rPr lang="en-US" altLang="zh-CN" sz="1400" b="0" i="1">
+                                      <a:latin typeface="Cambria Math" panose="02040503050406030204" charset="0"/>
+                                      <a:cs typeface="Cambria Math" panose="02040503050406030204" charset="0"/>
+                                    </a:rPr>
+                                  </m:ctrlPr>
+                                </m:sSubPr>
+                                <m:e>
+                                  <m:r>
+                                    <a:rPr lang="en-US" altLang="zh-CN" sz="1400" b="0" i="1">
+                                      <a:latin typeface="Cambria Math" panose="02040503050406030204" charset="0"/>
+                                      <a:cs typeface="Cambria Math" panose="02040503050406030204" charset="0"/>
+                                    </a:rPr>
+                                    <m:t>𝐴</m:t>
+                                  </m:r>
+                                </m:e>
+                                <m:sub>
+                                  <m:r>
+                                    <a:rPr lang="en-US" altLang="zh-CN" sz="1400" b="0" i="1">
+                                      <a:latin typeface="Cambria Math" panose="02040503050406030204" charset="0"/>
+                                      <a:cs typeface="Cambria Math" panose="02040503050406030204" charset="0"/>
+                                    </a:rPr>
+                                    <m:t>𝑝</m:t>
+                                  </m:r>
+                                </m:sub>
+                              </m:sSub>
+                              <m:r>
+                                <a:rPr lang="en-US" altLang="zh-CN" sz="1400" b="0" i="1">
+                                  <a:latin typeface="Cambria Math" panose="02040503050406030204" charset="0"/>
+                                  <a:cs typeface="Cambria Math" panose="02040503050406030204" charset="0"/>
+                                </a:rPr>
+                                <m:t>=</m:t>
+                              </m:r>
+                              <m:r>
+                                <a:rPr lang="en-US" altLang="zh-CN" sz="1400" i="1">
+                                  <a:latin typeface="Cambria Math" panose="02040503050406030204" charset="0"/>
+                                  <a:cs typeface="Cambria Math" panose="02040503050406030204" charset="0"/>
+                                </a:rPr>
+                                <m:t>∅</m:t>
+                              </m:r>
+                            </m:oMath>
+                          </a14:m>
+                          <a:r>
+                            <a:rPr lang="en-US" altLang="zh-CN" sz="1400" i="1">
+                              <a:latin typeface="Cambria Math" panose="02040503050406030204" charset="0"/>
+                              <a:cs typeface="Cambria Math" panose="02040503050406030204" charset="0"/>
+                              <a:sym typeface="+mn-ea"/>
+                            </a:rPr>
+                            <a:t> </a:t>
+                          </a:r>
+                          <a:r>
+                            <a:rPr lang="en-US" altLang="zh-CN" sz="1400">
+                              <a:latin typeface="Cambria Math" panose="02040503050406030204" charset="0"/>
+                              <a:cs typeface="Cambria Math" panose="02040503050406030204" charset="0"/>
+                              <a:sym typeface="+mn-ea"/>
+                            </a:rPr>
+                            <a:t>; </a:t>
+                          </a:r>
+                          <a14:m>
+                            <m:oMath xmlns:m="http://schemas.openxmlformats.org/officeDocument/2006/math">
+                              <m:sSub>
+                                <m:sSubPr>
+                                  <m:ctrlPr>
+                                    <a:rPr lang="en-US" altLang="zh-CN" sz="1400" i="1">
+                                      <a:latin typeface="Cambria Math" panose="02040503050406030204" charset="0"/>
+                                      <a:cs typeface="Cambria Math" panose="02040503050406030204" charset="0"/>
+                                    </a:rPr>
+                                  </m:ctrlPr>
+                                </m:sSubPr>
+                                <m:e>
+                                  <m:r>
+                                    <a:rPr lang="en-US" altLang="zh-CN" sz="1400" i="1">
+                                      <a:latin typeface="Cambria Math" panose="02040503050406030204" charset="0"/>
+                                      <a:cs typeface="Cambria Math" panose="02040503050406030204" charset="0"/>
+                                    </a:rPr>
+                                    <m:t>𝜀</m:t>
+                                  </m:r>
+                                </m:e>
+                                <m:sub>
+                                  <m:r>
+                                    <a:rPr lang="en-US" altLang="zh-CN" sz="1400" i="1">
+                                      <a:latin typeface="Cambria Math" panose="02040503050406030204" charset="0"/>
+                                      <a:cs typeface="Cambria Math" panose="02040503050406030204" charset="0"/>
+                                    </a:rPr>
+                                    <m:t>𝑝</m:t>
+                                  </m:r>
+                                </m:sub>
+                              </m:sSub>
+                              <m:r>
+                                <a:rPr lang="en-US" altLang="zh-CN" sz="1400" i="1">
+                                  <a:latin typeface="Cambria Math" panose="02040503050406030204" charset="0"/>
+                                  <a:cs typeface="Cambria Math" panose="02040503050406030204" charset="0"/>
+                                </a:rPr>
+                                <m:t>=∅</m:t>
+                              </m:r>
+                            </m:oMath>
+                          </a14:m>
+                          <a:endParaRPr lang="en-US" altLang="zh-CN" sz="1400" i="1">
+                            <a:latin typeface="Cambria Math" panose="02040503050406030204" charset="0"/>
+                            <a:cs typeface="Cambria Math" panose="02040503050406030204" charset="0"/>
+                          </a:endParaRPr>
+                        </a:p>
+                        <a:p>
+                          <a:pPr indent="0" fontAlgn="auto">
+                            <a:lnSpc>
+                              <a:spcPts val="1880"/>
+                            </a:lnSpc>
+                            <a:buNone/>
+                          </a:pPr>
+                          <a:r>
+                            <a:rPr lang="en-US" altLang="zh-CN" sz="1400">
+                              <a:latin typeface="Times New Roman" panose="02020603050405020304" charset="0"/>
+                              <a:cs typeface="Times New Roman" panose="02020603050405020304" charset="0"/>
+                              <a:sym typeface="+mn-ea"/>
+                            </a:rPr>
+                            <a:t>27:   </a:t>
+                          </a:r>
+                          <a14:m>
+                            <m:oMath xmlns:m="http://schemas.openxmlformats.org/officeDocument/2006/math">
+                              <m:r>
+                                <a:rPr lang="en-US" altLang="zh-CN" sz="1400" b="0" i="1">
+                                  <a:latin typeface="Cambria Math" panose="02040503050406030204" charset="0"/>
+                                  <a:cs typeface="Cambria Math" panose="02040503050406030204" charset="0"/>
+                                </a:rPr>
+                                <m:t>𝑘</m:t>
+                              </m:r>
+                              <m:r>
+                                <a:rPr lang="en-US" altLang="zh-CN" sz="1400" b="0" i="1">
+                                  <a:latin typeface="Cambria Math" panose="02040503050406030204" charset="0"/>
+                                  <a:cs typeface="Cambria Math" panose="02040503050406030204" charset="0"/>
+                                </a:rPr>
+                                <m:t> = </m:t>
+                              </m:r>
+                              <m:r>
+                                <a:rPr lang="en-US" altLang="zh-CN" sz="1400" b="0" i="1">
+                                  <a:latin typeface="Cambria Math" panose="02040503050406030204" charset="0"/>
+                                  <a:cs typeface="Cambria Math" panose="02040503050406030204" charset="0"/>
+                                </a:rPr>
+                                <m:t>𝑘</m:t>
+                              </m:r>
+                              <m:r>
+                                <a:rPr lang="en-US" altLang="zh-CN" sz="1400" b="0" i="1">
+                                  <a:latin typeface="Cambria Math" panose="02040503050406030204" charset="0"/>
+                                  <a:cs typeface="Cambria Math" panose="02040503050406030204" charset="0"/>
+                                </a:rPr>
+                                <m:t>+</m:t>
+                              </m:r>
+                              <m:d>
+                                <m:dPr>
+                                  <m:begChr m:val="|"/>
+                                  <m:endChr m:val="|"/>
+                                  <m:ctrlPr>
+                                    <a:rPr lang="en-US" altLang="zh-CN" sz="1400" b="0" i="1">
+                                      <a:latin typeface="Cambria Math" panose="02040503050406030204" charset="0"/>
+                                      <a:cs typeface="Cambria Math" panose="02040503050406030204" charset="0"/>
+                                    </a:rPr>
+                                  </m:ctrlPr>
+                                </m:dPr>
+                                <m:e>
+                                  <m:r>
+                                    <a:rPr lang="en-US" altLang="zh-CN" sz="1400" b="1" i="1">
+                                      <a:latin typeface="Cambria Math" panose="02040503050406030204" charset="0"/>
+                                      <a:cs typeface="Cambria Math" panose="02040503050406030204" charset="0"/>
+                                    </a:rPr>
+                                    <m:t>𝒑</m:t>
+                                  </m:r>
+                                </m:e>
+                              </m:d>
+                            </m:oMath>
+                          </a14:m>
+                          <a:endParaRPr lang="en-US" altLang="zh-CN" sz="1400" b="0" i="1">
+                            <a:latin typeface="Cambria Math" panose="02040503050406030204" charset="0"/>
+                            <a:cs typeface="Cambria Math" panose="02040503050406030204" charset="0"/>
+                          </a:endParaRPr>
+                        </a:p>
+                        <a:p>
+                          <a:pPr indent="0" fontAlgn="auto">
+                            <a:lnSpc>
+                              <a:spcPts val="1880"/>
+                            </a:lnSpc>
+                            <a:buNone/>
+                          </a:pPr>
+                          <a:r>
+                            <a:rPr lang="en-US" altLang="zh-CN" sz="1400">
+                              <a:latin typeface="Times New Roman" panose="02020603050405020304" charset="0"/>
+                              <a:cs typeface="Times New Roman" panose="02020603050405020304" charset="0"/>
+                              <a:sym typeface="+mn-ea"/>
+                            </a:rPr>
+                            <a:t>28:</a:t>
+                          </a:r>
+                          <a:r>
+                            <a:rPr lang="en-US" altLang="zh-CN" sz="1400" b="1">
+                              <a:latin typeface="Times New Roman" panose="02020603050405020304" charset="0"/>
+                              <a:cs typeface="Times New Roman" panose="02020603050405020304" charset="0"/>
+                              <a:sym typeface="+mn-ea"/>
+                            </a:rPr>
+                            <a:t>end while</a:t>
+                          </a:r>
+                          <a:endParaRPr lang="en-US" altLang="zh-CN" sz="1400" b="1">
+                            <a:latin typeface="Times New Roman" panose="02020603050405020304" charset="0"/>
+                            <a:cs typeface="Times New Roman" panose="02020603050405020304" charset="0"/>
+                          </a:endParaRPr>
+                        </a:p>
+                        <a:p>
+                          <a:pPr indent="0" fontAlgn="auto">
+                            <a:lnSpc>
+                              <a:spcPts val="1880"/>
+                            </a:lnSpc>
+                            <a:buNone/>
+                          </a:pPr>
+                          <a:r>
+                            <a:rPr lang="en-US" altLang="zh-CN" sz="1400">
+                              <a:latin typeface="Times New Roman" panose="02020603050405020304" charset="0"/>
+                              <a:cs typeface="Times New Roman" panose="02020603050405020304" charset="0"/>
+                              <a:sym typeface="+mn-ea"/>
+                            </a:rPr>
+                            <a:t>29:return perm</a:t>
                           </a:r>
                           <a:endParaRPr lang="en-US" altLang="zh-CN" sz="1400" b="1">
                             <a:latin typeface="Times New Roman" panose="02020603050405020304" charset="0"/>
@@ -11461,7 +13755,7 @@
                       </a:tcPr>
                     </a:tc>
                   </a:tr>
-                  <a:tr h="2956560">
+                  <a:tr h="7254240">
                     <a:tc>
                       <a:txBody>
                         <a:bodyPr/>
